--- a/presentacion/2026_Presentacion_TPGrupal_El_precio_del_juego.pptx
+++ b/presentacion/2026_Presentacion_TPGrupal_El_precio_del_juego.pptx
@@ -5,7 +5,7 @@
     <p:sldMasterId id="2147483648" r:id="rId1"/>
   </p:sldMasterIdLst>
   <p:notesMasterIdLst>
-    <p:notesMasterId r:id="rId11"/>
+    <p:notesMasterId r:id="rId12"/>
   </p:notesMasterIdLst>
   <p:sldIdLst>
     <p:sldId id="256" r:id="rId2"/>
@@ -17,6 +17,7 @@
     <p:sldId id="262" r:id="rId8"/>
     <p:sldId id="263" r:id="rId9"/>
     <p:sldId id="264" r:id="rId10"/>
+    <p:sldId id="265" r:id="rId11"/>
   </p:sldIdLst>
   <p:sldSz cx="12192000" cy="6858000"/>
   <p:notesSz cx="6858000" cy="12192000"/>
@@ -145,7 +146,7 @@
     </p:spTree>
     <p:extLst>
       <p:ext uri="{BB962C8B-B14F-4D97-AF65-F5344CB8AC3E}">
-        <p14:creationId xmlns:p14="http://schemas.microsoft.com/office/powerpoint/2010/main" val="855619772"/>
+        <p14:creationId xmlns:p14="http://schemas.microsoft.com/office/powerpoint/2010/main" val="1149135588"/>
       </p:ext>
     </p:extLst>
   </p:cSld>
@@ -311,6 +312,90 @@
             <a:fld id="{F7021451-1387-4CA6-816F-3879F97B5CBC}" type="slidenum">
               <a:rPr lang="en-US"/>
               <a:t>1</a:t>
+            </a:fld>
+            <a:endParaRPr lang="en-US"/>
+          </a:p>
+        </p:txBody>
+      </p:sp>
+    </p:spTree>
+    <p:extLst>
+      <p:ext uri="{BB962C8B-B14F-4D97-AF65-F5344CB8AC3E}">
+        <p14:creationId xmlns:p14="http://schemas.microsoft.com/office/powerpoint/2010/main" val="1024086991"/>
+      </p:ext>
+    </p:extLst>
+  </p:cSld>
+  <p:clrMapOvr>
+    <a:masterClrMapping/>
+  </p:clrMapOvr>
+</p:notes>
+</file>
+
+<file path=ppt/notesSlides/notesSlide10.xml><?xml version="1.0" encoding="utf-8"?>
+<p:notes xmlns:a="http://schemas.openxmlformats.org/drawingml/2006/main" xmlns:r="http://schemas.openxmlformats.org/officeDocument/2006/relationships" xmlns:p="http://schemas.openxmlformats.org/presentationml/2006/main">
+  <p:cSld>
+    <p:spTree>
+      <p:nvGrpSpPr>
+        <p:cNvPr id="1" name=""/>
+        <p:cNvGrpSpPr/>
+        <p:nvPr/>
+      </p:nvGrpSpPr>
+      <p:grpSpPr>
+        <a:xfrm>
+          <a:off x="0" y="0"/>
+          <a:ext cx="0" cy="0"/>
+          <a:chOff x="0" y="0"/>
+          <a:chExt cx="0" cy="0"/>
+        </a:xfrm>
+      </p:grpSpPr>
+      <p:sp>
+        <p:nvSpPr>
+          <p:cNvPr id="2" name="Slide Image Placeholder 1"/>
+          <p:cNvSpPr>
+            <a:spLocks noGrp="1" noRot="1" noChangeAspect="1"/>
+          </p:cNvSpPr>
+          <p:nvPr>
+            <p:ph type="sldImg"/>
+          </p:nvPr>
+        </p:nvSpPr>
+        <p:spPr/>
+      </p:sp>
+      <p:sp>
+        <p:nvSpPr>
+          <p:cNvPr id="3" name="Notes Placeholder 2"/>
+          <p:cNvSpPr>
+            <a:spLocks noGrp="1"/>
+          </p:cNvSpPr>
+          <p:nvPr>
+            <p:ph type="body" idx="1"/>
+          </p:nvPr>
+        </p:nvSpPr>
+        <p:spPr/>
+        <p:txBody>
+          <a:bodyPr/>
+          <a:lstStyle/>
+          <a:p>
+            <a:endParaRPr lang="en-US" dirty="0"/>
+          </a:p>
+        </p:txBody>
+      </p:sp>
+      <p:sp>
+        <p:nvSpPr>
+          <p:cNvPr id="4" name="Slide Number Placeholder 3"/>
+          <p:cNvSpPr>
+            <a:spLocks noGrp="1"/>
+          </p:cNvSpPr>
+          <p:nvPr>
+            <p:ph type="sldNum" sz="quarter" idx="10"/>
+          </p:nvPr>
+        </p:nvSpPr>
+        <p:spPr/>
+        <p:txBody>
+          <a:bodyPr/>
+          <a:lstStyle/>
+          <a:p>
+            <a:fld id="{F7021451-1387-4CA6-816F-3879F97B5CBC}" type="slidenum">
+              <a:rPr lang="en-US"/>
+              <a:t>10</a:t>
             </a:fld>
             <a:endParaRPr lang="en-US"/>
           </a:p>
@@ -1793,7 +1878,7 @@
                 <a:ea typeface="Georgia" pitchFamily="34" charset="-122"/>
                 <a:cs typeface="Georgia" pitchFamily="34" charset="-120"/>
               </a:rPr>
-              <a:t>r = 0,77</a:t>
+              <a:t>r = 0,76</a:t>
             </a:r>
             <a:endParaRPr lang="en-US" sz="2400" dirty="0"/>
           </a:p>
@@ -2020,9 +2105,713 @@
                 <a:ea typeface="Calibri" pitchFamily="34" charset="-122"/>
                 <a:cs typeface="Calibri" pitchFamily="34" charset="-120"/>
               </a:rPr>
-              <a:t>Trabajo Práctico Grupal  ·  1er Cuatrimestre 2026</a:t>
+              <a:t>Trabajo Práctico Grupal  ·  1.er Cuatrimestre 2026</a:t>
             </a:r>
             <a:endParaRPr lang="en-US" sz="1100" dirty="0"/>
+          </a:p>
+        </p:txBody>
+      </p:sp>
+    </p:spTree>
+  </p:cSld>
+  <p:clrMapOvr>
+    <a:masterClrMapping/>
+  </p:clrMapOvr>
+</p:sld>
+</file>
+
+<file path=ppt/slides/slide10.xml><?xml version="1.0" encoding="utf-8"?>
+<p:sld xmlns:a="http://schemas.openxmlformats.org/drawingml/2006/main" xmlns:r="http://schemas.openxmlformats.org/officeDocument/2006/relationships" xmlns:p="http://schemas.openxmlformats.org/presentationml/2006/main">
+  <p:cSld name="Slide 10">
+    <p:bg>
+      <p:bgPr>
+        <a:solidFill>
+          <a:srgbClr val="FFFFFF"/>
+        </a:solidFill>
+        <a:effectLst/>
+      </p:bgPr>
+    </p:bg>
+    <p:spTree>
+      <p:nvGrpSpPr>
+        <p:cNvPr id="1" name=""/>
+        <p:cNvGrpSpPr/>
+        <p:nvPr/>
+      </p:nvGrpSpPr>
+      <p:grpSpPr>
+        <a:xfrm>
+          <a:off x="0" y="0"/>
+          <a:ext cx="0" cy="0"/>
+          <a:chOff x="0" y="0"/>
+          <a:chExt cx="0" cy="0"/>
+        </a:xfrm>
+      </p:grpSpPr>
+      <p:sp>
+        <p:nvSpPr>
+          <p:cNvPr id="2" name="Text 0"/>
+          <p:cNvSpPr/>
+          <p:nvPr/>
+        </p:nvSpPr>
+        <p:spPr>
+          <a:xfrm>
+            <a:off x="10040112" y="164592"/>
+            <a:ext cx="1828800" cy="1371600"/>
+          </a:xfrm>
+          <a:prstGeom prst="rect">
+            <a:avLst/>
+          </a:prstGeom>
+          <a:noFill/>
+          <a:ln/>
+        </p:spPr>
+        <p:txBody>
+          <a:bodyPr wrap="square" lIns="0" tIns="0" rIns="0" bIns="0" rtlCol="0" anchor="t"/>
+          <a:lstStyle/>
+          <a:p>
+            <a:pPr marL="0" indent="0" algn="r">
+              <a:buNone/>
+            </a:pPr>
+            <a:r>
+              <a:rPr lang="en-US" sz="9600" b="1" dirty="0">
+                <a:solidFill>
+                  <a:srgbClr val="F1E2E6"/>
+                </a:solidFill>
+                <a:latin typeface="Georgia" pitchFamily="34" charset="0"/>
+                <a:ea typeface="Georgia" pitchFamily="34" charset="-122"/>
+                <a:cs typeface="Georgia" pitchFamily="34" charset="-120"/>
+              </a:rPr>
+              <a:t>08</a:t>
+            </a:r>
+            <a:endParaRPr lang="en-US" sz="9600" dirty="0"/>
+          </a:p>
+        </p:txBody>
+      </p:sp>
+      <p:sp>
+        <p:nvSpPr>
+          <p:cNvPr id="3" name="Text 1"/>
+          <p:cNvSpPr/>
+          <p:nvPr/>
+        </p:nvSpPr>
+        <p:spPr>
+          <a:xfrm>
+            <a:off x="777240" y="502920"/>
+            <a:ext cx="8229600" cy="274320"/>
+          </a:xfrm>
+          <a:prstGeom prst="rect">
+            <a:avLst/>
+          </a:prstGeom>
+          <a:noFill/>
+          <a:ln/>
+        </p:spPr>
+        <p:txBody>
+          <a:bodyPr wrap="square" lIns="0" tIns="0" rIns="0" bIns="0" rtlCol="0" anchor="ctr"/>
+          <a:lstStyle/>
+          <a:p>
+            <a:pPr marL="0" indent="0" algn="l">
+              <a:buNone/>
+            </a:pPr>
+            <a:r>
+              <a:rPr lang="en-US" sz="1150" b="1" kern="0" spc="300" dirty="0">
+                <a:solidFill>
+                  <a:srgbClr val="B8862B"/>
+                </a:solidFill>
+                <a:latin typeface="Calibri" pitchFamily="34" charset="0"/>
+                <a:ea typeface="Calibri" pitchFamily="34" charset="-122"/>
+                <a:cs typeface="Calibri" pitchFamily="34" charset="-120"/>
+              </a:rPr>
+              <a:t>REFLEXIÓN METODOLÓGICA</a:t>
+            </a:r>
+            <a:endParaRPr lang="en-US" sz="1150" dirty="0"/>
+          </a:p>
+        </p:txBody>
+      </p:sp>
+      <p:sp>
+        <p:nvSpPr>
+          <p:cNvPr id="4" name="Text 2"/>
+          <p:cNvSpPr/>
+          <p:nvPr/>
+        </p:nvSpPr>
+        <p:spPr>
+          <a:xfrm>
+            <a:off x="777240" y="896112"/>
+            <a:ext cx="10058400" cy="914400"/>
+          </a:xfrm>
+          <a:prstGeom prst="rect">
+            <a:avLst/>
+          </a:prstGeom>
+          <a:noFill/>
+          <a:ln/>
+        </p:spPr>
+        <p:txBody>
+          <a:bodyPr wrap="square" lIns="0" tIns="0" rIns="0" bIns="0" rtlCol="0" anchor="t"/>
+          <a:lstStyle/>
+          <a:p>
+            <a:pPr marL="0" indent="0" algn="l">
+              <a:lnSpc>
+                <a:spcPct val="98000"/>
+              </a:lnSpc>
+              <a:buNone/>
+            </a:pPr>
+            <a:r>
+              <a:rPr lang="en-US" sz="4000" b="1" dirty="0">
+                <a:solidFill>
+                  <a:srgbClr val="23191B"/>
+                </a:solidFill>
+                <a:latin typeface="Georgia" pitchFamily="34" charset="0"/>
+                <a:ea typeface="Georgia" pitchFamily="34" charset="-122"/>
+                <a:cs typeface="Georgia" pitchFamily="34" charset="-120"/>
+              </a:rPr>
+              <a:t>Cómo se </a:t>
+            </a:r>
+            <a:r>
+              <a:rPr lang="en-US" sz="4000" b="1" dirty="0">
+                <a:solidFill>
+                  <a:srgbClr val="8E1F3D"/>
+                </a:solidFill>
+                <a:latin typeface="Georgia" pitchFamily="34" charset="0"/>
+                <a:ea typeface="Georgia" pitchFamily="34" charset="-122"/>
+                <a:cs typeface="Georgia" pitchFamily="34" charset="-120"/>
+              </a:rPr>
+              <a:t>hizo</a:t>
+            </a:r>
+            <a:endParaRPr lang="en-US" sz="4000" dirty="0"/>
+          </a:p>
+        </p:txBody>
+      </p:sp>
+      <p:sp>
+        <p:nvSpPr>
+          <p:cNvPr id="5" name="Shape 3"/>
+          <p:cNvSpPr/>
+          <p:nvPr/>
+        </p:nvSpPr>
+        <p:spPr>
+          <a:xfrm>
+            <a:off x="777240" y="1965960"/>
+            <a:ext cx="5212080" cy="3383280"/>
+          </a:xfrm>
+          <a:prstGeom prst="rect">
+            <a:avLst/>
+          </a:prstGeom>
+          <a:solidFill>
+            <a:srgbClr val="FBF7F4"/>
+          </a:solidFill>
+          <a:ln w="12700">
+            <a:solidFill>
+              <a:srgbClr val="E7DEDF"/>
+            </a:solidFill>
+            <a:prstDash val="solid"/>
+          </a:ln>
+        </p:spPr>
+        <p:txBody>
+          <a:bodyPr/>
+          <a:lstStyle/>
+          <a:p>
+            <a:endParaRPr lang="es-AR"/>
+          </a:p>
+        </p:txBody>
+      </p:sp>
+      <p:sp>
+        <p:nvSpPr>
+          <p:cNvPr id="6" name="Shape 4"/>
+          <p:cNvSpPr/>
+          <p:nvPr/>
+        </p:nvSpPr>
+        <p:spPr>
+          <a:xfrm>
+            <a:off x="777240" y="1965960"/>
+            <a:ext cx="5212080" cy="64008"/>
+          </a:xfrm>
+          <a:prstGeom prst="rect">
+            <a:avLst/>
+          </a:prstGeom>
+          <a:solidFill>
+            <a:srgbClr val="8E1F3D"/>
+          </a:solidFill>
+          <a:ln/>
+        </p:spPr>
+        <p:txBody>
+          <a:bodyPr/>
+          <a:lstStyle/>
+          <a:p>
+            <a:endParaRPr lang="es-AR"/>
+          </a:p>
+        </p:txBody>
+      </p:sp>
+      <p:sp>
+        <p:nvSpPr>
+          <p:cNvPr id="7" name="Text 5"/>
+          <p:cNvSpPr/>
+          <p:nvPr/>
+        </p:nvSpPr>
+        <p:spPr>
+          <a:xfrm>
+            <a:off x="1005840" y="2176272"/>
+            <a:ext cx="4754880" cy="320040"/>
+          </a:xfrm>
+          <a:prstGeom prst="rect">
+            <a:avLst/>
+          </a:prstGeom>
+          <a:noFill/>
+          <a:ln/>
+        </p:spPr>
+        <p:txBody>
+          <a:bodyPr wrap="square" lIns="0" tIns="0" rIns="0" bIns="0" rtlCol="0" anchor="ctr"/>
+          <a:lstStyle/>
+          <a:p>
+            <a:pPr marL="0" indent="0">
+              <a:buNone/>
+            </a:pPr>
+            <a:r>
+              <a:rPr lang="en-US" sz="1600" b="1" dirty="0">
+                <a:solidFill>
+                  <a:srgbClr val="8E1F3D"/>
+                </a:solidFill>
+                <a:latin typeface="Georgia" pitchFamily="34" charset="0"/>
+                <a:ea typeface="Georgia" pitchFamily="34" charset="-122"/>
+                <a:cs typeface="Georgia" pitchFamily="34" charset="-120"/>
+              </a:rPr>
+              <a:t>PIPELINE DE DATOS</a:t>
+            </a:r>
+            <a:endParaRPr lang="en-US" sz="1600" dirty="0"/>
+          </a:p>
+        </p:txBody>
+      </p:sp>
+      <p:sp>
+        <p:nvSpPr>
+          <p:cNvPr id="8" name="Text 6"/>
+          <p:cNvSpPr/>
+          <p:nvPr/>
+        </p:nvSpPr>
+        <p:spPr>
+          <a:xfrm>
+            <a:off x="1005840" y="2578608"/>
+            <a:ext cx="4754880" cy="1828800"/>
+          </a:xfrm>
+          <a:prstGeom prst="rect">
+            <a:avLst/>
+          </a:prstGeom>
+          <a:noFill/>
+          <a:ln/>
+        </p:spPr>
+        <p:txBody>
+          <a:bodyPr wrap="square" lIns="0" tIns="0" rIns="0" bIns="0" rtlCol="0" anchor="t"/>
+          <a:lstStyle/>
+          <a:p>
+            <a:pPr marL="177800" indent="-177800">
+              <a:lnSpc>
+                <a:spcPct val="105000"/>
+              </a:lnSpc>
+              <a:spcAft>
+                <a:spcPts val="800"/>
+              </a:spcAft>
+              <a:buSzPct val="100000"/>
+              <a:buChar char="•"/>
+            </a:pPr>
+            <a:r>
+              <a:rPr lang="en-US" sz="1250" dirty="0">
+                <a:solidFill>
+                  <a:srgbClr val="23191B"/>
+                </a:solidFill>
+                <a:latin typeface="Calibri" pitchFamily="34" charset="0"/>
+                <a:ea typeface="Calibri" pitchFamily="34" charset="-122"/>
+                <a:cs typeface="Calibri" pitchFamily="34" charset="-120"/>
+              </a:rPr>
+              <a:t>Integración por merge (left join) de los dos datasets.</a:t>
+            </a:r>
+            <a:endParaRPr lang="en-US" sz="1250" dirty="0"/>
+          </a:p>
+          <a:p>
+            <a:pPr marL="177800" indent="-177800">
+              <a:lnSpc>
+                <a:spcPct val="105000"/>
+              </a:lnSpc>
+              <a:spcAft>
+                <a:spcPts val="800"/>
+              </a:spcAft>
+              <a:buSzPct val="100000"/>
+              <a:buChar char="•"/>
+            </a:pPr>
+            <a:r>
+              <a:rPr lang="en-US" sz="1250" dirty="0">
+                <a:solidFill>
+                  <a:srgbClr val="23191B"/>
+                </a:solidFill>
+                <a:latin typeface="Calibri" pitchFamily="34" charset="0"/>
+                <a:ea typeface="Calibri" pitchFamily="34" charset="-122"/>
+                <a:cs typeface="Calibri" pitchFamily="34" charset="-120"/>
+              </a:rPr>
+              <a:t>Normalización de nombres: codificación de Curaçao, homologación de RD Congo, réplica del Reino Unido para Inglaterra y Escocia.</a:t>
+            </a:r>
+            <a:endParaRPr lang="en-US" sz="1250" dirty="0"/>
+          </a:p>
+          <a:p>
+            <a:pPr marL="177800" indent="-177800">
+              <a:lnSpc>
+                <a:spcPct val="105000"/>
+              </a:lnSpc>
+              <a:spcAft>
+                <a:spcPts val="800"/>
+              </a:spcAft>
+              <a:buSzPct val="100000"/>
+              <a:buChar char="•"/>
+            </a:pPr>
+            <a:r>
+              <a:rPr lang="en-US" sz="1250" dirty="0">
+                <a:solidFill>
+                  <a:srgbClr val="23191B"/>
+                </a:solidFill>
+                <a:latin typeface="Calibri" pitchFamily="34" charset="0"/>
+                <a:ea typeface="Calibri" pitchFamily="34" charset="-122"/>
+                <a:cs typeface="Calibri" pitchFamily="34" charset="-120"/>
+              </a:rPr>
+              <a:t>Imputación manual del PBI de Curaçao y cálculo del PBI per cápita.</a:t>
+            </a:r>
+            <a:endParaRPr lang="en-US" sz="1250" dirty="0"/>
+          </a:p>
+        </p:txBody>
+      </p:sp>
+      <p:sp>
+        <p:nvSpPr>
+          <p:cNvPr id="9" name="Text 7"/>
+          <p:cNvSpPr/>
+          <p:nvPr/>
+        </p:nvSpPr>
+        <p:spPr>
+          <a:xfrm>
+            <a:off x="1005840" y="4709160"/>
+            <a:ext cx="4754880" cy="548640"/>
+          </a:xfrm>
+          <a:prstGeom prst="rect">
+            <a:avLst/>
+          </a:prstGeom>
+          <a:noFill/>
+          <a:ln/>
+        </p:spPr>
+        <p:txBody>
+          <a:bodyPr wrap="square" lIns="0" tIns="0" rIns="0" bIns="0" rtlCol="0" anchor="t"/>
+          <a:lstStyle/>
+          <a:p>
+            <a:pPr marL="0" indent="0">
+              <a:lnSpc>
+                <a:spcPct val="105000"/>
+              </a:lnSpc>
+              <a:buNone/>
+            </a:pPr>
+            <a:r>
+              <a:rPr lang="en-US" sz="1150" b="1" i="1" dirty="0">
+                <a:solidFill>
+                  <a:srgbClr val="B8862B"/>
+                </a:solidFill>
+                <a:latin typeface="Calibri" pitchFamily="34" charset="0"/>
+                <a:ea typeface="Calibri" pitchFamily="34" charset="-122"/>
+                <a:cs typeface="Calibri" pitchFamily="34" charset="-120"/>
+              </a:rPr>
+              <a:t>Stack:  </a:t>
+            </a:r>
+            <a:r>
+              <a:rPr lang="en-US" sz="1150" i="1" dirty="0">
+                <a:solidFill>
+                  <a:srgbClr val="6E5E62"/>
+                </a:solidFill>
+                <a:latin typeface="Calibri" pitchFamily="34" charset="0"/>
+                <a:ea typeface="Calibri" pitchFamily="34" charset="-122"/>
+                <a:cs typeface="Calibri" pitchFamily="34" charset="-120"/>
+              </a:rPr>
+              <a:t>Python · pandas · NumPy · Matplotlib · Seaborn · SciPy · SymPy (Jupyter).</a:t>
+            </a:r>
+            <a:endParaRPr lang="en-US" sz="1150" dirty="0"/>
+          </a:p>
+        </p:txBody>
+      </p:sp>
+      <p:sp>
+        <p:nvSpPr>
+          <p:cNvPr id="10" name="Shape 8"/>
+          <p:cNvSpPr/>
+          <p:nvPr/>
+        </p:nvSpPr>
+        <p:spPr>
+          <a:xfrm>
+            <a:off x="6199632" y="1965960"/>
+            <a:ext cx="5212080" cy="3383280"/>
+          </a:xfrm>
+          <a:prstGeom prst="rect">
+            <a:avLst/>
+          </a:prstGeom>
+          <a:solidFill>
+            <a:srgbClr val="FBF7F4"/>
+          </a:solidFill>
+          <a:ln w="12700">
+            <a:solidFill>
+              <a:srgbClr val="E7DEDF"/>
+            </a:solidFill>
+            <a:prstDash val="solid"/>
+          </a:ln>
+        </p:spPr>
+        <p:txBody>
+          <a:bodyPr/>
+          <a:lstStyle/>
+          <a:p>
+            <a:endParaRPr lang="es-AR"/>
+          </a:p>
+        </p:txBody>
+      </p:sp>
+      <p:sp>
+        <p:nvSpPr>
+          <p:cNvPr id="11" name="Shape 9"/>
+          <p:cNvSpPr/>
+          <p:nvPr/>
+        </p:nvSpPr>
+        <p:spPr>
+          <a:xfrm>
+            <a:off x="6199632" y="1965960"/>
+            <a:ext cx="5212080" cy="64008"/>
+          </a:xfrm>
+          <a:prstGeom prst="rect">
+            <a:avLst/>
+          </a:prstGeom>
+          <a:solidFill>
+            <a:srgbClr val="B8862B"/>
+          </a:solidFill>
+          <a:ln/>
+        </p:spPr>
+        <p:txBody>
+          <a:bodyPr/>
+          <a:lstStyle/>
+          <a:p>
+            <a:endParaRPr lang="es-AR"/>
+          </a:p>
+        </p:txBody>
+      </p:sp>
+      <p:sp>
+        <p:nvSpPr>
+          <p:cNvPr id="12" name="Text 10"/>
+          <p:cNvSpPr/>
+          <p:nvPr/>
+        </p:nvSpPr>
+        <p:spPr>
+          <a:xfrm>
+            <a:off x="6428232" y="2176272"/>
+            <a:ext cx="4754880" cy="320040"/>
+          </a:xfrm>
+          <a:prstGeom prst="rect">
+            <a:avLst/>
+          </a:prstGeom>
+          <a:noFill/>
+          <a:ln/>
+        </p:spPr>
+        <p:txBody>
+          <a:bodyPr wrap="square" lIns="0" tIns="0" rIns="0" bIns="0" rtlCol="0" anchor="ctr"/>
+          <a:lstStyle/>
+          <a:p>
+            <a:pPr marL="0" indent="0">
+              <a:buNone/>
+            </a:pPr>
+            <a:r>
+              <a:rPr lang="en-US" sz="1600" b="1" dirty="0">
+                <a:solidFill>
+                  <a:srgbClr val="8E1F3D"/>
+                </a:solidFill>
+                <a:latin typeface="Georgia" pitchFamily="34" charset="0"/>
+                <a:ea typeface="Georgia" pitchFamily="34" charset="-122"/>
+                <a:cs typeface="Georgia" pitchFamily="34" charset="-120"/>
+              </a:rPr>
+              <a:t>EL ROL DE LA IA — Y SU LÍMITE</a:t>
+            </a:r>
+            <a:endParaRPr lang="en-US" sz="1600" dirty="0"/>
+          </a:p>
+        </p:txBody>
+      </p:sp>
+      <p:sp>
+        <p:nvSpPr>
+          <p:cNvPr id="13" name="Text 11"/>
+          <p:cNvSpPr/>
+          <p:nvPr/>
+        </p:nvSpPr>
+        <p:spPr>
+          <a:xfrm>
+            <a:off x="6428232" y="2578608"/>
+            <a:ext cx="4754880" cy="1005840"/>
+          </a:xfrm>
+          <a:prstGeom prst="rect">
+            <a:avLst/>
+          </a:prstGeom>
+          <a:noFill/>
+          <a:ln/>
+        </p:spPr>
+        <p:txBody>
+          <a:bodyPr wrap="square" lIns="0" tIns="0" rIns="0" bIns="0" rtlCol="0" anchor="t"/>
+          <a:lstStyle/>
+          <a:p>
+            <a:pPr marL="0" indent="0">
+              <a:lnSpc>
+                <a:spcPct val="108000"/>
+              </a:lnSpc>
+              <a:buNone/>
+            </a:pPr>
+            <a:r>
+              <a:rPr lang="en-US" sz="1250" dirty="0">
+                <a:solidFill>
+                  <a:srgbClr val="23191B"/>
+                </a:solidFill>
+                <a:latin typeface="Calibri" pitchFamily="34" charset="0"/>
+                <a:ea typeface="Calibri" pitchFamily="34" charset="-122"/>
+                <a:cs typeface="Calibri" pitchFamily="34" charset="-120"/>
+              </a:rPr>
+              <a:t>La IA asistió en tareas acotadas: sugerir y comparar los modelos, calcular las derivadas con SymPy e interpretar su significado económico.</a:t>
+            </a:r>
+            <a:endParaRPr lang="en-US" sz="1250" dirty="0"/>
+          </a:p>
+        </p:txBody>
+      </p:sp>
+      <p:sp>
+        <p:nvSpPr>
+          <p:cNvPr id="14" name="Text 12"/>
+          <p:cNvSpPr/>
+          <p:nvPr/>
+        </p:nvSpPr>
+        <p:spPr>
+          <a:xfrm>
+            <a:off x="6428232" y="3703320"/>
+            <a:ext cx="4754880" cy="1554480"/>
+          </a:xfrm>
+          <a:prstGeom prst="rect">
+            <a:avLst/>
+          </a:prstGeom>
+          <a:noFill/>
+          <a:ln/>
+        </p:spPr>
+        <p:txBody>
+          <a:bodyPr wrap="square" lIns="0" tIns="0" rIns="0" bIns="0" rtlCol="0" anchor="t"/>
+          <a:lstStyle/>
+          <a:p>
+            <a:pPr marL="0" indent="0">
+              <a:lnSpc>
+                <a:spcPct val="108000"/>
+              </a:lnSpc>
+              <a:buNone/>
+            </a:pPr>
+            <a:r>
+              <a:rPr lang="en-US" sz="1250" b="1" dirty="0">
+                <a:solidFill>
+                  <a:srgbClr val="8E1F3D"/>
+                </a:solidFill>
+                <a:latin typeface="Calibri" pitchFamily="34" charset="0"/>
+                <a:ea typeface="Calibri" pitchFamily="34" charset="-122"/>
+                <a:cs typeface="Calibri" pitchFamily="34" charset="-120"/>
+              </a:rPr>
+              <a:t>Aprendizaje clave: auditar críticamente. </a:t>
+            </a:r>
+            <a:r>
+              <a:rPr lang="en-US" sz="1250" dirty="0">
+                <a:solidFill>
+                  <a:srgbClr val="23191B"/>
+                </a:solidFill>
+                <a:latin typeface="Calibri" pitchFamily="34" charset="0"/>
+                <a:ea typeface="Calibri" pitchFamily="34" charset="-122"/>
+                <a:cs typeface="Calibri" pitchFamily="34" charset="-120"/>
+              </a:rPr>
+              <a:t>Al sospechar que Argentina era un outlier aislado, la IA reforzó ese sesgo con teorías; al verificarlo con los datos, resultó </a:t>
+            </a:r>
+            <a:r>
+              <a:rPr lang="en-US" sz="1250" b="1" i="1" dirty="0">
+                <a:solidFill>
+                  <a:srgbClr val="23191B"/>
+                </a:solidFill>
+                <a:latin typeface="Calibri" pitchFamily="34" charset="0"/>
+                <a:ea typeface="Calibri" pitchFamily="34" charset="-122"/>
+                <a:cs typeface="Calibri" pitchFamily="34" charset="-120"/>
+              </a:rPr>
+              <a:t>no</a:t>
+            </a:r>
+            <a:r>
+              <a:rPr lang="en-US" sz="1250" dirty="0">
+                <a:solidFill>
+                  <a:srgbClr val="23191B"/>
+                </a:solidFill>
+                <a:latin typeface="Calibri" pitchFamily="34" charset="0"/>
+                <a:ea typeface="Calibri" pitchFamily="34" charset="-122"/>
+                <a:cs typeface="Calibri" pitchFamily="34" charset="-120"/>
+              </a:rPr>
+              <a:t> serlo.</a:t>
+            </a:r>
+            <a:endParaRPr lang="en-US" sz="1250" dirty="0"/>
+          </a:p>
+        </p:txBody>
+      </p:sp>
+      <p:sp>
+        <p:nvSpPr>
+          <p:cNvPr id="15" name="Shape 13"/>
+          <p:cNvSpPr/>
+          <p:nvPr/>
+        </p:nvSpPr>
+        <p:spPr>
+          <a:xfrm>
+            <a:off x="777240" y="5806440"/>
+            <a:ext cx="10634472" cy="0"/>
+          </a:xfrm>
+          <a:prstGeom prst="line">
+            <a:avLst/>
+          </a:prstGeom>
+          <a:noFill/>
+          <a:ln w="12700">
+            <a:solidFill>
+              <a:srgbClr val="E7DEDF"/>
+            </a:solidFill>
+            <a:prstDash val="solid"/>
+          </a:ln>
+        </p:spPr>
+        <p:txBody>
+          <a:bodyPr/>
+          <a:lstStyle/>
+          <a:p>
+            <a:endParaRPr lang="es-AR"/>
+          </a:p>
+        </p:txBody>
+      </p:sp>
+      <p:sp>
+        <p:nvSpPr>
+          <p:cNvPr id="16" name="Text 14"/>
+          <p:cNvSpPr/>
+          <p:nvPr/>
+        </p:nvSpPr>
+        <p:spPr>
+          <a:xfrm>
+            <a:off x="777240" y="5989320"/>
+            <a:ext cx="10634472" cy="365760"/>
+          </a:xfrm>
+          <a:prstGeom prst="rect">
+            <a:avLst/>
+          </a:prstGeom>
+          <a:noFill/>
+          <a:ln/>
+        </p:spPr>
+        <p:txBody>
+          <a:bodyPr wrap="square" lIns="0" tIns="0" rIns="0" bIns="0" rtlCol="0" anchor="ctr"/>
+          <a:lstStyle/>
+          <a:p>
+            <a:pPr marL="0" indent="0">
+              <a:buNone/>
+            </a:pPr>
+            <a:r>
+              <a:rPr lang="en-US" sz="1150" b="1" dirty="0">
+                <a:solidFill>
+                  <a:srgbClr val="8E1F3D"/>
+                </a:solidFill>
+                <a:latin typeface="Calibri" pitchFamily="34" charset="0"/>
+                <a:ea typeface="Calibri" pitchFamily="34" charset="-122"/>
+                <a:cs typeface="Calibri" pitchFamily="34" charset="-120"/>
+              </a:rPr>
+              <a:t>github.com/gleo1973/tp-laboratorio-mcag-1c2026</a:t>
+            </a:r>
+            <a:r>
+              <a:rPr lang="en-US" sz="1150" dirty="0">
+                <a:solidFill>
+                  <a:srgbClr val="6E5E62"/>
+                </a:solidFill>
+                <a:latin typeface="Calibri" pitchFamily="34" charset="0"/>
+                <a:ea typeface="Calibri" pitchFamily="34" charset="-122"/>
+                <a:cs typeface="Calibri" pitchFamily="34" charset="-120"/>
+              </a:rPr>
+              <a:t>      Gómez · Morichetti · Garibotti  ·  Laboratorio de Métodos Cuantitativos · FCE–UBA</a:t>
+            </a:r>
+            <a:endParaRPr lang="en-US" sz="1150" dirty="0"/>
           </a:p>
         </p:txBody>
       </p:sp>
@@ -2349,7 +3138,7 @@
         <p:spPr>
           <a:xfrm>
             <a:off x="777240" y="4297679"/>
-            <a:ext cx="5806440" cy="2011681"/>
+            <a:ext cx="5806440" cy="2094155"/>
           </a:xfrm>
           <a:prstGeom prst="rect">
             <a:avLst/>
@@ -2381,7 +3170,7 @@
         <p:spPr>
           <a:xfrm>
             <a:off x="777240" y="4297680"/>
-            <a:ext cx="82296" cy="2011680"/>
+            <a:ext cx="91440" cy="2094154"/>
           </a:xfrm>
           <a:prstGeom prst="rect">
             <a:avLst/>
@@ -2466,7 +3255,7 @@
               <a:buNone/>
             </a:pPr>
             <a:r>
-              <a:rPr lang="es-AR" sz="1500" i="1" dirty="0">
+              <a:rPr lang="es-ES" sz="1500" i="1" dirty="0">
                 <a:solidFill>
                   <a:srgbClr val="23191B"/>
                 </a:solidFill>
@@ -2474,7 +3263,7 @@
                 <a:ea typeface="Georgia" pitchFamily="34" charset="-122"/>
                 <a:cs typeface="Georgia" pitchFamily="34" charset="-120"/>
               </a:rPr>
-              <a:t>¿el rendimiento deportivo de una selección nacional (medido como el puntaje FIFA previo al torneo) puede explicarse a partir del nivel de desarrollo económico y demográfico de su país? Y si no es así, ¿qué variables (del país o del propio plantel) sí muestran relación con ese rendimiento? </a:t>
+              <a:t>¿el rendimiento deportivo de una selección nacional (medido como el puntaje FIFA previo al torneo) puede explicarse a partir de variables económicas y demográficas de su país? Y si no es así, ¿qué variables (del país o del propio plantel) sí muestran relación con ese rendimiento? </a:t>
             </a:r>
             <a:endParaRPr lang="en-US" sz="1500" dirty="0"/>
           </a:p>
@@ -2768,10 +3557,52 @@
                 <a:ea typeface="Calibri" pitchFamily="34" charset="-122"/>
                 <a:cs typeface="Calibri" pitchFamily="34" charset="-120"/>
               </a:rPr>
-              <a:t>253 países. PBI, población, densidad, idioma, religión, continente, </a:t>
-            </a:r>
-            <a:r>
-              <a:rPr lang="en-US" sz="1200" dirty="0" err="1">
+              <a:t>253 países. PBI y PBI per cápita, población, densidad, idioma, religión, continente, edad mediana.</a:t>
+            </a:r>
+            <a:endParaRPr lang="en-US" sz="1200" dirty="0"/>
+          </a:p>
+        </p:txBody>
+      </p:sp>
+      <p:sp>
+        <p:nvSpPr>
+          <p:cNvPr id="19" name="Text 17"/>
+          <p:cNvSpPr/>
+          <p:nvPr/>
+        </p:nvSpPr>
+        <p:spPr>
+          <a:xfrm>
+            <a:off x="6903720" y="5486400"/>
+            <a:ext cx="4572000" cy="640080"/>
+          </a:xfrm>
+          <a:prstGeom prst="rect">
+            <a:avLst/>
+          </a:prstGeom>
+          <a:noFill/>
+          <a:ln/>
+        </p:spPr>
+        <p:txBody>
+          <a:bodyPr wrap="square" lIns="0" tIns="0" rIns="0" bIns="0" rtlCol="0" anchor="t"/>
+          <a:lstStyle/>
+          <a:p>
+            <a:pPr marL="0" indent="0">
+              <a:lnSpc>
+                <a:spcPct val="106000"/>
+              </a:lnSpc>
+              <a:buNone/>
+            </a:pPr>
+            <a:r>
+              <a:rPr lang="en-US" sz="1250" b="1" dirty="0">
+                <a:solidFill>
+                  <a:srgbClr val="8E1F3D"/>
+                </a:solidFill>
+                <a:latin typeface="Calibri" pitchFamily="34" charset="0"/>
+                <a:ea typeface="Calibri" pitchFamily="34" charset="-122"/>
+                <a:cs typeface="Calibri" pitchFamily="34" charset="-120"/>
+              </a:rPr>
+              <a:t>Vara común:  </a:t>
+            </a:r>
+            <a:r>
+              <a:rPr lang="en-US" sz="1250" dirty="0">
                 <a:solidFill>
                   <a:srgbClr val="23191B"/>
                 </a:solidFill>
@@ -2779,64 +3610,9 @@
                 <a:ea typeface="Calibri" pitchFamily="34" charset="-122"/>
                 <a:cs typeface="Calibri" pitchFamily="34" charset="-120"/>
               </a:rPr>
-              <a:t>edad</a:t>
-            </a:r>
-            <a:r>
-              <a:rPr lang="en-US" sz="1200" dirty="0">
-                <a:solidFill>
-                  <a:srgbClr val="23191B"/>
-                </a:solidFill>
-                <a:latin typeface="Calibri" pitchFamily="34" charset="0"/>
-                <a:ea typeface="Calibri" pitchFamily="34" charset="-122"/>
-                <a:cs typeface="Calibri" pitchFamily="34" charset="-120"/>
-              </a:rPr>
-              <a:t> </a:t>
-            </a:r>
-            <a:r>
-              <a:rPr lang="en-US" sz="1200" dirty="0" err="1">
-                <a:solidFill>
-                  <a:srgbClr val="23191B"/>
-                </a:solidFill>
-                <a:latin typeface="Calibri" pitchFamily="34" charset="0"/>
-                <a:ea typeface="Calibri" pitchFamily="34" charset="-122"/>
-                <a:cs typeface="Calibri" pitchFamily="34" charset="-120"/>
-              </a:rPr>
-              <a:t>mediana</a:t>
-            </a:r>
-            <a:r>
-              <a:rPr lang="en-US" sz="1200" dirty="0">
-                <a:solidFill>
-                  <a:srgbClr val="23191B"/>
-                </a:solidFill>
-                <a:latin typeface="Calibri" pitchFamily="34" charset="0"/>
-                <a:ea typeface="Calibri" pitchFamily="34" charset="-122"/>
-                <a:cs typeface="Calibri" pitchFamily="34" charset="-120"/>
-              </a:rPr>
-              <a:t> (entre </a:t>
-            </a:r>
-            <a:r>
-              <a:rPr lang="en-US" sz="1200" dirty="0" err="1">
-                <a:solidFill>
-                  <a:srgbClr val="23191B"/>
-                </a:solidFill>
-                <a:latin typeface="Calibri" pitchFamily="34" charset="0"/>
-                <a:ea typeface="Calibri" pitchFamily="34" charset="-122"/>
-                <a:cs typeface="Calibri" pitchFamily="34" charset="-120"/>
-              </a:rPr>
-              <a:t>otras</a:t>
-            </a:r>
-            <a:r>
-              <a:rPr lang="en-US" sz="1200" dirty="0">
-                <a:solidFill>
-                  <a:srgbClr val="23191B"/>
-                </a:solidFill>
-                <a:latin typeface="Calibri" pitchFamily="34" charset="0"/>
-                <a:ea typeface="Calibri" pitchFamily="34" charset="-122"/>
-                <a:cs typeface="Calibri" pitchFamily="34" charset="-120"/>
-              </a:rPr>
-              <a:t>).</a:t>
-            </a:r>
-            <a:endParaRPr lang="en-US" sz="1200" dirty="0"/>
+              <a:t>el puntaje FIFA previo al torneo. Integración por merge (left join) de ambas bases.</a:t>
+            </a:r>
+            <a:endParaRPr lang="en-US" sz="1250" dirty="0"/>
           </a:p>
         </p:txBody>
       </p:sp>
@@ -2945,7 +3721,7 @@
                 <a:ea typeface="Calibri" pitchFamily="34" charset="-122"/>
                 <a:cs typeface="Calibri" pitchFamily="34" charset="-120"/>
               </a:rPr>
-              <a:t>VARIABLES NUMÉRICAS  ·  FIGURA 1</a:t>
+              <a:t>VARIABLES NUMÉRICAS  ·  FIGURAS 1–3</a:t>
             </a:r>
             <a:endParaRPr lang="en-US" sz="1150" dirty="0"/>
           </a:p>
@@ -2987,7 +3763,7 @@
                 <a:ea typeface="Georgia" pitchFamily="34" charset="-122"/>
                 <a:cs typeface="Georgia" pitchFamily="34" charset="-120"/>
               </a:rPr>
-              <a:t>¿Predice la </a:t>
+              <a:t>La forma de los </a:t>
             </a:r>
             <a:r>
               <a:rPr lang="en-US" sz="4000" b="1" dirty="0">
@@ -2998,7 +3774,7 @@
                 <a:ea typeface="Georgia" pitchFamily="34" charset="-122"/>
                 <a:cs typeface="Georgia" pitchFamily="34" charset="-120"/>
               </a:rPr>
-              <a:t>riqueza?</a:t>
+              <a:t>datos</a:t>
             </a:r>
             <a:endParaRPr lang="en-US" sz="4000" dirty="0"/>
           </a:p>
@@ -3006,103 +3782,14 @@
       </p:sp>
       <p:sp>
         <p:nvSpPr>
-          <p:cNvPr id="6" name="Text 3"/>
-          <p:cNvSpPr/>
-          <p:nvPr/>
-        </p:nvSpPr>
-        <p:spPr>
-          <a:xfrm>
-            <a:off x="777240" y="5301863"/>
-            <a:ext cx="6949440" cy="457200"/>
-          </a:xfrm>
-          <a:prstGeom prst="rect">
-            <a:avLst/>
-          </a:prstGeom>
-          <a:noFill/>
-          <a:ln/>
-        </p:spPr>
-        <p:txBody>
-          <a:bodyPr wrap="square" lIns="0" tIns="0" rIns="0" bIns="0" rtlCol="0" anchor="t"/>
-          <a:lstStyle/>
-          <a:p>
-            <a:pPr marL="0" indent="0" algn="l">
-              <a:buNone/>
-            </a:pPr>
-            <a:r>
-              <a:rPr lang="en-US" sz="950" i="1" dirty="0">
-                <a:solidFill>
-                  <a:srgbClr val="6E5E62"/>
-                </a:solidFill>
-                <a:latin typeface="Calibri" pitchFamily="34" charset="0"/>
-                <a:ea typeface="Calibri" pitchFamily="34" charset="-122"/>
-                <a:cs typeface="Calibri" pitchFamily="34" charset="-120"/>
-              </a:rPr>
-              <a:t>Figura 1 · Matriz de correlación de Pearson entre el puntaje FIFA, el valor del plantel y los indicadores del país.</a:t>
-            </a:r>
-            <a:endParaRPr lang="en-US" sz="950" dirty="0"/>
-          </a:p>
-        </p:txBody>
-      </p:sp>
-      <p:sp>
-        <p:nvSpPr>
-          <p:cNvPr id="7" name="Text 4"/>
-          <p:cNvSpPr/>
-          <p:nvPr/>
-        </p:nvSpPr>
-        <p:spPr>
-          <a:xfrm>
-            <a:off x="8001000" y="1828800"/>
-            <a:ext cx="3657600" cy="914400"/>
-          </a:xfrm>
-          <a:prstGeom prst="rect">
-            <a:avLst/>
-          </a:prstGeom>
-          <a:noFill/>
-          <a:ln/>
-        </p:spPr>
-        <p:txBody>
-          <a:bodyPr wrap="square" lIns="0" tIns="0" rIns="0" bIns="0" rtlCol="0" anchor="ctr"/>
-          <a:lstStyle/>
-          <a:p>
-            <a:pPr marL="0" indent="0" algn="l">
-              <a:buNone/>
-            </a:pPr>
-            <a:r>
-              <a:rPr lang="en-US" sz="5400" b="1" dirty="0">
-                <a:solidFill>
-                  <a:srgbClr val="6E5E62"/>
-                </a:solidFill>
-                <a:latin typeface="Georgia" pitchFamily="34" charset="0"/>
-                <a:ea typeface="Georgia" pitchFamily="34" charset="-122"/>
-                <a:cs typeface="Georgia" pitchFamily="34" charset="-120"/>
-              </a:rPr>
-              <a:t>r = </a:t>
-            </a:r>
-            <a:r>
-              <a:rPr lang="en-US" sz="5400" b="1" dirty="0">
-                <a:solidFill>
-                  <a:srgbClr val="8E1F3D"/>
-                </a:solidFill>
-                <a:latin typeface="Georgia" pitchFamily="34" charset="0"/>
-                <a:ea typeface="Georgia" pitchFamily="34" charset="-122"/>
-                <a:cs typeface="Georgia" pitchFamily="34" charset="-120"/>
-              </a:rPr>
-              <a:t>0,77</a:t>
-            </a:r>
-            <a:endParaRPr lang="en-US" sz="5400" dirty="0"/>
-          </a:p>
-        </p:txBody>
-      </p:sp>
-      <p:sp>
-        <p:nvSpPr>
-          <p:cNvPr id="8" name="Text 5"/>
-          <p:cNvSpPr/>
-          <p:nvPr/>
-        </p:nvSpPr>
-        <p:spPr>
-          <a:xfrm>
-            <a:off x="8028432" y="2788920"/>
-            <a:ext cx="3566160" cy="548640"/>
+          <p:cNvPr id="5" name="Text 3"/>
+          <p:cNvSpPr/>
+          <p:nvPr/>
+        </p:nvSpPr>
+        <p:spPr>
+          <a:xfrm>
+            <a:off x="777240" y="1810512"/>
+            <a:ext cx="3383280" cy="777240"/>
           </a:xfrm>
           <a:prstGeom prst="rect">
             <a:avLst/>
@@ -3116,7 +3803,7 @@
           <a:p>
             <a:pPr marL="0" indent="0">
               <a:lnSpc>
-                <a:spcPct val="105000"/>
+                <a:spcPct val="108000"/>
               </a:lnSpc>
               <a:buNone/>
             </a:pPr>
@@ -3129,115 +3816,15 @@
                 <a:ea typeface="Calibri" pitchFamily="34" charset="-122"/>
                 <a:cs typeface="Calibri" pitchFamily="34" charset="-120"/>
               </a:rPr>
-              <a:t>Valor del plantel ↔ puntaje FIFA: la única asociación fuerte.</a:t>
+              <a:t>El puntaje FIFA se distribuye de forma casi normal: la media ≈ la mediana, con pocos equipos en los extremos.</a:t>
             </a:r>
             <a:endParaRPr lang="en-US" sz="1300" dirty="0"/>
-          </a:p>
-        </p:txBody>
-      </p:sp>
-      <p:sp>
-        <p:nvSpPr>
-          <p:cNvPr id="9" name="Text 6"/>
-          <p:cNvSpPr/>
-          <p:nvPr/>
-        </p:nvSpPr>
-        <p:spPr>
-          <a:xfrm>
-            <a:off x="8028432" y="3520440"/>
-            <a:ext cx="3611880" cy="2560320"/>
-          </a:xfrm>
-          <a:prstGeom prst="rect">
-            <a:avLst/>
-          </a:prstGeom>
-          <a:noFill/>
-          <a:ln/>
-        </p:spPr>
-        <p:txBody>
-          <a:bodyPr wrap="square" lIns="0" tIns="0" rIns="0" bIns="0" rtlCol="0" anchor="t"/>
-          <a:lstStyle/>
-          <a:p>
-            <a:pPr marL="177800" indent="-177800">
-              <a:lnSpc>
-                <a:spcPct val="104000"/>
-              </a:lnSpc>
-              <a:spcAft>
-                <a:spcPts val="800"/>
-              </a:spcAft>
-              <a:buSzPct val="100000"/>
-              <a:buChar char="•"/>
-            </a:pPr>
-            <a:r>
-              <a:rPr lang="en-US" sz="1250" dirty="0">
-                <a:solidFill>
-                  <a:srgbClr val="23191B"/>
-                </a:solidFill>
-                <a:latin typeface="Calibri" pitchFamily="34" charset="0"/>
-                <a:ea typeface="Calibri" pitchFamily="34" charset="-122"/>
-                <a:cs typeface="Calibri" pitchFamily="34" charset="-120"/>
-              </a:rPr>
-              <a:t>PBI, población, densidad y PBI per cápita: sin asociación relevante con el rendimiento.</a:t>
-            </a:r>
-            <a:endParaRPr lang="en-US" sz="1250" dirty="0"/>
-          </a:p>
-          <a:p>
-            <a:pPr marL="177800" indent="-177800">
-              <a:lnSpc>
-                <a:spcPct val="104000"/>
-              </a:lnSpc>
-              <a:spcAft>
-                <a:spcPts val="800"/>
-              </a:spcAft>
-              <a:buSzPct val="100000"/>
-              <a:buChar char="•"/>
-            </a:pPr>
-            <a:r>
-              <a:rPr lang="en-US" sz="1250" dirty="0">
-                <a:solidFill>
-                  <a:srgbClr val="23191B"/>
-                </a:solidFill>
-                <a:latin typeface="Calibri" pitchFamily="34" charset="0"/>
-                <a:ea typeface="Calibri" pitchFamily="34" charset="-122"/>
-                <a:cs typeface="Calibri" pitchFamily="34" charset="-120"/>
-              </a:rPr>
-              <a:t>La prosperidad de una nación no anticipa el desempeño de su selección.</a:t>
-            </a:r>
-            <a:endParaRPr lang="en-US" sz="1250" dirty="0"/>
-          </a:p>
-          <a:p>
-            <a:pPr marL="177800" indent="-177800">
-              <a:lnSpc>
-                <a:spcPct val="104000"/>
-              </a:lnSpc>
-              <a:spcAft>
-                <a:spcPts val="800"/>
-              </a:spcAft>
-              <a:buSzPct val="100000"/>
-              <a:buChar char="•"/>
-            </a:pPr>
-            <a:r>
-              <a:rPr lang="en-US" sz="1250" dirty="0">
-                <a:solidFill>
-                  <a:srgbClr val="23191B"/>
-                </a:solidFill>
-                <a:latin typeface="Calibri" pitchFamily="34" charset="0"/>
-                <a:ea typeface="Calibri" pitchFamily="34" charset="-122"/>
-                <a:cs typeface="Calibri" pitchFamily="34" charset="-120"/>
-              </a:rPr>
-              <a:t>Sí lo hace el capital deportivo concentrado en el plantel.</a:t>
-            </a:r>
-            <a:endParaRPr lang="en-US" sz="1250" dirty="0"/>
           </a:p>
         </p:txBody>
       </p:sp>
       <p:pic>
         <p:nvPicPr>
-          <p:cNvPr id="10" name="Picture 1">
-            <a:extLst>
-              <a:ext uri="{FF2B5EF4-FFF2-40B4-BE49-F238E27FC236}">
-                <a16:creationId xmlns:a16="http://schemas.microsoft.com/office/drawing/2014/main" id="{14B06D04-2CAC-E1C6-BA2D-6AA4E7DFDCD6}"/>
-              </a:ext>
-            </a:extLst>
-          </p:cNvPr>
+          <p:cNvPr id="6" name="Image 0" descr="/mnt/project/distribucionpuntosfifa.png"/>
           <p:cNvPicPr>
             <a:picLocks noChangeAspect="1"/>
           </p:cNvPicPr>
@@ -3245,21 +3832,393 @@
         </p:nvPicPr>
         <p:blipFill>
           <a:blip r:embed="rId3"/>
-          <a:srcRect/>
           <a:stretch>
             <a:fillRect/>
           </a:stretch>
         </p:blipFill>
-        <p:spPr bwMode="auto">
-          <a:xfrm>
-            <a:off x="918318" y="1855787"/>
-            <a:ext cx="5817870" cy="3329305"/>
+        <p:spPr>
+          <a:xfrm>
+            <a:off x="777240" y="2670048"/>
+            <a:ext cx="3217025" cy="1965960"/>
           </a:xfrm>
           <a:prstGeom prst="rect">
             <a:avLst/>
           </a:prstGeom>
         </p:spPr>
       </p:pic>
+      <p:sp>
+        <p:nvSpPr>
+          <p:cNvPr id="7" name="Text 4"/>
+          <p:cNvSpPr/>
+          <p:nvPr/>
+        </p:nvSpPr>
+        <p:spPr>
+          <a:xfrm>
+            <a:off x="777240" y="4654296"/>
+            <a:ext cx="3383280" cy="457200"/>
+          </a:xfrm>
+          <a:prstGeom prst="rect">
+            <a:avLst/>
+          </a:prstGeom>
+          <a:noFill/>
+          <a:ln/>
+        </p:spPr>
+        <p:txBody>
+          <a:bodyPr wrap="square" lIns="0" tIns="0" rIns="0" bIns="0" rtlCol="0" anchor="t"/>
+          <a:lstStyle/>
+          <a:p>
+            <a:pPr marL="0" indent="0" algn="l">
+              <a:buNone/>
+            </a:pPr>
+            <a:r>
+              <a:rPr lang="en-US" sz="950" i="1" dirty="0">
+                <a:solidFill>
+                  <a:srgbClr val="6E5E62"/>
+                </a:solidFill>
+                <a:latin typeface="Calibri" pitchFamily="34" charset="0"/>
+                <a:ea typeface="Calibri" pitchFamily="34" charset="-122"/>
+                <a:cs typeface="Calibri" pitchFamily="34" charset="-120"/>
+              </a:rPr>
+              <a:t>Figura 1 · Distribución de los puntos FIFA.</a:t>
+            </a:r>
+            <a:endParaRPr lang="en-US" sz="950" dirty="0"/>
+          </a:p>
+        </p:txBody>
+      </p:sp>
+      <p:sp>
+        <p:nvSpPr>
+          <p:cNvPr id="8" name="Shape 5"/>
+          <p:cNvSpPr/>
+          <p:nvPr/>
+        </p:nvSpPr>
+        <p:spPr>
+          <a:xfrm>
+            <a:off x="777240" y="5074920"/>
+            <a:ext cx="3383280" cy="1325880"/>
+          </a:xfrm>
+          <a:prstGeom prst="rect">
+            <a:avLst/>
+          </a:prstGeom>
+          <a:solidFill>
+            <a:srgbClr val="FBF7F4"/>
+          </a:solidFill>
+          <a:ln w="9525">
+            <a:solidFill>
+              <a:srgbClr val="E7DEDF"/>
+            </a:solidFill>
+            <a:prstDash val="solid"/>
+          </a:ln>
+        </p:spPr>
+        <p:txBody>
+          <a:bodyPr/>
+          <a:lstStyle/>
+          <a:p>
+            <a:endParaRPr lang="es-AR"/>
+          </a:p>
+        </p:txBody>
+      </p:sp>
+      <p:sp>
+        <p:nvSpPr>
+          <p:cNvPr id="9" name="Shape 6"/>
+          <p:cNvSpPr/>
+          <p:nvPr/>
+        </p:nvSpPr>
+        <p:spPr>
+          <a:xfrm>
+            <a:off x="777240" y="5074920"/>
+            <a:ext cx="73152" cy="1325880"/>
+          </a:xfrm>
+          <a:prstGeom prst="rect">
+            <a:avLst/>
+          </a:prstGeom>
+          <a:solidFill>
+            <a:srgbClr val="B8862B"/>
+          </a:solidFill>
+          <a:ln/>
+        </p:spPr>
+        <p:txBody>
+          <a:bodyPr/>
+          <a:lstStyle/>
+          <a:p>
+            <a:endParaRPr lang="es-AR"/>
+          </a:p>
+        </p:txBody>
+      </p:sp>
+      <p:sp>
+        <p:nvSpPr>
+          <p:cNvPr id="10" name="Text 7"/>
+          <p:cNvSpPr/>
+          <p:nvPr/>
+        </p:nvSpPr>
+        <p:spPr>
+          <a:xfrm>
+            <a:off x="1005840" y="5175504"/>
+            <a:ext cx="3017520" cy="1143000"/>
+          </a:xfrm>
+          <a:prstGeom prst="rect">
+            <a:avLst/>
+          </a:prstGeom>
+          <a:noFill/>
+          <a:ln/>
+        </p:spPr>
+        <p:txBody>
+          <a:bodyPr wrap="square" lIns="0" tIns="0" rIns="0" bIns="0" rtlCol="0" anchor="t"/>
+          <a:lstStyle/>
+          <a:p>
+            <a:pPr marL="0" indent="0">
+              <a:lnSpc>
+                <a:spcPct val="106000"/>
+              </a:lnSpc>
+              <a:buNone/>
+            </a:pPr>
+            <a:r>
+              <a:rPr lang="en-US" sz="1150" b="1" dirty="0">
+                <a:solidFill>
+                  <a:srgbClr val="8E1F3D"/>
+                </a:solidFill>
+                <a:latin typeface="Calibri" pitchFamily="34" charset="0"/>
+                <a:ea typeface="Calibri" pitchFamily="34" charset="-122"/>
+                <a:cs typeface="Calibri" pitchFamily="34" charset="-120"/>
+              </a:rPr>
+              <a:t>En cambio</a:t>
+            </a:r>
+            <a:r>
+              <a:rPr lang="en-US" sz="1150" dirty="0">
+                <a:solidFill>
+                  <a:srgbClr val="23191B"/>
+                </a:solidFill>
+                <a:latin typeface="Calibri" pitchFamily="34" charset="0"/>
+                <a:ea typeface="Calibri" pitchFamily="34" charset="-122"/>
+                <a:cs typeface="Calibri" pitchFamily="34" charset="-120"/>
+              </a:rPr>
+              <a:t>, las variables económicas muestran una fuerte asimetría </a:t>
+            </a:r>
+            <a:r>
+              <a:rPr lang="en-US" sz="1150" dirty="0" err="1">
+                <a:solidFill>
+                  <a:srgbClr val="23191B"/>
+                </a:solidFill>
+                <a:latin typeface="Calibri" pitchFamily="34" charset="0"/>
+                <a:ea typeface="Calibri" pitchFamily="34" charset="-122"/>
+                <a:cs typeface="Calibri" pitchFamily="34" charset="-120"/>
+              </a:rPr>
+              <a:t>positiva</a:t>
+            </a:r>
+            <a:r>
+              <a:rPr lang="en-US" sz="1150" dirty="0">
+                <a:solidFill>
+                  <a:srgbClr val="23191B"/>
+                </a:solidFill>
+                <a:latin typeface="Calibri" pitchFamily="34" charset="0"/>
+                <a:ea typeface="Calibri" pitchFamily="34" charset="-122"/>
+                <a:cs typeface="Calibri" pitchFamily="34" charset="-120"/>
+              </a:rPr>
+              <a:t> </a:t>
+            </a:r>
+            <a:r>
+              <a:rPr lang="en-US" sz="1150" dirty="0" err="1">
+                <a:solidFill>
+                  <a:srgbClr val="23191B"/>
+                </a:solidFill>
+                <a:latin typeface="Calibri" pitchFamily="34" charset="0"/>
+                <a:ea typeface="Calibri" pitchFamily="34" charset="-122"/>
+                <a:cs typeface="Calibri" pitchFamily="34" charset="-120"/>
+              </a:rPr>
+              <a:t>en</a:t>
+            </a:r>
+            <a:r>
+              <a:rPr lang="en-US" sz="1150" dirty="0">
+                <a:solidFill>
+                  <a:srgbClr val="23191B"/>
+                </a:solidFill>
+                <a:latin typeface="Calibri" pitchFamily="34" charset="0"/>
+                <a:ea typeface="Calibri" pitchFamily="34" charset="-122"/>
+                <a:cs typeface="Calibri" pitchFamily="34" charset="-120"/>
+              </a:rPr>
+              <a:t> </a:t>
+            </a:r>
+            <a:r>
+              <a:rPr lang="en-US" sz="1150" dirty="0" err="1">
+                <a:solidFill>
+                  <a:srgbClr val="23191B"/>
+                </a:solidFill>
+                <a:latin typeface="Calibri" pitchFamily="34" charset="0"/>
+                <a:ea typeface="Calibri" pitchFamily="34" charset="-122"/>
+                <a:cs typeface="Calibri" pitchFamily="34" charset="-120"/>
+              </a:rPr>
+              <a:t>el</a:t>
+            </a:r>
+            <a:r>
+              <a:rPr lang="en-US" sz="1150" dirty="0">
+                <a:solidFill>
+                  <a:srgbClr val="23191B"/>
+                </a:solidFill>
+                <a:latin typeface="Calibri" pitchFamily="34" charset="0"/>
+                <a:ea typeface="Calibri" pitchFamily="34" charset="-122"/>
+                <a:cs typeface="Calibri" pitchFamily="34" charset="-120"/>
+              </a:rPr>
+              <a:t> PBI, dominado por un único valor extremo. </a:t>
+            </a:r>
+          </a:p>
+          <a:p>
+            <a:pPr marL="0" indent="0">
+              <a:lnSpc>
+                <a:spcPct val="106000"/>
+              </a:lnSpc>
+              <a:buNone/>
+            </a:pPr>
+            <a:r>
+              <a:rPr lang="en-US" sz="1150" dirty="0" err="1">
+                <a:solidFill>
+                  <a:srgbClr val="23191B"/>
+                </a:solidFill>
+                <a:latin typeface="Calibri" pitchFamily="34" charset="0"/>
+                <a:ea typeface="Calibri" pitchFamily="34" charset="-122"/>
+                <a:cs typeface="Calibri" pitchFamily="34" charset="-120"/>
+              </a:rPr>
+              <a:t>Que</a:t>
+            </a:r>
+            <a:r>
+              <a:rPr lang="en-US" sz="1150" dirty="0">
+                <a:solidFill>
+                  <a:srgbClr val="23191B"/>
+                </a:solidFill>
+                <a:latin typeface="Calibri" pitchFamily="34" charset="0"/>
+                <a:ea typeface="Calibri" pitchFamily="34" charset="-122"/>
+                <a:cs typeface="Calibri" pitchFamily="34" charset="-120"/>
+              </a:rPr>
+              <a:t> el puntaje esté tan repartido sugiere, ya a priori, que la riqueza del país no ordena el rendimiento.</a:t>
+            </a:r>
+            <a:endParaRPr lang="en-US" sz="1150" dirty="0"/>
+          </a:p>
+        </p:txBody>
+      </p:sp>
+      <p:pic>
+        <p:nvPicPr>
+          <p:cNvPr id="11" name="Image 1" descr="/mnt/project/histogramas_valor_pbi_ppc.png"/>
+          <p:cNvPicPr>
+            <a:picLocks noChangeAspect="1"/>
+          </p:cNvPicPr>
+          <p:nvPr/>
+        </p:nvPicPr>
+        <p:blipFill>
+          <a:blip r:embed="rId4"/>
+          <a:stretch>
+            <a:fillRect/>
+          </a:stretch>
+        </p:blipFill>
+        <p:spPr>
+          <a:xfrm>
+            <a:off x="4434840" y="1810512"/>
+            <a:ext cx="6626711" cy="2011680"/>
+          </a:xfrm>
+          <a:prstGeom prst="rect">
+            <a:avLst/>
+          </a:prstGeom>
+        </p:spPr>
+      </p:pic>
+      <p:sp>
+        <p:nvSpPr>
+          <p:cNvPr id="12" name="Text 8"/>
+          <p:cNvSpPr/>
+          <p:nvPr/>
+        </p:nvSpPr>
+        <p:spPr>
+          <a:xfrm>
+            <a:off x="4434840" y="3840480"/>
+            <a:ext cx="7040880" cy="457200"/>
+          </a:xfrm>
+          <a:prstGeom prst="rect">
+            <a:avLst/>
+          </a:prstGeom>
+          <a:noFill/>
+          <a:ln/>
+        </p:spPr>
+        <p:txBody>
+          <a:bodyPr wrap="square" lIns="0" tIns="0" rIns="0" bIns="0" rtlCol="0" anchor="t"/>
+          <a:lstStyle/>
+          <a:p>
+            <a:pPr marL="0" indent="0" algn="l">
+              <a:buNone/>
+            </a:pPr>
+            <a:r>
+              <a:rPr lang="en-US" sz="950" i="1" dirty="0">
+                <a:solidFill>
+                  <a:srgbClr val="6E5E62"/>
+                </a:solidFill>
+                <a:latin typeface="Calibri" pitchFamily="34" charset="0"/>
+                <a:ea typeface="Calibri" pitchFamily="34" charset="-122"/>
+                <a:cs typeface="Calibri" pitchFamily="34" charset="-120"/>
+              </a:rPr>
+              <a:t>Figura 2 · Valor del plantel, PBI y PBI per cápita.</a:t>
+            </a:r>
+            <a:endParaRPr lang="en-US" sz="950" dirty="0"/>
+          </a:p>
+        </p:txBody>
+      </p:sp>
+      <p:pic>
+        <p:nvPicPr>
+          <p:cNvPr id="13" name="Image 2" descr="/mnt/project/histogramas_poblacion_densidad_superficie.png"/>
+          <p:cNvPicPr>
+            <a:picLocks noChangeAspect="1"/>
+          </p:cNvPicPr>
+          <p:nvPr/>
+        </p:nvPicPr>
+        <p:blipFill>
+          <a:blip r:embed="rId5"/>
+          <a:stretch>
+            <a:fillRect/>
+          </a:stretch>
+        </p:blipFill>
+        <p:spPr>
+          <a:xfrm>
+            <a:off x="4434840" y="4151376"/>
+            <a:ext cx="6626711" cy="2011680"/>
+          </a:xfrm>
+          <a:prstGeom prst="rect">
+            <a:avLst/>
+          </a:prstGeom>
+        </p:spPr>
+      </p:pic>
+      <p:sp>
+        <p:nvSpPr>
+          <p:cNvPr id="14" name="Text 9"/>
+          <p:cNvSpPr/>
+          <p:nvPr/>
+        </p:nvSpPr>
+        <p:spPr>
+          <a:xfrm>
+            <a:off x="4434840" y="6181344"/>
+            <a:ext cx="7040880" cy="457200"/>
+          </a:xfrm>
+          <a:prstGeom prst="rect">
+            <a:avLst/>
+          </a:prstGeom>
+          <a:noFill/>
+          <a:ln/>
+        </p:spPr>
+        <p:txBody>
+          <a:bodyPr wrap="square" lIns="0" tIns="0" rIns="0" bIns="0" rtlCol="0" anchor="t"/>
+          <a:lstStyle/>
+          <a:p>
+            <a:pPr marL="0" indent="0" algn="l">
+              <a:buNone/>
+            </a:pPr>
+            <a:r>
+              <a:rPr lang="en-US" sz="950" i="1" dirty="0">
+                <a:solidFill>
+                  <a:srgbClr val="6E5E62"/>
+                </a:solidFill>
+                <a:latin typeface="Calibri" pitchFamily="34" charset="0"/>
+                <a:ea typeface="Calibri" pitchFamily="34" charset="-122"/>
+                <a:cs typeface="Calibri" pitchFamily="34" charset="-120"/>
+              </a:rPr>
+              <a:t>Figura 3 · Población, densidad y superficie.</a:t>
+            </a:r>
+            <a:endParaRPr lang="en-US" sz="950" dirty="0"/>
+          </a:p>
+        </p:txBody>
+      </p:sp>
     </p:spTree>
   </p:cSld>
   <p:clrMapOvr>
@@ -3365,7 +4324,7 @@
                 <a:ea typeface="Calibri" pitchFamily="34" charset="-122"/>
                 <a:cs typeface="Calibri" pitchFamily="34" charset="-120"/>
               </a:rPr>
-              <a:t>VARIABLES CATEGÓRICAS  ·  FIGURAS 2–3</a:t>
+              <a:t>VARIABLES NUMÉRICAS  ·  FIGURA 4</a:t>
             </a:r>
             <a:endParaRPr lang="en-US" sz="1150" dirty="0"/>
           </a:p>
@@ -3407,7 +4366,7 @@
                 <a:ea typeface="Georgia" pitchFamily="34" charset="-122"/>
                 <a:cs typeface="Georgia" pitchFamily="34" charset="-120"/>
               </a:rPr>
-              <a:t>De dónde viene el </a:t>
+              <a:t>¿Predice la </a:t>
             </a:r>
             <a:r>
               <a:rPr lang="en-US" sz="4000" b="1" dirty="0">
@@ -3418,308 +4377,15 @@
                 <a:ea typeface="Georgia" pitchFamily="34" charset="-122"/>
                 <a:cs typeface="Georgia" pitchFamily="34" charset="-120"/>
               </a:rPr>
-              <a:t>talento</a:t>
+              <a:t>riqueza?</a:t>
             </a:r>
             <a:endParaRPr lang="en-US" sz="4000" dirty="0"/>
-          </a:p>
-        </p:txBody>
-      </p:sp>
-      <p:sp>
-        <p:nvSpPr>
-          <p:cNvPr id="5" name="Shape 3"/>
-          <p:cNvSpPr/>
-          <p:nvPr/>
-        </p:nvSpPr>
-        <p:spPr>
-          <a:xfrm>
-            <a:off x="822960" y="2112264"/>
-            <a:ext cx="146304" cy="146304"/>
-          </a:xfrm>
-          <a:prstGeom prst="ellipse">
-            <a:avLst/>
-          </a:prstGeom>
-          <a:solidFill>
-            <a:srgbClr val="B8862B"/>
-          </a:solidFill>
-          <a:ln/>
-        </p:spPr>
-        <p:txBody>
-          <a:bodyPr/>
-          <a:lstStyle/>
-          <a:p>
-            <a:endParaRPr lang="es-AR"/>
-          </a:p>
-        </p:txBody>
-      </p:sp>
-      <p:sp>
-        <p:nvSpPr>
-          <p:cNvPr id="6" name="Text 4"/>
-          <p:cNvSpPr/>
-          <p:nvPr/>
-        </p:nvSpPr>
-        <p:spPr>
-          <a:xfrm>
-            <a:off x="1097280" y="2011680"/>
-            <a:ext cx="3246120" cy="914400"/>
-          </a:xfrm>
-          <a:prstGeom prst="rect">
-            <a:avLst/>
-          </a:prstGeom>
-          <a:noFill/>
-          <a:ln/>
-        </p:spPr>
-        <p:txBody>
-          <a:bodyPr wrap="square" lIns="0" tIns="0" rIns="0" bIns="0" rtlCol="0" anchor="t"/>
-          <a:lstStyle/>
-          <a:p>
-            <a:pPr marL="0" indent="0">
-              <a:lnSpc>
-                <a:spcPct val="105000"/>
-              </a:lnSpc>
-              <a:buNone/>
-            </a:pPr>
-            <a:r>
-              <a:rPr lang="en-US" sz="1300" b="1" dirty="0">
-                <a:solidFill>
-                  <a:srgbClr val="8E1F3D"/>
-                </a:solidFill>
-                <a:latin typeface="Calibri" pitchFamily="34" charset="0"/>
-                <a:ea typeface="Calibri" pitchFamily="34" charset="-122"/>
-                <a:cs typeface="Calibri" pitchFamily="34" charset="-120"/>
-              </a:rPr>
-              <a:t>Sudamérica y Europa</a:t>
-            </a:r>
-            <a:r>
-              <a:rPr lang="en-US" sz="1300" dirty="0">
-                <a:solidFill>
-                  <a:srgbClr val="23191B"/>
-                </a:solidFill>
-                <a:latin typeface="Calibri" pitchFamily="34" charset="0"/>
-                <a:ea typeface="Calibri" pitchFamily="34" charset="-122"/>
-                <a:cs typeface="Calibri" pitchFamily="34" charset="-120"/>
-              </a:rPr>
-              <a:t> concentran las medianas más altas de puntaje.</a:t>
-            </a:r>
-            <a:endParaRPr lang="en-US" sz="1300" dirty="0"/>
-          </a:p>
-        </p:txBody>
-      </p:sp>
-      <p:sp>
-        <p:nvSpPr>
-          <p:cNvPr id="7" name="Shape 5"/>
-          <p:cNvSpPr/>
-          <p:nvPr/>
-        </p:nvSpPr>
-        <p:spPr>
-          <a:xfrm>
-            <a:off x="822960" y="3191256"/>
-            <a:ext cx="146304" cy="146304"/>
-          </a:xfrm>
-          <a:prstGeom prst="ellipse">
-            <a:avLst/>
-          </a:prstGeom>
-          <a:solidFill>
-            <a:srgbClr val="B8862B"/>
-          </a:solidFill>
-          <a:ln/>
-        </p:spPr>
-        <p:txBody>
-          <a:bodyPr/>
-          <a:lstStyle/>
-          <a:p>
-            <a:endParaRPr lang="es-AR"/>
-          </a:p>
-        </p:txBody>
-      </p:sp>
-      <p:sp>
-        <p:nvSpPr>
-          <p:cNvPr id="8" name="Text 6"/>
-          <p:cNvSpPr/>
-          <p:nvPr/>
-        </p:nvSpPr>
-        <p:spPr>
-          <a:xfrm>
-            <a:off x="1097280" y="3090672"/>
-            <a:ext cx="3246120" cy="914400"/>
-          </a:xfrm>
-          <a:prstGeom prst="rect">
-            <a:avLst/>
-          </a:prstGeom>
-          <a:noFill/>
-          <a:ln/>
-        </p:spPr>
-        <p:txBody>
-          <a:bodyPr wrap="square" lIns="0" tIns="0" rIns="0" bIns="0" rtlCol="0" anchor="t"/>
-          <a:lstStyle/>
-          <a:p>
-            <a:pPr marL="0" indent="0">
-              <a:lnSpc>
-                <a:spcPct val="105000"/>
-              </a:lnSpc>
-              <a:buNone/>
-            </a:pPr>
-            <a:r>
-              <a:rPr lang="en-US" sz="1300" b="1" dirty="0">
-                <a:solidFill>
-                  <a:srgbClr val="8E1F3D"/>
-                </a:solidFill>
-                <a:latin typeface="Calibri" pitchFamily="34" charset="0"/>
-                <a:ea typeface="Calibri" pitchFamily="34" charset="-122"/>
-                <a:cs typeface="Calibri" pitchFamily="34" charset="-120"/>
-              </a:rPr>
-              <a:t>Habla hispana</a:t>
-            </a:r>
-            <a:r>
-              <a:rPr lang="en-US" sz="1300" dirty="0">
-                <a:solidFill>
-                  <a:srgbClr val="23191B"/>
-                </a:solidFill>
-                <a:latin typeface="Calibri" pitchFamily="34" charset="0"/>
-                <a:ea typeface="Calibri" pitchFamily="34" charset="-122"/>
-                <a:cs typeface="Calibri" pitchFamily="34" charset="-120"/>
-              </a:rPr>
-              <a:t> se destaca por idioma — refuerza la lectura por continente.</a:t>
-            </a:r>
-            <a:endParaRPr lang="en-US" sz="1300" dirty="0"/>
-          </a:p>
-        </p:txBody>
-      </p:sp>
-      <p:sp>
-        <p:nvSpPr>
-          <p:cNvPr id="9" name="Shape 7"/>
-          <p:cNvSpPr/>
-          <p:nvPr/>
-        </p:nvSpPr>
-        <p:spPr>
-          <a:xfrm>
-            <a:off x="822960" y="4270248"/>
-            <a:ext cx="146304" cy="146304"/>
-          </a:xfrm>
-          <a:prstGeom prst="ellipse">
-            <a:avLst/>
-          </a:prstGeom>
-          <a:solidFill>
-            <a:srgbClr val="B8862B"/>
-          </a:solidFill>
-          <a:ln/>
-        </p:spPr>
-        <p:txBody>
-          <a:bodyPr/>
-          <a:lstStyle/>
-          <a:p>
-            <a:endParaRPr lang="es-AR"/>
-          </a:p>
-        </p:txBody>
-      </p:sp>
-      <p:sp>
-        <p:nvSpPr>
-          <p:cNvPr id="10" name="Text 8"/>
-          <p:cNvSpPr/>
-          <p:nvPr/>
-        </p:nvSpPr>
-        <p:spPr>
-          <a:xfrm>
-            <a:off x="1097280" y="4169664"/>
-            <a:ext cx="3246120" cy="914400"/>
-          </a:xfrm>
-          <a:prstGeom prst="rect">
-            <a:avLst/>
-          </a:prstGeom>
-          <a:noFill/>
-          <a:ln/>
-        </p:spPr>
-        <p:txBody>
-          <a:bodyPr wrap="square" lIns="0" tIns="0" rIns="0" bIns="0" rtlCol="0" anchor="t"/>
-          <a:lstStyle/>
-          <a:p>
-            <a:pPr marL="0" indent="0">
-              <a:lnSpc>
-                <a:spcPct val="105000"/>
-              </a:lnSpc>
-              <a:buNone/>
-            </a:pPr>
-            <a:r>
-              <a:rPr lang="en-US" sz="1300" b="1" dirty="0">
-                <a:solidFill>
-                  <a:srgbClr val="8E1F3D"/>
-                </a:solidFill>
-                <a:latin typeface="Calibri" pitchFamily="34" charset="0"/>
-                <a:ea typeface="Calibri" pitchFamily="34" charset="-122"/>
-                <a:cs typeface="Calibri" pitchFamily="34" charset="-120"/>
-              </a:rPr>
-              <a:t>Una “cultura del fútbol”</a:t>
-            </a:r>
-            <a:r>
-              <a:rPr lang="en-US" sz="1300" dirty="0">
-                <a:solidFill>
-                  <a:srgbClr val="23191B"/>
-                </a:solidFill>
-                <a:latin typeface="Calibri" pitchFamily="34" charset="0"/>
-                <a:ea typeface="Calibri" pitchFamily="34" charset="-122"/>
-                <a:cs typeface="Calibri" pitchFamily="34" charset="-120"/>
-              </a:rPr>
-              <a:t> subyacente, no capturada por ninguna variable económica.</a:t>
-            </a:r>
-            <a:endParaRPr lang="en-US" sz="1300" dirty="0"/>
-          </a:p>
-        </p:txBody>
-      </p:sp>
-      <p:sp>
-        <p:nvSpPr>
-          <p:cNvPr id="11" name="Text 9"/>
-          <p:cNvSpPr/>
-          <p:nvPr/>
-        </p:nvSpPr>
-        <p:spPr>
-          <a:xfrm>
-            <a:off x="822960" y="5394960"/>
-            <a:ext cx="3520440" cy="1005840"/>
-          </a:xfrm>
-          <a:prstGeom prst="rect">
-            <a:avLst/>
-          </a:prstGeom>
-          <a:noFill/>
-          <a:ln/>
-        </p:spPr>
-        <p:txBody>
-          <a:bodyPr wrap="square" lIns="0" tIns="0" rIns="0" bIns="0" rtlCol="0" anchor="t"/>
-          <a:lstStyle/>
-          <a:p>
-            <a:pPr marL="0" indent="0">
-              <a:lnSpc>
-                <a:spcPct val="105000"/>
-              </a:lnSpc>
-              <a:buNone/>
-            </a:pPr>
-            <a:r>
-              <a:rPr lang="en-US" sz="1150" b="1" i="1" dirty="0">
-                <a:solidFill>
-                  <a:srgbClr val="B8862B"/>
-                </a:solidFill>
-                <a:latin typeface="Calibri" pitchFamily="34" charset="0"/>
-                <a:ea typeface="Calibri" pitchFamily="34" charset="-122"/>
-                <a:cs typeface="Calibri" pitchFamily="34" charset="-120"/>
-              </a:rPr>
-              <a:t>Religión:  </a:t>
-            </a:r>
-            <a:r>
-              <a:rPr lang="en-US" sz="1150" i="1" dirty="0">
-                <a:solidFill>
-                  <a:srgbClr val="6E5E62"/>
-                </a:solidFill>
-                <a:latin typeface="Calibri" pitchFamily="34" charset="0"/>
-                <a:ea typeface="Calibri" pitchFamily="34" charset="-122"/>
-                <a:cs typeface="Calibri" pitchFamily="34" charset="-120"/>
-              </a:rPr>
-              <a:t>sin señal propia. Los participantes son casi todos cristianos, islámicos o sin religión; la variable se solapa con el continente.</a:t>
-            </a:r>
-            <a:endParaRPr lang="en-US" sz="1150" dirty="0"/>
           </a:p>
         </p:txBody>
       </p:sp>
       <p:pic>
         <p:nvPicPr>
-          <p:cNvPr id="12" name="Image 0" descr="/mnt/project/boxplotpuntajefifacontinente.png"/>
+          <p:cNvPr id="5" name="Image 0" descr="/mnt/project/heatmaprelacionvariablesnumericas.png"/>
           <p:cNvPicPr>
             <a:picLocks noChangeAspect="1"/>
           </p:cNvPicPr>
@@ -3733,8 +4399,8 @@
         </p:blipFill>
         <p:spPr>
           <a:xfrm>
-            <a:off x="4572000" y="1810512"/>
-            <a:ext cx="5980176" cy="1993392"/>
+            <a:off x="777240" y="1810513"/>
+            <a:ext cx="6949440" cy="3792428"/>
           </a:xfrm>
           <a:prstGeom prst="rect">
             <a:avLst/>
@@ -3743,14 +4409,14 @@
       </p:pic>
       <p:sp>
         <p:nvSpPr>
-          <p:cNvPr id="13" name="Text 10"/>
-          <p:cNvSpPr/>
-          <p:nvPr/>
-        </p:nvSpPr>
-        <p:spPr>
-          <a:xfrm>
-            <a:off x="4572000" y="3822192"/>
-            <a:ext cx="7040880" cy="457200"/>
+          <p:cNvPr id="6" name="Text 3"/>
+          <p:cNvSpPr/>
+          <p:nvPr/>
+        </p:nvSpPr>
+        <p:spPr>
+          <a:xfrm>
+            <a:off x="777240" y="5733288"/>
+            <a:ext cx="6949440" cy="457200"/>
           </a:xfrm>
           <a:prstGeom prst="rect">
             <a:avLst/>
@@ -3774,46 +4440,72 @@
                 <a:ea typeface="Calibri" pitchFamily="34" charset="-122"/>
                 <a:cs typeface="Calibri" pitchFamily="34" charset="-120"/>
               </a:rPr>
-              <a:t>Figura 2 · Puntaje FIFA por continente.</a:t>
+              <a:t>Figura 4 · Matriz de correlación de Pearson entre el puntaje FIFA, el valor del plantel y los indicadores del país.</a:t>
             </a:r>
             <a:endParaRPr lang="en-US" sz="950" dirty="0"/>
           </a:p>
         </p:txBody>
       </p:sp>
-      <p:pic>
-        <p:nvPicPr>
-          <p:cNvPr id="14" name="Image 1" descr="/mnt/project/boxplotpuntajefifaidioma.png"/>
-          <p:cNvPicPr>
-            <a:picLocks noChangeAspect="1"/>
-          </p:cNvPicPr>
-          <p:nvPr/>
-        </p:nvPicPr>
-        <p:blipFill>
-          <a:blip r:embed="rId4"/>
-          <a:stretch>
-            <a:fillRect/>
-          </a:stretch>
-        </p:blipFill>
-        <p:spPr>
-          <a:xfrm>
-            <a:off x="4572000" y="4151376"/>
-            <a:ext cx="5980176" cy="1993392"/>
-          </a:xfrm>
-          <a:prstGeom prst="rect">
-            <a:avLst/>
-          </a:prstGeom>
-        </p:spPr>
-      </p:pic>
-      <p:sp>
-        <p:nvSpPr>
-          <p:cNvPr id="15" name="Text 11"/>
-          <p:cNvSpPr/>
-          <p:nvPr/>
-        </p:nvSpPr>
-        <p:spPr>
-          <a:xfrm>
-            <a:off x="4572000" y="6163056"/>
-            <a:ext cx="7040880" cy="457200"/>
+      <p:sp>
+        <p:nvSpPr>
+          <p:cNvPr id="7" name="Text 4"/>
+          <p:cNvSpPr/>
+          <p:nvPr/>
+        </p:nvSpPr>
+        <p:spPr>
+          <a:xfrm>
+            <a:off x="8001000" y="1828800"/>
+            <a:ext cx="3657600" cy="914400"/>
+          </a:xfrm>
+          <a:prstGeom prst="rect">
+            <a:avLst/>
+          </a:prstGeom>
+          <a:noFill/>
+          <a:ln/>
+        </p:spPr>
+        <p:txBody>
+          <a:bodyPr wrap="square" lIns="0" tIns="0" rIns="0" bIns="0" rtlCol="0" anchor="ctr"/>
+          <a:lstStyle/>
+          <a:p>
+            <a:pPr marL="0" indent="0" algn="l">
+              <a:buNone/>
+            </a:pPr>
+            <a:r>
+              <a:rPr lang="en-US" sz="5400" b="1" dirty="0">
+                <a:solidFill>
+                  <a:srgbClr val="6E5E62"/>
+                </a:solidFill>
+                <a:latin typeface="Georgia" pitchFamily="34" charset="0"/>
+                <a:ea typeface="Georgia" pitchFamily="34" charset="-122"/>
+                <a:cs typeface="Georgia" pitchFamily="34" charset="-120"/>
+              </a:rPr>
+              <a:t>r = </a:t>
+            </a:r>
+            <a:r>
+              <a:rPr lang="en-US" sz="5400" b="1" dirty="0">
+                <a:solidFill>
+                  <a:srgbClr val="8E1F3D"/>
+                </a:solidFill>
+                <a:latin typeface="Georgia" pitchFamily="34" charset="0"/>
+                <a:ea typeface="Georgia" pitchFamily="34" charset="-122"/>
+                <a:cs typeface="Georgia" pitchFamily="34" charset="-120"/>
+              </a:rPr>
+              <a:t>0,76</a:t>
+            </a:r>
+            <a:endParaRPr lang="en-US" sz="5400" dirty="0"/>
+          </a:p>
+        </p:txBody>
+      </p:sp>
+      <p:sp>
+        <p:nvSpPr>
+          <p:cNvPr id="8" name="Text 5"/>
+          <p:cNvSpPr/>
+          <p:nvPr/>
+        </p:nvSpPr>
+        <p:spPr>
+          <a:xfrm>
+            <a:off x="8028432" y="2788920"/>
+            <a:ext cx="3566160" cy="548640"/>
           </a:xfrm>
           <a:prstGeom prst="rect">
             <a:avLst/>
@@ -3825,21 +4517,118 @@
           <a:bodyPr wrap="square" lIns="0" tIns="0" rIns="0" bIns="0" rtlCol="0" anchor="t"/>
           <a:lstStyle/>
           <a:p>
-            <a:pPr marL="0" indent="0" algn="l">
-              <a:buNone/>
-            </a:pPr>
-            <a:r>
-              <a:rPr lang="en-US" sz="950" i="1" dirty="0">
-                <a:solidFill>
-                  <a:srgbClr val="6E5E62"/>
-                </a:solidFill>
-                <a:latin typeface="Calibri" pitchFamily="34" charset="0"/>
-                <a:ea typeface="Calibri" pitchFamily="34" charset="-122"/>
-                <a:cs typeface="Calibri" pitchFamily="34" charset="-120"/>
-              </a:rPr>
-              <a:t>Figura 3 · Puntaje FIFA por idioma (idiomas en 3+ países).</a:t>
-            </a:r>
-            <a:endParaRPr lang="en-US" sz="950" dirty="0"/>
+            <a:pPr marL="0" indent="0">
+              <a:lnSpc>
+                <a:spcPct val="105000"/>
+              </a:lnSpc>
+              <a:buNone/>
+            </a:pPr>
+            <a:r>
+              <a:rPr lang="en-US" sz="1300" dirty="0">
+                <a:solidFill>
+                  <a:srgbClr val="23191B"/>
+                </a:solidFill>
+                <a:latin typeface="Calibri" pitchFamily="34" charset="0"/>
+                <a:ea typeface="Calibri" pitchFamily="34" charset="-122"/>
+                <a:cs typeface="Calibri" pitchFamily="34" charset="-120"/>
+              </a:rPr>
+              <a:t>Valor del plantel ↔ puntaje FIFA: la única asociación fuerte.</a:t>
+            </a:r>
+            <a:endParaRPr lang="en-US" sz="1300" dirty="0"/>
+          </a:p>
+        </p:txBody>
+      </p:sp>
+      <p:sp>
+        <p:nvSpPr>
+          <p:cNvPr id="9" name="Text 6"/>
+          <p:cNvSpPr/>
+          <p:nvPr/>
+        </p:nvSpPr>
+        <p:spPr>
+          <a:xfrm>
+            <a:off x="8028432" y="3520440"/>
+            <a:ext cx="3611880" cy="2560320"/>
+          </a:xfrm>
+          <a:prstGeom prst="rect">
+            <a:avLst/>
+          </a:prstGeom>
+          <a:noFill/>
+          <a:ln/>
+        </p:spPr>
+        <p:txBody>
+          <a:bodyPr wrap="square" lIns="0" tIns="0" rIns="0" bIns="0" rtlCol="0" anchor="t"/>
+          <a:lstStyle/>
+          <a:p>
+            <a:pPr marL="177800" indent="-177800">
+              <a:lnSpc>
+                <a:spcPct val="104000"/>
+              </a:lnSpc>
+              <a:spcAft>
+                <a:spcPts val="800"/>
+              </a:spcAft>
+              <a:buSzPct val="100000"/>
+              <a:buChar char="•"/>
+            </a:pPr>
+            <a:r>
+              <a:rPr lang="en-US" sz="1250" dirty="0">
+                <a:solidFill>
+                  <a:srgbClr val="23191B"/>
+                </a:solidFill>
+                <a:latin typeface="Calibri" pitchFamily="34" charset="0"/>
+                <a:ea typeface="Calibri" pitchFamily="34" charset="-122"/>
+                <a:cs typeface="Calibri" pitchFamily="34" charset="-120"/>
+              </a:rPr>
+              <a:t>PBI, población, densidad y PBI per cápita: sin asociación relevante con el rendimiento.</a:t>
+            </a:r>
+            <a:endParaRPr lang="en-US" sz="1250" dirty="0"/>
+          </a:p>
+          <a:p>
+            <a:pPr marL="177800" indent="-177800">
+              <a:lnSpc>
+                <a:spcPct val="104000"/>
+              </a:lnSpc>
+              <a:spcAft>
+                <a:spcPts val="800"/>
+              </a:spcAft>
+              <a:buSzPct val="100000"/>
+              <a:buChar char="•"/>
+            </a:pPr>
+            <a:r>
+              <a:rPr lang="en-US" sz="1250" dirty="0">
+                <a:solidFill>
+                  <a:srgbClr val="23191B"/>
+                </a:solidFill>
+                <a:latin typeface="Calibri" pitchFamily="34" charset="0"/>
+                <a:ea typeface="Calibri" pitchFamily="34" charset="-122"/>
+                <a:cs typeface="Calibri" pitchFamily="34" charset="-120"/>
+              </a:rPr>
+              <a:t>La prosperidad de una nación no anticipa el desempeño de su selección.</a:t>
+            </a:r>
+            <a:endParaRPr lang="en-US" sz="1250" dirty="0"/>
+          </a:p>
+          <a:p>
+            <a:pPr marL="177800" indent="-177800">
+              <a:lnSpc>
+                <a:spcPct val="104000"/>
+              </a:lnSpc>
+              <a:spcAft>
+                <a:spcPts val="800"/>
+              </a:spcAft>
+              <a:buSzPct val="100000"/>
+              <a:buChar char="•"/>
+            </a:pPr>
+            <a:r>
+              <a:rPr lang="en-US" sz="1250" dirty="0">
+                <a:solidFill>
+                  <a:srgbClr val="23191B"/>
+                </a:solidFill>
+                <a:latin typeface="Calibri" pitchFamily="34" charset="0"/>
+                <a:ea typeface="Calibri" pitchFamily="34" charset="-122"/>
+                <a:cs typeface="Calibri" pitchFamily="34" charset="-120"/>
+              </a:rPr>
+              <a:t>Sí lo hace el capital deportivo concentrado en el plantel.</a:t>
+            </a:r>
+            <a:endParaRPr lang="en-US" sz="1250" dirty="0"/>
           </a:p>
         </p:txBody>
       </p:sp>
@@ -3948,7 +4737,7 @@
                 <a:ea typeface="Calibri" pitchFamily="34" charset="-122"/>
                 <a:cs typeface="Calibri" pitchFamily="34" charset="-120"/>
               </a:rPr>
-              <a:t>LA INVERSIÓN Y SU RENDIMIENTO  ·  FIGURAS 6–7</a:t>
+              <a:t>VARIABLES CATEGÓRICAS  ·  FIGURAS 5–6</a:t>
             </a:r>
             <a:endParaRPr lang="en-US" sz="1150" dirty="0"/>
           </a:p>
@@ -3990,7 +4779,7 @@
                 <a:ea typeface="Georgia" pitchFamily="34" charset="-122"/>
                 <a:cs typeface="Georgia" pitchFamily="34" charset="-120"/>
               </a:rPr>
-              <a:t>La curva del </a:t>
+              <a:t>De dónde viene el </a:t>
             </a:r>
             <a:r>
               <a:rPr lang="en-US" sz="4000" b="1" dirty="0">
@@ -4001,15 +4790,308 @@
                 <a:ea typeface="Georgia" pitchFamily="34" charset="-122"/>
                 <a:cs typeface="Georgia" pitchFamily="34" charset="-120"/>
               </a:rPr>
-              <a:t>dinero</a:t>
+              <a:t>talento</a:t>
             </a:r>
             <a:endParaRPr lang="en-US" sz="4000" dirty="0"/>
+          </a:p>
+        </p:txBody>
+      </p:sp>
+      <p:sp>
+        <p:nvSpPr>
+          <p:cNvPr id="5" name="Shape 3"/>
+          <p:cNvSpPr/>
+          <p:nvPr/>
+        </p:nvSpPr>
+        <p:spPr>
+          <a:xfrm>
+            <a:off x="822960" y="2112264"/>
+            <a:ext cx="146304" cy="146304"/>
+          </a:xfrm>
+          <a:prstGeom prst="ellipse">
+            <a:avLst/>
+          </a:prstGeom>
+          <a:solidFill>
+            <a:srgbClr val="B8862B"/>
+          </a:solidFill>
+          <a:ln/>
+        </p:spPr>
+        <p:txBody>
+          <a:bodyPr/>
+          <a:lstStyle/>
+          <a:p>
+            <a:endParaRPr lang="es-AR"/>
+          </a:p>
+        </p:txBody>
+      </p:sp>
+      <p:sp>
+        <p:nvSpPr>
+          <p:cNvPr id="6" name="Text 4"/>
+          <p:cNvSpPr/>
+          <p:nvPr/>
+        </p:nvSpPr>
+        <p:spPr>
+          <a:xfrm>
+            <a:off x="1097280" y="2011680"/>
+            <a:ext cx="3246120" cy="914400"/>
+          </a:xfrm>
+          <a:prstGeom prst="rect">
+            <a:avLst/>
+          </a:prstGeom>
+          <a:noFill/>
+          <a:ln/>
+        </p:spPr>
+        <p:txBody>
+          <a:bodyPr wrap="square" lIns="0" tIns="0" rIns="0" bIns="0" rtlCol="0" anchor="t"/>
+          <a:lstStyle/>
+          <a:p>
+            <a:pPr marL="0" indent="0">
+              <a:lnSpc>
+                <a:spcPct val="105000"/>
+              </a:lnSpc>
+              <a:buNone/>
+            </a:pPr>
+            <a:r>
+              <a:rPr lang="en-US" sz="1300" b="1" dirty="0">
+                <a:solidFill>
+                  <a:srgbClr val="8E1F3D"/>
+                </a:solidFill>
+                <a:latin typeface="Calibri" pitchFamily="34" charset="0"/>
+                <a:ea typeface="Calibri" pitchFamily="34" charset="-122"/>
+                <a:cs typeface="Calibri" pitchFamily="34" charset="-120"/>
+              </a:rPr>
+              <a:t>Sudamérica y Europa</a:t>
+            </a:r>
+            <a:r>
+              <a:rPr lang="en-US" sz="1300" dirty="0">
+                <a:solidFill>
+                  <a:srgbClr val="23191B"/>
+                </a:solidFill>
+                <a:latin typeface="Calibri" pitchFamily="34" charset="0"/>
+                <a:ea typeface="Calibri" pitchFamily="34" charset="-122"/>
+                <a:cs typeface="Calibri" pitchFamily="34" charset="-120"/>
+              </a:rPr>
+              <a:t> concentran las medianas más altas de puntaje.</a:t>
+            </a:r>
+            <a:endParaRPr lang="en-US" sz="1300" dirty="0"/>
+          </a:p>
+        </p:txBody>
+      </p:sp>
+      <p:sp>
+        <p:nvSpPr>
+          <p:cNvPr id="7" name="Shape 5"/>
+          <p:cNvSpPr/>
+          <p:nvPr/>
+        </p:nvSpPr>
+        <p:spPr>
+          <a:xfrm>
+            <a:off x="822960" y="3191256"/>
+            <a:ext cx="146304" cy="146304"/>
+          </a:xfrm>
+          <a:prstGeom prst="ellipse">
+            <a:avLst/>
+          </a:prstGeom>
+          <a:solidFill>
+            <a:srgbClr val="B8862B"/>
+          </a:solidFill>
+          <a:ln/>
+        </p:spPr>
+        <p:txBody>
+          <a:bodyPr/>
+          <a:lstStyle/>
+          <a:p>
+            <a:endParaRPr lang="es-AR"/>
+          </a:p>
+        </p:txBody>
+      </p:sp>
+      <p:sp>
+        <p:nvSpPr>
+          <p:cNvPr id="8" name="Text 6"/>
+          <p:cNvSpPr/>
+          <p:nvPr/>
+        </p:nvSpPr>
+        <p:spPr>
+          <a:xfrm>
+            <a:off x="1097280" y="3090672"/>
+            <a:ext cx="3246120" cy="914400"/>
+          </a:xfrm>
+          <a:prstGeom prst="rect">
+            <a:avLst/>
+          </a:prstGeom>
+          <a:noFill/>
+          <a:ln/>
+        </p:spPr>
+        <p:txBody>
+          <a:bodyPr wrap="square" lIns="0" tIns="0" rIns="0" bIns="0" rtlCol="0" anchor="t"/>
+          <a:lstStyle/>
+          <a:p>
+            <a:pPr marL="0" indent="0">
+              <a:lnSpc>
+                <a:spcPct val="105000"/>
+              </a:lnSpc>
+              <a:buNone/>
+            </a:pPr>
+            <a:r>
+              <a:rPr lang="en-US" sz="1300" b="1" dirty="0">
+                <a:solidFill>
+                  <a:srgbClr val="8E1F3D"/>
+                </a:solidFill>
+                <a:latin typeface="Calibri" pitchFamily="34" charset="0"/>
+                <a:ea typeface="Calibri" pitchFamily="34" charset="-122"/>
+                <a:cs typeface="Calibri" pitchFamily="34" charset="-120"/>
+              </a:rPr>
+              <a:t>Habla hispana</a:t>
+            </a:r>
+            <a:r>
+              <a:rPr lang="en-US" sz="1300" dirty="0">
+                <a:solidFill>
+                  <a:srgbClr val="23191B"/>
+                </a:solidFill>
+                <a:latin typeface="Calibri" pitchFamily="34" charset="0"/>
+                <a:ea typeface="Calibri" pitchFamily="34" charset="-122"/>
+                <a:cs typeface="Calibri" pitchFamily="34" charset="-120"/>
+              </a:rPr>
+              <a:t> se destaca por idioma — refuerza la lectura por continente.</a:t>
+            </a:r>
+            <a:endParaRPr lang="en-US" sz="1300" dirty="0"/>
+          </a:p>
+        </p:txBody>
+      </p:sp>
+      <p:sp>
+        <p:nvSpPr>
+          <p:cNvPr id="9" name="Shape 7"/>
+          <p:cNvSpPr/>
+          <p:nvPr/>
+        </p:nvSpPr>
+        <p:spPr>
+          <a:xfrm>
+            <a:off x="822960" y="4270248"/>
+            <a:ext cx="146304" cy="146304"/>
+          </a:xfrm>
+          <a:prstGeom prst="ellipse">
+            <a:avLst/>
+          </a:prstGeom>
+          <a:solidFill>
+            <a:srgbClr val="B8862B"/>
+          </a:solidFill>
+          <a:ln/>
+        </p:spPr>
+        <p:txBody>
+          <a:bodyPr/>
+          <a:lstStyle/>
+          <a:p>
+            <a:endParaRPr lang="es-AR"/>
+          </a:p>
+        </p:txBody>
+      </p:sp>
+      <p:sp>
+        <p:nvSpPr>
+          <p:cNvPr id="10" name="Text 8"/>
+          <p:cNvSpPr/>
+          <p:nvPr/>
+        </p:nvSpPr>
+        <p:spPr>
+          <a:xfrm>
+            <a:off x="1097280" y="4169664"/>
+            <a:ext cx="3246120" cy="914400"/>
+          </a:xfrm>
+          <a:prstGeom prst="rect">
+            <a:avLst/>
+          </a:prstGeom>
+          <a:noFill/>
+          <a:ln/>
+        </p:spPr>
+        <p:txBody>
+          <a:bodyPr wrap="square" lIns="0" tIns="0" rIns="0" bIns="0" rtlCol="0" anchor="t"/>
+          <a:lstStyle/>
+          <a:p>
+            <a:pPr marL="0" indent="0">
+              <a:lnSpc>
+                <a:spcPct val="105000"/>
+              </a:lnSpc>
+              <a:buNone/>
+            </a:pPr>
+            <a:r>
+              <a:rPr lang="en-US" sz="1300" b="1" dirty="0">
+                <a:solidFill>
+                  <a:srgbClr val="8E1F3D"/>
+                </a:solidFill>
+                <a:latin typeface="Calibri" pitchFamily="34" charset="0"/>
+                <a:ea typeface="Calibri" pitchFamily="34" charset="-122"/>
+                <a:cs typeface="Calibri" pitchFamily="34" charset="-120"/>
+              </a:rPr>
+              <a:t>Una “cultura del fútbol”</a:t>
+            </a:r>
+            <a:r>
+              <a:rPr lang="en-US" sz="1300" dirty="0">
+                <a:solidFill>
+                  <a:srgbClr val="23191B"/>
+                </a:solidFill>
+                <a:latin typeface="Calibri" pitchFamily="34" charset="0"/>
+                <a:ea typeface="Calibri" pitchFamily="34" charset="-122"/>
+                <a:cs typeface="Calibri" pitchFamily="34" charset="-120"/>
+              </a:rPr>
+              <a:t> subyacente, no capturada por ninguna variable económica.</a:t>
+            </a:r>
+            <a:endParaRPr lang="en-US" sz="1300" dirty="0"/>
+          </a:p>
+        </p:txBody>
+      </p:sp>
+      <p:sp>
+        <p:nvSpPr>
+          <p:cNvPr id="11" name="Text 9"/>
+          <p:cNvSpPr/>
+          <p:nvPr/>
+        </p:nvSpPr>
+        <p:spPr>
+          <a:xfrm>
+            <a:off x="822960" y="5394960"/>
+            <a:ext cx="3520440" cy="1005840"/>
+          </a:xfrm>
+          <a:prstGeom prst="rect">
+            <a:avLst/>
+          </a:prstGeom>
+          <a:noFill/>
+          <a:ln/>
+        </p:spPr>
+        <p:txBody>
+          <a:bodyPr wrap="square" lIns="0" tIns="0" rIns="0" bIns="0" rtlCol="0" anchor="t"/>
+          <a:lstStyle/>
+          <a:p>
+            <a:pPr marL="0" indent="0">
+              <a:lnSpc>
+                <a:spcPct val="105000"/>
+              </a:lnSpc>
+              <a:buNone/>
+            </a:pPr>
+            <a:r>
+              <a:rPr lang="en-US" sz="1150" b="1" i="1" dirty="0">
+                <a:solidFill>
+                  <a:srgbClr val="B8862B"/>
+                </a:solidFill>
+                <a:latin typeface="Calibri" pitchFamily="34" charset="0"/>
+                <a:ea typeface="Calibri" pitchFamily="34" charset="-122"/>
+                <a:cs typeface="Calibri" pitchFamily="34" charset="-120"/>
+              </a:rPr>
+              <a:t>Religión:  </a:t>
+            </a:r>
+            <a:r>
+              <a:rPr lang="en-US" sz="1150" i="1" dirty="0">
+                <a:solidFill>
+                  <a:srgbClr val="6E5E62"/>
+                </a:solidFill>
+                <a:latin typeface="Calibri" pitchFamily="34" charset="0"/>
+                <a:ea typeface="Calibri" pitchFamily="34" charset="-122"/>
+                <a:cs typeface="Calibri" pitchFamily="34" charset="-120"/>
+              </a:rPr>
+              <a:t>sin señal propia. Los participantes son casi todos cristianos, islámicos o sin religión; la variable se solapa con el continente.</a:t>
+            </a:r>
+            <a:endParaRPr lang="en-US" sz="1150" dirty="0"/>
           </a:p>
         </p:txBody>
       </p:sp>
       <p:pic>
         <p:nvPicPr>
-          <p:cNvPr id="5" name="Image 0" descr="/mnt/project/ajuste_4_modelos.png"/>
+          <p:cNvPr id="12" name="Image 0" descr="/mnt/project/boxplotpuntajefifacontinente.png"/>
           <p:cNvPicPr>
             <a:picLocks noChangeAspect="1"/>
           </p:cNvPicPr>
@@ -4023,6 +5105,296 @@
         </p:blipFill>
         <p:spPr>
           <a:xfrm>
+            <a:off x="4572000" y="1810512"/>
+            <a:ext cx="5980176" cy="1993392"/>
+          </a:xfrm>
+          <a:prstGeom prst="rect">
+            <a:avLst/>
+          </a:prstGeom>
+        </p:spPr>
+      </p:pic>
+      <p:sp>
+        <p:nvSpPr>
+          <p:cNvPr id="13" name="Text 10"/>
+          <p:cNvSpPr/>
+          <p:nvPr/>
+        </p:nvSpPr>
+        <p:spPr>
+          <a:xfrm>
+            <a:off x="4572000" y="3822192"/>
+            <a:ext cx="7040880" cy="457200"/>
+          </a:xfrm>
+          <a:prstGeom prst="rect">
+            <a:avLst/>
+          </a:prstGeom>
+          <a:noFill/>
+          <a:ln/>
+        </p:spPr>
+        <p:txBody>
+          <a:bodyPr wrap="square" lIns="0" tIns="0" rIns="0" bIns="0" rtlCol="0" anchor="t"/>
+          <a:lstStyle/>
+          <a:p>
+            <a:pPr marL="0" indent="0" algn="l">
+              <a:buNone/>
+            </a:pPr>
+            <a:r>
+              <a:rPr lang="en-US" sz="950" i="1" dirty="0">
+                <a:solidFill>
+                  <a:srgbClr val="6E5E62"/>
+                </a:solidFill>
+                <a:latin typeface="Calibri" pitchFamily="34" charset="0"/>
+                <a:ea typeface="Calibri" pitchFamily="34" charset="-122"/>
+                <a:cs typeface="Calibri" pitchFamily="34" charset="-120"/>
+              </a:rPr>
+              <a:t>Figura 5 · Puntaje FIFA por continente.</a:t>
+            </a:r>
+            <a:endParaRPr lang="en-US" sz="950" dirty="0"/>
+          </a:p>
+        </p:txBody>
+      </p:sp>
+      <p:pic>
+        <p:nvPicPr>
+          <p:cNvPr id="14" name="Image 1" descr="/mnt/project/boxplotpuntajefifaidioma.png"/>
+          <p:cNvPicPr>
+            <a:picLocks noChangeAspect="1"/>
+          </p:cNvPicPr>
+          <p:nvPr/>
+        </p:nvPicPr>
+        <p:blipFill>
+          <a:blip r:embed="rId4"/>
+          <a:stretch>
+            <a:fillRect/>
+          </a:stretch>
+        </p:blipFill>
+        <p:spPr>
+          <a:xfrm>
+            <a:off x="4572000" y="4151376"/>
+            <a:ext cx="5980176" cy="1993392"/>
+          </a:xfrm>
+          <a:prstGeom prst="rect">
+            <a:avLst/>
+          </a:prstGeom>
+        </p:spPr>
+      </p:pic>
+      <p:sp>
+        <p:nvSpPr>
+          <p:cNvPr id="15" name="Text 11"/>
+          <p:cNvSpPr/>
+          <p:nvPr/>
+        </p:nvSpPr>
+        <p:spPr>
+          <a:xfrm>
+            <a:off x="4572000" y="6163056"/>
+            <a:ext cx="7040880" cy="457200"/>
+          </a:xfrm>
+          <a:prstGeom prst="rect">
+            <a:avLst/>
+          </a:prstGeom>
+          <a:noFill/>
+          <a:ln/>
+        </p:spPr>
+        <p:txBody>
+          <a:bodyPr wrap="square" lIns="0" tIns="0" rIns="0" bIns="0" rtlCol="0" anchor="t"/>
+          <a:lstStyle/>
+          <a:p>
+            <a:pPr marL="0" indent="0" algn="l">
+              <a:buNone/>
+            </a:pPr>
+            <a:r>
+              <a:rPr lang="en-US" sz="950" i="1" dirty="0">
+                <a:solidFill>
+                  <a:srgbClr val="6E5E62"/>
+                </a:solidFill>
+                <a:latin typeface="Calibri" pitchFamily="34" charset="0"/>
+                <a:ea typeface="Calibri" pitchFamily="34" charset="-122"/>
+                <a:cs typeface="Calibri" pitchFamily="34" charset="-120"/>
+              </a:rPr>
+              <a:t>Figura 6 · Puntaje FIFA por idioma (idiomas en 3+ países).</a:t>
+            </a:r>
+            <a:endParaRPr lang="en-US" sz="950" dirty="0"/>
+          </a:p>
+        </p:txBody>
+      </p:sp>
+    </p:spTree>
+  </p:cSld>
+  <p:clrMapOvr>
+    <a:masterClrMapping/>
+  </p:clrMapOvr>
+</p:sld>
+</file>
+
+<file path=ppt/slides/slide6.xml><?xml version="1.0" encoding="utf-8"?>
+<p:sld xmlns:a="http://schemas.openxmlformats.org/drawingml/2006/main" xmlns:r="http://schemas.openxmlformats.org/officeDocument/2006/relationships" xmlns:p="http://schemas.openxmlformats.org/presentationml/2006/main">
+  <p:cSld name="Slide 6">
+    <p:bg>
+      <p:bgPr>
+        <a:solidFill>
+          <a:srgbClr val="FFFFFF"/>
+        </a:solidFill>
+        <a:effectLst/>
+      </p:bgPr>
+    </p:bg>
+    <p:spTree>
+      <p:nvGrpSpPr>
+        <p:cNvPr id="1" name=""/>
+        <p:cNvGrpSpPr/>
+        <p:nvPr/>
+      </p:nvGrpSpPr>
+      <p:grpSpPr>
+        <a:xfrm>
+          <a:off x="0" y="0"/>
+          <a:ext cx="0" cy="0"/>
+          <a:chOff x="0" y="0"/>
+          <a:chExt cx="0" cy="0"/>
+        </a:xfrm>
+      </p:grpSpPr>
+      <p:sp>
+        <p:nvSpPr>
+          <p:cNvPr id="2" name="Text 0"/>
+          <p:cNvSpPr/>
+          <p:nvPr/>
+        </p:nvSpPr>
+        <p:spPr>
+          <a:xfrm>
+            <a:off x="10040112" y="164592"/>
+            <a:ext cx="1828800" cy="1371600"/>
+          </a:xfrm>
+          <a:prstGeom prst="rect">
+            <a:avLst/>
+          </a:prstGeom>
+          <a:noFill/>
+          <a:ln/>
+        </p:spPr>
+        <p:txBody>
+          <a:bodyPr wrap="square" lIns="0" tIns="0" rIns="0" bIns="0" rtlCol="0" anchor="t"/>
+          <a:lstStyle/>
+          <a:p>
+            <a:pPr marL="0" indent="0" algn="r">
+              <a:buNone/>
+            </a:pPr>
+            <a:r>
+              <a:rPr lang="en-US" sz="9600" b="1" dirty="0">
+                <a:solidFill>
+                  <a:srgbClr val="F1E2E6"/>
+                </a:solidFill>
+                <a:latin typeface="Georgia" pitchFamily="34" charset="0"/>
+                <a:ea typeface="Georgia" pitchFamily="34" charset="-122"/>
+                <a:cs typeface="Georgia" pitchFamily="34" charset="-120"/>
+              </a:rPr>
+              <a:t>04</a:t>
+            </a:r>
+            <a:endParaRPr lang="en-US" sz="9600" dirty="0"/>
+          </a:p>
+        </p:txBody>
+      </p:sp>
+      <p:sp>
+        <p:nvSpPr>
+          <p:cNvPr id="3" name="Text 1"/>
+          <p:cNvSpPr/>
+          <p:nvPr/>
+        </p:nvSpPr>
+        <p:spPr>
+          <a:xfrm>
+            <a:off x="777240" y="502920"/>
+            <a:ext cx="8229600" cy="274320"/>
+          </a:xfrm>
+          <a:prstGeom prst="rect">
+            <a:avLst/>
+          </a:prstGeom>
+          <a:noFill/>
+          <a:ln/>
+        </p:spPr>
+        <p:txBody>
+          <a:bodyPr wrap="square" lIns="0" tIns="0" rIns="0" bIns="0" rtlCol="0" anchor="ctr"/>
+          <a:lstStyle/>
+          <a:p>
+            <a:pPr marL="0" indent="0" algn="l">
+              <a:buNone/>
+            </a:pPr>
+            <a:r>
+              <a:rPr lang="en-US" sz="1150" b="1" kern="0" spc="300" dirty="0">
+                <a:solidFill>
+                  <a:srgbClr val="B8862B"/>
+                </a:solidFill>
+                <a:latin typeface="Calibri" pitchFamily="34" charset="0"/>
+                <a:ea typeface="Calibri" pitchFamily="34" charset="-122"/>
+                <a:cs typeface="Calibri" pitchFamily="34" charset="-120"/>
+              </a:rPr>
+              <a:t>LA INVERSIÓN Y SU RENDIMIENTO  ·  FIGURAS 8–9</a:t>
+            </a:r>
+            <a:endParaRPr lang="en-US" sz="1150" dirty="0"/>
+          </a:p>
+        </p:txBody>
+      </p:sp>
+      <p:sp>
+        <p:nvSpPr>
+          <p:cNvPr id="4" name="Text 2"/>
+          <p:cNvSpPr/>
+          <p:nvPr/>
+        </p:nvSpPr>
+        <p:spPr>
+          <a:xfrm>
+            <a:off x="777240" y="896112"/>
+            <a:ext cx="10058400" cy="914400"/>
+          </a:xfrm>
+          <a:prstGeom prst="rect">
+            <a:avLst/>
+          </a:prstGeom>
+          <a:noFill/>
+          <a:ln/>
+        </p:spPr>
+        <p:txBody>
+          <a:bodyPr wrap="square" lIns="0" tIns="0" rIns="0" bIns="0" rtlCol="0" anchor="t"/>
+          <a:lstStyle/>
+          <a:p>
+            <a:pPr marL="0" indent="0" algn="l">
+              <a:lnSpc>
+                <a:spcPct val="98000"/>
+              </a:lnSpc>
+              <a:buNone/>
+            </a:pPr>
+            <a:r>
+              <a:rPr lang="en-US" sz="4000" b="1" dirty="0">
+                <a:solidFill>
+                  <a:srgbClr val="23191B"/>
+                </a:solidFill>
+                <a:latin typeface="Georgia" pitchFamily="34" charset="0"/>
+                <a:ea typeface="Georgia" pitchFamily="34" charset="-122"/>
+                <a:cs typeface="Georgia" pitchFamily="34" charset="-120"/>
+              </a:rPr>
+              <a:t>La curva del </a:t>
+            </a:r>
+            <a:r>
+              <a:rPr lang="en-US" sz="4000" b="1" dirty="0">
+                <a:solidFill>
+                  <a:srgbClr val="8E1F3D"/>
+                </a:solidFill>
+                <a:latin typeface="Georgia" pitchFamily="34" charset="0"/>
+                <a:ea typeface="Georgia" pitchFamily="34" charset="-122"/>
+                <a:cs typeface="Georgia" pitchFamily="34" charset="-120"/>
+              </a:rPr>
+              <a:t>dinero</a:t>
+            </a:r>
+            <a:endParaRPr lang="en-US" sz="4000" dirty="0"/>
+          </a:p>
+        </p:txBody>
+      </p:sp>
+      <p:pic>
+        <p:nvPicPr>
+          <p:cNvPr id="5" name="Image 0" descr="/mnt/project/ajuste_4_modelos.png"/>
+          <p:cNvPicPr>
+            <a:picLocks noChangeAspect="1"/>
+          </p:cNvPicPr>
+          <p:nvPr/>
+        </p:nvPicPr>
+        <p:blipFill>
+          <a:blip r:embed="rId3"/>
+          <a:stretch>
+            <a:fillRect/>
+          </a:stretch>
+        </p:blipFill>
+        <p:spPr>
+          <a:xfrm>
             <a:off x="777240" y="1920240"/>
             <a:ext cx="5720486" cy="4206240"/>
           </a:xfrm>
@@ -4064,7 +5436,7 @@
                 <a:ea typeface="Calibri" pitchFamily="34" charset="-122"/>
                 <a:cs typeface="Calibri" pitchFamily="34" charset="-120"/>
               </a:rPr>
-              <a:t>Figuras 6–7 · Valor del plantel (miles de millones de €) vs. puntaje FIFA, con los cuatro modelos.</a:t>
+              <a:t>Figuras 8–9 · Valor del plantel (miles de millones de €) vs. puntaje FIFA, con los cuatro modelos.</a:t>
             </a:r>
             <a:endParaRPr lang="en-US" sz="950" dirty="0"/>
           </a:p>
@@ -4912,477 +6284,6 @@
 </p:sld>
 </file>
 
-<file path=ppt/slides/slide6.xml><?xml version="1.0" encoding="utf-8"?>
-<p:sld xmlns:a="http://schemas.openxmlformats.org/drawingml/2006/main" xmlns:r="http://schemas.openxmlformats.org/officeDocument/2006/relationships" xmlns:p="http://schemas.openxmlformats.org/presentationml/2006/main">
-  <p:cSld name="Slide 6">
-    <p:bg>
-      <p:bgPr>
-        <a:solidFill>
-          <a:srgbClr val="FFFFFF"/>
-        </a:solidFill>
-        <a:effectLst/>
-      </p:bgPr>
-    </p:bg>
-    <p:spTree>
-      <p:nvGrpSpPr>
-        <p:cNvPr id="1" name=""/>
-        <p:cNvGrpSpPr/>
-        <p:nvPr/>
-      </p:nvGrpSpPr>
-      <p:grpSpPr>
-        <a:xfrm>
-          <a:off x="0" y="0"/>
-          <a:ext cx="0" cy="0"/>
-          <a:chOff x="0" y="0"/>
-          <a:chExt cx="0" cy="0"/>
-        </a:xfrm>
-      </p:grpSpPr>
-      <p:sp>
-        <p:nvSpPr>
-          <p:cNvPr id="2" name="Text 0"/>
-          <p:cNvSpPr/>
-          <p:nvPr/>
-        </p:nvSpPr>
-        <p:spPr>
-          <a:xfrm>
-            <a:off x="10040112" y="164592"/>
-            <a:ext cx="1828800" cy="1371600"/>
-          </a:xfrm>
-          <a:prstGeom prst="rect">
-            <a:avLst/>
-          </a:prstGeom>
-          <a:noFill/>
-          <a:ln/>
-        </p:spPr>
-        <p:txBody>
-          <a:bodyPr wrap="square" lIns="0" tIns="0" rIns="0" bIns="0" rtlCol="0" anchor="t"/>
-          <a:lstStyle/>
-          <a:p>
-            <a:pPr marL="0" indent="0" algn="r">
-              <a:buNone/>
-            </a:pPr>
-            <a:r>
-              <a:rPr lang="en-US" sz="9600" b="1" dirty="0">
-                <a:solidFill>
-                  <a:srgbClr val="F1E2E6"/>
-                </a:solidFill>
-                <a:latin typeface="Georgia" pitchFamily="34" charset="0"/>
-                <a:ea typeface="Georgia" pitchFamily="34" charset="-122"/>
-                <a:cs typeface="Georgia" pitchFamily="34" charset="-120"/>
-              </a:rPr>
-              <a:t>04</a:t>
-            </a:r>
-            <a:endParaRPr lang="en-US" sz="9600" dirty="0"/>
-          </a:p>
-        </p:txBody>
-      </p:sp>
-      <p:sp>
-        <p:nvSpPr>
-          <p:cNvPr id="3" name="Text 1"/>
-          <p:cNvSpPr/>
-          <p:nvPr/>
-        </p:nvSpPr>
-        <p:spPr>
-          <a:xfrm>
-            <a:off x="777240" y="502920"/>
-            <a:ext cx="8229600" cy="274320"/>
-          </a:xfrm>
-          <a:prstGeom prst="rect">
-            <a:avLst/>
-          </a:prstGeom>
-          <a:noFill/>
-          <a:ln/>
-        </p:spPr>
-        <p:txBody>
-          <a:bodyPr wrap="square" lIns="0" tIns="0" rIns="0" bIns="0" rtlCol="0" anchor="ctr"/>
-          <a:lstStyle/>
-          <a:p>
-            <a:pPr marL="0" indent="0" algn="l">
-              <a:buNone/>
-            </a:pPr>
-            <a:r>
-              <a:rPr lang="en-US" sz="1150" b="1" kern="0" spc="300" dirty="0">
-                <a:solidFill>
-                  <a:srgbClr val="B8862B"/>
-                </a:solidFill>
-                <a:latin typeface="Calibri" pitchFamily="34" charset="0"/>
-                <a:ea typeface="Calibri" pitchFamily="34" charset="-122"/>
-                <a:cs typeface="Calibri" pitchFamily="34" charset="-120"/>
-              </a:rPr>
-              <a:t>CÁLCULO DIFERENCIAL  ·  FIGURA 8</a:t>
-            </a:r>
-            <a:endParaRPr lang="en-US" sz="1150" dirty="0"/>
-          </a:p>
-        </p:txBody>
-      </p:sp>
-      <p:sp>
-        <p:nvSpPr>
-          <p:cNvPr id="4" name="Text 2"/>
-          <p:cNvSpPr/>
-          <p:nvPr/>
-        </p:nvSpPr>
-        <p:spPr>
-          <a:xfrm>
-            <a:off x="777240" y="896112"/>
-            <a:ext cx="10058400" cy="914400"/>
-          </a:xfrm>
-          <a:prstGeom prst="rect">
-            <a:avLst/>
-          </a:prstGeom>
-          <a:noFill/>
-          <a:ln/>
-        </p:spPr>
-        <p:txBody>
-          <a:bodyPr wrap="square" lIns="0" tIns="0" rIns="0" bIns="0" rtlCol="0" anchor="t"/>
-          <a:lstStyle/>
-          <a:p>
-            <a:pPr marL="0" indent="0" algn="l">
-              <a:lnSpc>
-                <a:spcPct val="98000"/>
-              </a:lnSpc>
-              <a:buNone/>
-            </a:pPr>
-            <a:r>
-              <a:rPr lang="en-US" sz="4000" b="1" dirty="0">
-                <a:solidFill>
-                  <a:srgbClr val="23191B"/>
-                </a:solidFill>
-                <a:latin typeface="Georgia" pitchFamily="34" charset="0"/>
-                <a:ea typeface="Georgia" pitchFamily="34" charset="-122"/>
-                <a:cs typeface="Georgia" pitchFamily="34" charset="-120"/>
-              </a:rPr>
-              <a:t>Rendimientos </a:t>
-            </a:r>
-            <a:r>
-              <a:rPr lang="en-US" sz="4000" b="1" dirty="0">
-                <a:solidFill>
-                  <a:srgbClr val="8E1F3D"/>
-                </a:solidFill>
-                <a:latin typeface="Georgia" pitchFamily="34" charset="0"/>
-                <a:ea typeface="Georgia" pitchFamily="34" charset="-122"/>
-                <a:cs typeface="Georgia" pitchFamily="34" charset="-120"/>
-              </a:rPr>
-              <a:t>decrecientes</a:t>
-            </a:r>
-            <a:endParaRPr lang="en-US" sz="4000" dirty="0"/>
-          </a:p>
-        </p:txBody>
-      </p:sp>
-      <p:pic>
-        <p:nvPicPr>
-          <p:cNvPr id="5" name="Image 0" descr="/mnt/project/segunda_derivada_cuadratico.png"/>
-          <p:cNvPicPr>
-            <a:picLocks noChangeAspect="1"/>
-          </p:cNvPicPr>
-          <p:nvPr/>
-        </p:nvPicPr>
-        <p:blipFill>
-          <a:blip r:embed="rId3"/>
-          <a:stretch>
-            <a:fillRect/>
-          </a:stretch>
-        </p:blipFill>
-        <p:spPr>
-          <a:xfrm>
-            <a:off x="777240" y="1783080"/>
-            <a:ext cx="9567512" cy="3246120"/>
-          </a:xfrm>
-          <a:prstGeom prst="rect">
-            <a:avLst/>
-          </a:prstGeom>
-        </p:spPr>
-      </p:pic>
-      <p:sp>
-        <p:nvSpPr>
-          <p:cNvPr id="6" name="Text 3"/>
-          <p:cNvSpPr/>
-          <p:nvPr/>
-        </p:nvSpPr>
-        <p:spPr>
-          <a:xfrm>
-            <a:off x="777240" y="5074920"/>
-            <a:ext cx="10607040" cy="457200"/>
-          </a:xfrm>
-          <a:prstGeom prst="rect">
-            <a:avLst/>
-          </a:prstGeom>
-          <a:noFill/>
-          <a:ln/>
-        </p:spPr>
-        <p:txBody>
-          <a:bodyPr wrap="square" lIns="0" tIns="0" rIns="0" bIns="0" rtlCol="0" anchor="t"/>
-          <a:lstStyle/>
-          <a:p>
-            <a:pPr marL="0" indent="0" algn="l">
-              <a:buNone/>
-            </a:pPr>
-            <a:r>
-              <a:rPr lang="en-US" sz="950" i="1" dirty="0">
-                <a:solidFill>
-                  <a:srgbClr val="6E5E62"/>
-                </a:solidFill>
-                <a:latin typeface="Calibri" pitchFamily="34" charset="0"/>
-                <a:ea typeface="Calibri" pitchFamily="34" charset="-122"/>
-                <a:cs typeface="Calibri" pitchFamily="34" charset="-120"/>
-              </a:rPr>
-              <a:t>Figura 8 · Modelo cuadrático f(x) con su primera y segunda derivada.</a:t>
-            </a:r>
-            <a:endParaRPr lang="en-US" sz="950" dirty="0"/>
-          </a:p>
-        </p:txBody>
-      </p:sp>
-      <p:sp>
-        <p:nvSpPr>
-          <p:cNvPr id="7" name="Shape 4"/>
-          <p:cNvSpPr/>
-          <p:nvPr/>
-        </p:nvSpPr>
-        <p:spPr>
-          <a:xfrm>
-            <a:off x="777240" y="5212080"/>
-            <a:ext cx="10634472" cy="566928"/>
-          </a:xfrm>
-          <a:prstGeom prst="rect">
-            <a:avLst/>
-          </a:prstGeom>
-          <a:solidFill>
-            <a:srgbClr val="FBF7F4"/>
-          </a:solidFill>
-          <a:ln w="9525">
-            <a:solidFill>
-              <a:srgbClr val="E7DEDF"/>
-            </a:solidFill>
-            <a:prstDash val="solid"/>
-          </a:ln>
-        </p:spPr>
-        <p:txBody>
-          <a:bodyPr/>
-          <a:lstStyle/>
-          <a:p>
-            <a:endParaRPr lang="es-AR"/>
-          </a:p>
-        </p:txBody>
-      </p:sp>
-      <p:sp>
-        <p:nvSpPr>
-          <p:cNvPr id="8" name="Text 5"/>
-          <p:cNvSpPr/>
-          <p:nvPr/>
-        </p:nvSpPr>
-        <p:spPr>
-          <a:xfrm>
-            <a:off x="960120" y="5212080"/>
-            <a:ext cx="10241280" cy="566928"/>
-          </a:xfrm>
-          <a:prstGeom prst="rect">
-            <a:avLst/>
-          </a:prstGeom>
-          <a:noFill/>
-          <a:ln/>
-        </p:spPr>
-        <p:txBody>
-          <a:bodyPr wrap="square" lIns="0" tIns="0" rIns="0" bIns="0" rtlCol="0" anchor="ctr"/>
-          <a:lstStyle/>
-          <a:p>
-            <a:pPr marL="0" indent="0" algn="ctr">
-              <a:buNone/>
-            </a:pPr>
-            <a:r>
-              <a:rPr lang="en-US" sz="1350" b="1" dirty="0">
-                <a:solidFill>
-                  <a:srgbClr val="8E1F3D"/>
-                </a:solidFill>
-                <a:latin typeface="Consolas" pitchFamily="34" charset="0"/>
-                <a:ea typeface="Consolas" pitchFamily="34" charset="-122"/>
-                <a:cs typeface="Consolas" pitchFamily="34" charset="-120"/>
-              </a:rPr>
-              <a:t>f(x) = −235,37·x² + 612,27·x + 1.439,44      </a:t>
-            </a:r>
-            <a:r>
-              <a:rPr lang="en-US" sz="1350" dirty="0">
-                <a:solidFill>
-                  <a:srgbClr val="23191B"/>
-                </a:solidFill>
-                <a:latin typeface="Consolas" pitchFamily="34" charset="0"/>
-                <a:ea typeface="Consolas" pitchFamily="34" charset="-122"/>
-                <a:cs typeface="Consolas" pitchFamily="34" charset="-120"/>
-              </a:rPr>
-              <a:t>f′(x) = −470,74·x + 612,27      f″(x) = −470,74</a:t>
-            </a:r>
-            <a:endParaRPr lang="en-US" sz="1350" dirty="0"/>
-          </a:p>
-        </p:txBody>
-      </p:sp>
-      <p:sp>
-        <p:nvSpPr>
-          <p:cNvPr id="9" name="Text 6"/>
-          <p:cNvSpPr/>
-          <p:nvPr/>
-        </p:nvSpPr>
-        <p:spPr>
-          <a:xfrm>
-            <a:off x="777240" y="5943600"/>
-            <a:ext cx="3456432" cy="822960"/>
-          </a:xfrm>
-          <a:prstGeom prst="rect">
-            <a:avLst/>
-          </a:prstGeom>
-          <a:noFill/>
-          <a:ln/>
-        </p:spPr>
-        <p:txBody>
-          <a:bodyPr wrap="square" lIns="0" tIns="0" rIns="0" bIns="0" rtlCol="0" anchor="t"/>
-          <a:lstStyle/>
-          <a:p>
-            <a:pPr marL="0" indent="0">
-              <a:lnSpc>
-                <a:spcPct val="104000"/>
-              </a:lnSpc>
-              <a:buNone/>
-            </a:pPr>
-            <a:r>
-              <a:rPr lang="en-US" sz="1350" b="1" dirty="0">
-                <a:solidFill>
-                  <a:srgbClr val="8E1F3D"/>
-                </a:solidFill>
-                <a:latin typeface="Calibri" pitchFamily="34" charset="0"/>
-                <a:ea typeface="Calibri" pitchFamily="34" charset="-122"/>
-                <a:cs typeface="Calibri" pitchFamily="34" charset="-120"/>
-              </a:rPr>
-              <a:t>Vértice  x* ≈ €1,30 B
-</a:t>
-            </a:r>
-            <a:r>
-              <a:rPr lang="en-US" sz="1150" dirty="0">
-                <a:solidFill>
-                  <a:srgbClr val="23191B"/>
-                </a:solidFill>
-                <a:latin typeface="Calibri" pitchFamily="34" charset="0"/>
-                <a:ea typeface="Calibri" pitchFamily="34" charset="-122"/>
-                <a:cs typeface="Calibri" pitchFamily="34" charset="-120"/>
-              </a:rPr>
-              <a:t>Máximo previsto ≈ 1.838 pts FIFA (f″&lt;0 lo confirma).</a:t>
-            </a:r>
-            <a:endParaRPr lang="en-US" sz="1350" dirty="0"/>
-          </a:p>
-        </p:txBody>
-      </p:sp>
-      <p:sp>
-        <p:nvSpPr>
-          <p:cNvPr id="10" name="Text 7"/>
-          <p:cNvSpPr/>
-          <p:nvPr/>
-        </p:nvSpPr>
-        <p:spPr>
-          <a:xfrm>
-            <a:off x="4361688" y="5943600"/>
-            <a:ext cx="3456432" cy="822960"/>
-          </a:xfrm>
-          <a:prstGeom prst="rect">
-            <a:avLst/>
-          </a:prstGeom>
-          <a:noFill/>
-          <a:ln/>
-        </p:spPr>
-        <p:txBody>
-          <a:bodyPr wrap="square" lIns="0" tIns="0" rIns="0" bIns="0" rtlCol="0" anchor="t"/>
-          <a:lstStyle/>
-          <a:p>
-            <a:pPr marL="0" indent="0">
-              <a:lnSpc>
-                <a:spcPct val="104000"/>
-              </a:lnSpc>
-              <a:buNone/>
-            </a:pPr>
-            <a:r>
-              <a:rPr lang="en-US" sz="1350" b="1" dirty="0">
-                <a:solidFill>
-                  <a:srgbClr val="8E1F3D"/>
-                </a:solidFill>
-                <a:latin typeface="Calibri" pitchFamily="34" charset="0"/>
-                <a:ea typeface="Calibri" pitchFamily="34" charset="-122"/>
-                <a:cs typeface="Calibri" pitchFamily="34" charset="-120"/>
-              </a:rPr>
-              <a:t>Umbral de eficiencia
-</a:t>
-            </a:r>
-            <a:r>
-              <a:rPr lang="en-US" sz="1150" dirty="0">
-                <a:solidFill>
-                  <a:srgbClr val="23191B"/>
-                </a:solidFill>
-                <a:latin typeface="Calibri" pitchFamily="34" charset="0"/>
-                <a:ea typeface="Calibri" pitchFamily="34" charset="-122"/>
-                <a:cs typeface="Calibri" pitchFamily="34" charset="-120"/>
-              </a:rPr>
-              <a:t>Más allá del vértice, invertir deja de traducirse en mejoras.</a:t>
-            </a:r>
-            <a:endParaRPr lang="en-US" sz="1350" dirty="0"/>
-          </a:p>
-        </p:txBody>
-      </p:sp>
-      <p:sp>
-        <p:nvSpPr>
-          <p:cNvPr id="11" name="Text 8"/>
-          <p:cNvSpPr/>
-          <p:nvPr/>
-        </p:nvSpPr>
-        <p:spPr>
-          <a:xfrm>
-            <a:off x="7946136" y="5943600"/>
-            <a:ext cx="3456432" cy="822960"/>
-          </a:xfrm>
-          <a:prstGeom prst="rect">
-            <a:avLst/>
-          </a:prstGeom>
-          <a:noFill/>
-          <a:ln/>
-        </p:spPr>
-        <p:txBody>
-          <a:bodyPr wrap="square" lIns="0" tIns="0" rIns="0" bIns="0" rtlCol="0" anchor="t"/>
-          <a:lstStyle/>
-          <a:p>
-            <a:pPr marL="0" indent="0">
-              <a:lnSpc>
-                <a:spcPct val="104000"/>
-              </a:lnSpc>
-              <a:buNone/>
-            </a:pPr>
-            <a:r>
-              <a:rPr lang="en-US" sz="1350" b="1" dirty="0">
-                <a:solidFill>
-                  <a:srgbClr val="8E1F3D"/>
-                </a:solidFill>
-                <a:latin typeface="Calibri" pitchFamily="34" charset="0"/>
-                <a:ea typeface="Calibri" pitchFamily="34" charset="-122"/>
-                <a:cs typeface="Calibri" pitchFamily="34" charset="-120"/>
-              </a:rPr>
-              <a:t>Techo ya alcanzado
-</a:t>
-            </a:r>
-            <a:r>
-              <a:rPr lang="en-US" sz="1150" dirty="0">
-                <a:solidFill>
-                  <a:srgbClr val="23191B"/>
-                </a:solidFill>
-                <a:latin typeface="Calibri" pitchFamily="34" charset="0"/>
-                <a:ea typeface="Calibri" pitchFamily="34" charset="-122"/>
-                <a:cs typeface="Calibri" pitchFamily="34" charset="-120"/>
-              </a:rPr>
-              <a:t>Francia e Inglaterra operan prácticamente sobre ese límite.</a:t>
-            </a:r>
-            <a:endParaRPr lang="en-US" sz="1350" dirty="0"/>
-          </a:p>
-        </p:txBody>
-      </p:sp>
-    </p:spTree>
-  </p:cSld>
-  <p:clrMapOvr>
-    <a:masterClrMapping/>
-  </p:clrMapOvr>
-</p:sld>
-</file>
-
 <file path=ppt/slides/slide7.xml><?xml version="1.0" encoding="utf-8"?>
 <p:sld xmlns:a="http://schemas.openxmlformats.org/drawingml/2006/main" xmlns:r="http://schemas.openxmlformats.org/officeDocument/2006/relationships" xmlns:p="http://schemas.openxmlformats.org/presentationml/2006/main">
   <p:cSld name="Slide 7">
@@ -5480,7 +6381,7 @@
                 <a:ea typeface="Calibri" pitchFamily="34" charset="-122"/>
                 <a:cs typeface="Calibri" pitchFamily="34" charset="-120"/>
               </a:rPr>
-              <a:t>ANÁLISIS DE RESIDUOS  ·  FIGURA 9</a:t>
+              <a:t>CÁLCULO DIFERENCIAL  ·  FIGURA 10</a:t>
             </a:r>
             <a:endParaRPr lang="en-US" sz="1150" dirty="0"/>
           </a:p>
@@ -5522,86 +6423,18 @@
                 <a:ea typeface="Georgia" pitchFamily="34" charset="-122"/>
                 <a:cs typeface="Georgia" pitchFamily="34" charset="-120"/>
               </a:rPr>
-              <a:t>Quién rinde</a:t>
+              <a:t>Rendimientos </a:t>
             </a:r>
             <a:r>
               <a:rPr lang="en-US" sz="4000" b="1" dirty="0">
+                <a:solidFill>
+                  <a:srgbClr val="8E1F3D"/>
+                </a:solidFill>
                 <a:latin typeface="Georgia" pitchFamily="34" charset="0"/>
                 <a:ea typeface="Georgia" pitchFamily="34" charset="-122"/>
                 <a:cs typeface="Georgia" pitchFamily="34" charset="-120"/>
               </a:rPr>
-              <a:t> de </a:t>
-            </a:r>
-            <a:r>
-              <a:rPr lang="en-US" sz="4000" b="1" dirty="0" err="1">
-                <a:solidFill>
-                  <a:srgbClr val="8E1F3D"/>
-                </a:solidFill>
-                <a:latin typeface="Georgia" pitchFamily="34" charset="0"/>
-                <a:ea typeface="Georgia" pitchFamily="34" charset="-122"/>
-                <a:cs typeface="Georgia" pitchFamily="34" charset="-120"/>
-              </a:rPr>
-              <a:t>más</a:t>
-            </a:r>
-            <a:r>
-              <a:rPr lang="en-US" sz="4000" b="1" dirty="0">
-                <a:solidFill>
-                  <a:srgbClr val="8E1F3D"/>
-                </a:solidFill>
-                <a:latin typeface="Georgia" pitchFamily="34" charset="0"/>
-                <a:ea typeface="Georgia" pitchFamily="34" charset="-122"/>
-                <a:cs typeface="Georgia" pitchFamily="34" charset="-120"/>
-              </a:rPr>
-              <a:t> </a:t>
-            </a:r>
-            <a:r>
-              <a:rPr lang="en-US" sz="4000" b="1" dirty="0">
-                <a:latin typeface="Georgia" pitchFamily="34" charset="0"/>
-                <a:ea typeface="Georgia" pitchFamily="34" charset="-122"/>
-                <a:cs typeface="Georgia" pitchFamily="34" charset="-120"/>
-              </a:rPr>
-              <a:t>o</a:t>
-            </a:r>
-            <a:r>
-              <a:rPr lang="en-US" sz="4000" b="1" dirty="0">
-                <a:solidFill>
-                  <a:srgbClr val="8E1F3D"/>
-                </a:solidFill>
-                <a:latin typeface="Georgia" pitchFamily="34" charset="0"/>
-                <a:ea typeface="Georgia" pitchFamily="34" charset="-122"/>
-                <a:cs typeface="Georgia" pitchFamily="34" charset="-120"/>
-              </a:rPr>
-              <a:t> </a:t>
-            </a:r>
-            <a:r>
-              <a:rPr lang="en-US" sz="4000" b="1" dirty="0">
-                <a:latin typeface="Georgia" pitchFamily="34" charset="0"/>
-                <a:ea typeface="Georgia" pitchFamily="34" charset="-122"/>
-                <a:cs typeface="Georgia" pitchFamily="34" charset="-120"/>
-              </a:rPr>
-              <a:t>de</a:t>
-            </a:r>
-            <a:r>
-              <a:rPr lang="en-US" sz="4000" b="1" dirty="0">
-                <a:solidFill>
-                  <a:srgbClr val="8E1F3D"/>
-                </a:solidFill>
-                <a:latin typeface="Georgia" pitchFamily="34" charset="0"/>
-                <a:ea typeface="Georgia" pitchFamily="34" charset="-122"/>
-                <a:cs typeface="Georgia" pitchFamily="34" charset="-120"/>
-              </a:rPr>
-              <a:t> </a:t>
-            </a:r>
-            <a:r>
-              <a:rPr lang="en-US" sz="4000" b="1" dirty="0" err="1">
-                <a:solidFill>
-                  <a:srgbClr val="8E1F3D"/>
-                </a:solidFill>
-                <a:latin typeface="Georgia" pitchFamily="34" charset="0"/>
-                <a:ea typeface="Georgia" pitchFamily="34" charset="-122"/>
-                <a:cs typeface="Georgia" pitchFamily="34" charset="-120"/>
-              </a:rPr>
-              <a:t>menos</a:t>
+              <a:t>decrecientes</a:t>
             </a:r>
             <a:endParaRPr lang="en-US" sz="4000" dirty="0"/>
           </a:p>
@@ -5609,7 +6442,7 @@
       </p:sp>
       <p:pic>
         <p:nvPicPr>
-          <p:cNvPr id="5" name="Image 0" descr="/mnt/project/modelo_cuadratico_vertice.png"/>
+          <p:cNvPr id="5" name="Image 0" descr="/mnt/project/segunda_derivada_cuadratico.png"/>
           <p:cNvPicPr>
             <a:picLocks noChangeAspect="1"/>
           </p:cNvPicPr>
@@ -5623,8 +6456,8 @@
         </p:blipFill>
         <p:spPr>
           <a:xfrm>
-            <a:off x="777240" y="1874520"/>
-            <a:ext cx="6766560" cy="3903785"/>
+            <a:off x="777240" y="1783080"/>
+            <a:ext cx="9567512" cy="3246120"/>
           </a:xfrm>
           <a:prstGeom prst="rect">
             <a:avLst/>
@@ -5639,8 +6472,8 @@
         </p:nvSpPr>
         <p:spPr>
           <a:xfrm>
-            <a:off x="777240" y="5824025"/>
-            <a:ext cx="6766560" cy="457200"/>
+            <a:off x="777240" y="5074920"/>
+            <a:ext cx="10607040" cy="457200"/>
           </a:xfrm>
           <a:prstGeom prst="rect">
             <a:avLst/>
@@ -5664,7 +6497,7 @@
                 <a:ea typeface="Calibri" pitchFamily="34" charset="-122"/>
                 <a:cs typeface="Calibri" pitchFamily="34" charset="-120"/>
               </a:rPr>
-              <a:t>Figura 9 · Modelo con el vértice y los residuos de los casos más destacados.</a:t>
+              <a:t>Figura 10 · Modelo cuadrático f(x) con su primera y segunda derivada.</a:t>
             </a:r>
             <a:endParaRPr lang="en-US" sz="950" dirty="0"/>
           </a:p>
@@ -5672,872 +6505,14 @@
       </p:sp>
       <p:sp>
         <p:nvSpPr>
-          <p:cNvPr id="7" name="Text 4"/>
-          <p:cNvSpPr/>
-          <p:nvPr/>
-        </p:nvSpPr>
-        <p:spPr>
-          <a:xfrm>
-            <a:off x="7818120" y="1828800"/>
-            <a:ext cx="1874520" cy="274320"/>
-          </a:xfrm>
-          <a:prstGeom prst="rect">
-            <a:avLst/>
-          </a:prstGeom>
-          <a:noFill/>
-          <a:ln/>
-        </p:spPr>
-        <p:txBody>
-          <a:bodyPr wrap="square" lIns="0" tIns="0" rIns="0" bIns="0" rtlCol="0" anchor="ctr"/>
-          <a:lstStyle/>
-          <a:p>
-            <a:pPr marL="0" indent="0">
-              <a:buNone/>
-            </a:pPr>
-            <a:r>
-              <a:rPr lang="en-US" sz="1050" b="1" kern="0" spc="100" dirty="0">
-                <a:solidFill>
-                  <a:srgbClr val="2E7D52"/>
-                </a:solidFill>
-                <a:latin typeface="Calibri" pitchFamily="34" charset="0"/>
-                <a:ea typeface="Calibri" pitchFamily="34" charset="-122"/>
-                <a:cs typeface="Calibri" pitchFamily="34" charset="-120"/>
-              </a:rPr>
-              <a:t>SOBRE-RENDIMIENTO</a:t>
-            </a:r>
-            <a:endParaRPr lang="en-US" sz="1050" dirty="0"/>
-          </a:p>
-        </p:txBody>
-      </p:sp>
-      <p:sp>
-        <p:nvSpPr>
-          <p:cNvPr id="8" name="Text 5"/>
-          <p:cNvSpPr/>
-          <p:nvPr/>
-        </p:nvSpPr>
-        <p:spPr>
-          <a:xfrm>
-            <a:off x="7818120" y="2157984"/>
-            <a:ext cx="1371600" cy="347472"/>
-          </a:xfrm>
-          <a:prstGeom prst="rect">
-            <a:avLst/>
-          </a:prstGeom>
-          <a:noFill/>
-          <a:ln/>
-        </p:spPr>
-        <p:txBody>
-          <a:bodyPr wrap="square" lIns="0" tIns="0" rIns="0" bIns="0" rtlCol="0" anchor="ctr"/>
-          <a:lstStyle/>
-          <a:p>
-            <a:pPr marL="0" indent="0">
-              <a:buNone/>
-            </a:pPr>
-            <a:r>
-              <a:rPr lang="en-US" sz="1300" dirty="0">
-                <a:solidFill>
-                  <a:srgbClr val="23191B"/>
-                </a:solidFill>
-                <a:latin typeface="Calibri" pitchFamily="34" charset="0"/>
-                <a:ea typeface="Calibri" pitchFamily="34" charset="-122"/>
-                <a:cs typeface="Calibri" pitchFamily="34" charset="-120"/>
-              </a:rPr>
-              <a:t>Argentina</a:t>
-            </a:r>
-            <a:endParaRPr lang="en-US" sz="1300" dirty="0"/>
-          </a:p>
-        </p:txBody>
-      </p:sp>
-      <p:sp>
-        <p:nvSpPr>
-          <p:cNvPr id="9" name="Text 6"/>
-          <p:cNvSpPr/>
-          <p:nvPr/>
-        </p:nvSpPr>
-        <p:spPr>
-          <a:xfrm>
-            <a:off x="9144000" y="2157984"/>
-            <a:ext cx="640080" cy="347472"/>
-          </a:xfrm>
-          <a:prstGeom prst="rect">
-            <a:avLst/>
-          </a:prstGeom>
-          <a:noFill/>
-          <a:ln/>
-        </p:spPr>
-        <p:txBody>
-          <a:bodyPr wrap="square" lIns="0" tIns="0" rIns="0" bIns="0" rtlCol="0" anchor="ctr"/>
-          <a:lstStyle/>
-          <a:p>
-            <a:pPr marL="0" indent="0" algn="r">
-              <a:buNone/>
-            </a:pPr>
-            <a:r>
-              <a:rPr lang="en-US" sz="1300" b="1" dirty="0">
-                <a:solidFill>
-                  <a:srgbClr val="2E7D52"/>
-                </a:solidFill>
-                <a:latin typeface="Georgia" pitchFamily="34" charset="0"/>
-                <a:ea typeface="Georgia" pitchFamily="34" charset="-122"/>
-                <a:cs typeface="Georgia" pitchFamily="34" charset="-120"/>
-              </a:rPr>
-              <a:t>+161</a:t>
-            </a:r>
-            <a:endParaRPr lang="en-US" sz="1300" dirty="0"/>
-          </a:p>
-        </p:txBody>
-      </p:sp>
-      <p:sp>
-        <p:nvSpPr>
-          <p:cNvPr id="10" name="Text 7"/>
-          <p:cNvSpPr/>
-          <p:nvPr/>
-        </p:nvSpPr>
-        <p:spPr>
-          <a:xfrm>
-            <a:off x="7818120" y="2542032"/>
-            <a:ext cx="1371600" cy="347472"/>
-          </a:xfrm>
-          <a:prstGeom prst="rect">
-            <a:avLst/>
-          </a:prstGeom>
-          <a:noFill/>
-          <a:ln/>
-        </p:spPr>
-        <p:txBody>
-          <a:bodyPr wrap="square" lIns="0" tIns="0" rIns="0" bIns="0" rtlCol="0" anchor="ctr"/>
-          <a:lstStyle/>
-          <a:p>
-            <a:pPr marL="0" indent="0">
-              <a:buNone/>
-            </a:pPr>
-            <a:r>
-              <a:rPr lang="en-US" sz="1300" dirty="0">
-                <a:solidFill>
-                  <a:srgbClr val="23191B"/>
-                </a:solidFill>
-                <a:latin typeface="Calibri" pitchFamily="34" charset="0"/>
-                <a:ea typeface="Calibri" pitchFamily="34" charset="-122"/>
-                <a:cs typeface="Calibri" pitchFamily="34" charset="-120"/>
-              </a:rPr>
-              <a:t>México</a:t>
-            </a:r>
-            <a:endParaRPr lang="en-US" sz="1300" dirty="0"/>
-          </a:p>
-        </p:txBody>
-      </p:sp>
-      <p:sp>
-        <p:nvSpPr>
-          <p:cNvPr id="11" name="Text 8"/>
-          <p:cNvSpPr/>
-          <p:nvPr/>
-        </p:nvSpPr>
-        <p:spPr>
-          <a:xfrm>
-            <a:off x="9144000" y="2542032"/>
-            <a:ext cx="640080" cy="347472"/>
-          </a:xfrm>
-          <a:prstGeom prst="rect">
-            <a:avLst/>
-          </a:prstGeom>
-          <a:noFill/>
-          <a:ln/>
-        </p:spPr>
-        <p:txBody>
-          <a:bodyPr wrap="square" lIns="0" tIns="0" rIns="0" bIns="0" rtlCol="0" anchor="ctr"/>
-          <a:lstStyle/>
-          <a:p>
-            <a:pPr marL="0" indent="0" algn="r">
-              <a:buNone/>
-            </a:pPr>
-            <a:r>
-              <a:rPr lang="en-US" sz="1300" b="1" dirty="0">
-                <a:solidFill>
-                  <a:srgbClr val="2E7D52"/>
-                </a:solidFill>
-                <a:latin typeface="Georgia" pitchFamily="34" charset="0"/>
-                <a:ea typeface="Georgia" pitchFamily="34" charset="-122"/>
-                <a:cs typeface="Georgia" pitchFamily="34" charset="-120"/>
-              </a:rPr>
-              <a:t>+159</a:t>
-            </a:r>
-            <a:endParaRPr lang="en-US" sz="1300" dirty="0"/>
-          </a:p>
-        </p:txBody>
-      </p:sp>
-      <p:sp>
-        <p:nvSpPr>
-          <p:cNvPr id="12" name="Text 9"/>
-          <p:cNvSpPr/>
-          <p:nvPr/>
-        </p:nvSpPr>
-        <p:spPr>
-          <a:xfrm>
-            <a:off x="7818120" y="2926080"/>
-            <a:ext cx="1371600" cy="347472"/>
-          </a:xfrm>
-          <a:prstGeom prst="rect">
-            <a:avLst/>
-          </a:prstGeom>
-          <a:noFill/>
-          <a:ln/>
-        </p:spPr>
-        <p:txBody>
-          <a:bodyPr wrap="square" lIns="0" tIns="0" rIns="0" bIns="0" rtlCol="0" anchor="ctr"/>
-          <a:lstStyle/>
-          <a:p>
-            <a:pPr marL="0" indent="0">
-              <a:buNone/>
-            </a:pPr>
-            <a:r>
-              <a:rPr lang="en-US" sz="1300" dirty="0">
-                <a:solidFill>
-                  <a:srgbClr val="23191B"/>
-                </a:solidFill>
-                <a:latin typeface="Calibri" pitchFamily="34" charset="0"/>
-                <a:ea typeface="Calibri" pitchFamily="34" charset="-122"/>
-                <a:cs typeface="Calibri" pitchFamily="34" charset="-120"/>
-              </a:rPr>
-              <a:t>Irán</a:t>
-            </a:r>
-            <a:endParaRPr lang="en-US" sz="1300" dirty="0"/>
-          </a:p>
-        </p:txBody>
-      </p:sp>
-      <p:sp>
-        <p:nvSpPr>
-          <p:cNvPr id="13" name="Text 10"/>
-          <p:cNvSpPr/>
-          <p:nvPr/>
-        </p:nvSpPr>
-        <p:spPr>
-          <a:xfrm>
-            <a:off x="9144000" y="2926080"/>
-            <a:ext cx="640080" cy="347472"/>
-          </a:xfrm>
-          <a:prstGeom prst="rect">
-            <a:avLst/>
-          </a:prstGeom>
-          <a:noFill/>
-          <a:ln/>
-        </p:spPr>
-        <p:txBody>
-          <a:bodyPr wrap="square" lIns="0" tIns="0" rIns="0" bIns="0" rtlCol="0" anchor="ctr"/>
-          <a:lstStyle/>
-          <a:p>
-            <a:pPr marL="0" indent="0" algn="r">
-              <a:buNone/>
-            </a:pPr>
-            <a:r>
-              <a:rPr lang="en-US" sz="1300" b="1" dirty="0">
-                <a:solidFill>
-                  <a:srgbClr val="2E7D52"/>
-                </a:solidFill>
-                <a:latin typeface="Georgia" pitchFamily="34" charset="0"/>
-                <a:ea typeface="Georgia" pitchFamily="34" charset="-122"/>
-                <a:cs typeface="Georgia" pitchFamily="34" charset="-120"/>
-              </a:rPr>
-              <a:t>+155</a:t>
-            </a:r>
-            <a:endParaRPr lang="en-US" sz="1300" dirty="0"/>
-          </a:p>
-        </p:txBody>
-      </p:sp>
-      <p:sp>
-        <p:nvSpPr>
-          <p:cNvPr id="14" name="Text 11"/>
-          <p:cNvSpPr/>
-          <p:nvPr/>
-        </p:nvSpPr>
-        <p:spPr>
-          <a:xfrm>
-            <a:off x="7818120" y="3310128"/>
-            <a:ext cx="1371600" cy="347472"/>
-          </a:xfrm>
-          <a:prstGeom prst="rect">
-            <a:avLst/>
-          </a:prstGeom>
-          <a:noFill/>
-          <a:ln/>
-        </p:spPr>
-        <p:txBody>
-          <a:bodyPr wrap="square" lIns="0" tIns="0" rIns="0" bIns="0" rtlCol="0" anchor="ctr"/>
-          <a:lstStyle/>
-          <a:p>
-            <a:pPr marL="0" indent="0">
-              <a:buNone/>
-            </a:pPr>
-            <a:r>
-              <a:rPr lang="en-US" sz="1300" dirty="0">
-                <a:solidFill>
-                  <a:srgbClr val="23191B"/>
-                </a:solidFill>
-                <a:latin typeface="Calibri" pitchFamily="34" charset="0"/>
-                <a:ea typeface="Calibri" pitchFamily="34" charset="-122"/>
-                <a:cs typeface="Calibri" pitchFamily="34" charset="-120"/>
-              </a:rPr>
-              <a:t>EE. UU.</a:t>
-            </a:r>
-            <a:endParaRPr lang="en-US" sz="1300" dirty="0"/>
-          </a:p>
-        </p:txBody>
-      </p:sp>
-      <p:sp>
-        <p:nvSpPr>
-          <p:cNvPr id="15" name="Text 12"/>
-          <p:cNvSpPr/>
-          <p:nvPr/>
-        </p:nvSpPr>
-        <p:spPr>
-          <a:xfrm>
-            <a:off x="9144000" y="3310128"/>
-            <a:ext cx="640080" cy="347472"/>
-          </a:xfrm>
-          <a:prstGeom prst="rect">
-            <a:avLst/>
-          </a:prstGeom>
-          <a:noFill/>
-          <a:ln/>
-        </p:spPr>
-        <p:txBody>
-          <a:bodyPr wrap="square" lIns="0" tIns="0" rIns="0" bIns="0" rtlCol="0" anchor="ctr"/>
-          <a:lstStyle/>
-          <a:p>
-            <a:pPr marL="0" indent="0" algn="r">
-              <a:buNone/>
-            </a:pPr>
-            <a:r>
-              <a:rPr lang="en-US" sz="1300" b="1" dirty="0">
-                <a:solidFill>
-                  <a:srgbClr val="2E7D52"/>
-                </a:solidFill>
-                <a:latin typeface="Georgia" pitchFamily="34" charset="0"/>
-                <a:ea typeface="Georgia" pitchFamily="34" charset="-122"/>
-                <a:cs typeface="Georgia" pitchFamily="34" charset="-120"/>
-              </a:rPr>
-              <a:t>+137</a:t>
-            </a:r>
-            <a:endParaRPr lang="en-US" sz="1300" dirty="0"/>
-          </a:p>
-        </p:txBody>
-      </p:sp>
-      <p:sp>
-        <p:nvSpPr>
-          <p:cNvPr id="16" name="Text 13"/>
-          <p:cNvSpPr/>
-          <p:nvPr/>
-        </p:nvSpPr>
-        <p:spPr>
-          <a:xfrm>
-            <a:off x="7818120" y="3694176"/>
-            <a:ext cx="1371600" cy="347472"/>
-          </a:xfrm>
-          <a:prstGeom prst="rect">
-            <a:avLst/>
-          </a:prstGeom>
-          <a:noFill/>
-          <a:ln/>
-        </p:spPr>
-        <p:txBody>
-          <a:bodyPr wrap="square" lIns="0" tIns="0" rIns="0" bIns="0" rtlCol="0" anchor="ctr"/>
-          <a:lstStyle/>
-          <a:p>
-            <a:pPr marL="0" indent="0">
-              <a:buNone/>
-            </a:pPr>
-            <a:r>
-              <a:rPr lang="en-US" sz="1300" dirty="0">
-                <a:solidFill>
-                  <a:srgbClr val="23191B"/>
-                </a:solidFill>
-                <a:latin typeface="Calibri" pitchFamily="34" charset="0"/>
-                <a:ea typeface="Calibri" pitchFamily="34" charset="-122"/>
-                <a:cs typeface="Calibri" pitchFamily="34" charset="-120"/>
-              </a:rPr>
-              <a:t>Croacia</a:t>
-            </a:r>
-            <a:endParaRPr lang="en-US" sz="1300" dirty="0"/>
-          </a:p>
-        </p:txBody>
-      </p:sp>
-      <p:sp>
-        <p:nvSpPr>
-          <p:cNvPr id="17" name="Text 14"/>
-          <p:cNvSpPr/>
-          <p:nvPr/>
-        </p:nvSpPr>
-        <p:spPr>
-          <a:xfrm>
-            <a:off x="9144000" y="3694176"/>
-            <a:ext cx="640080" cy="347472"/>
-          </a:xfrm>
-          <a:prstGeom prst="rect">
-            <a:avLst/>
-          </a:prstGeom>
-          <a:noFill/>
-          <a:ln/>
-        </p:spPr>
-        <p:txBody>
-          <a:bodyPr wrap="square" lIns="0" tIns="0" rIns="0" bIns="0" rtlCol="0" anchor="ctr"/>
-          <a:lstStyle/>
-          <a:p>
-            <a:pPr marL="0" indent="0" algn="r">
-              <a:buNone/>
-            </a:pPr>
-            <a:r>
-              <a:rPr lang="en-US" sz="1300" b="1" dirty="0">
-                <a:solidFill>
-                  <a:srgbClr val="2E7D52"/>
-                </a:solidFill>
-                <a:latin typeface="Georgia" pitchFamily="34" charset="0"/>
-                <a:ea typeface="Georgia" pitchFamily="34" charset="-122"/>
-                <a:cs typeface="Georgia" pitchFamily="34" charset="-120"/>
-              </a:rPr>
-              <a:t>+135</a:t>
-            </a:r>
-            <a:endParaRPr lang="en-US" sz="1300" dirty="0"/>
-          </a:p>
-        </p:txBody>
-      </p:sp>
-      <p:sp>
-        <p:nvSpPr>
-          <p:cNvPr id="18" name="Text 15"/>
-          <p:cNvSpPr/>
-          <p:nvPr/>
-        </p:nvSpPr>
-        <p:spPr>
-          <a:xfrm>
-            <a:off x="10012680" y="1828800"/>
-            <a:ext cx="1828800" cy="274320"/>
-          </a:xfrm>
-          <a:prstGeom prst="rect">
-            <a:avLst/>
-          </a:prstGeom>
-          <a:noFill/>
-          <a:ln/>
-        </p:spPr>
-        <p:txBody>
-          <a:bodyPr wrap="square" lIns="0" tIns="0" rIns="0" bIns="0" rtlCol="0" anchor="ctr"/>
-          <a:lstStyle/>
-          <a:p>
-            <a:pPr marL="0" indent="0">
-              <a:buNone/>
-            </a:pPr>
-            <a:r>
-              <a:rPr lang="en-US" sz="1050" b="1" kern="0" spc="100" dirty="0">
-                <a:solidFill>
-                  <a:srgbClr val="C0392B"/>
-                </a:solidFill>
-                <a:latin typeface="Calibri" pitchFamily="34" charset="0"/>
-                <a:ea typeface="Calibri" pitchFamily="34" charset="-122"/>
-                <a:cs typeface="Calibri" pitchFamily="34" charset="-120"/>
-              </a:rPr>
-              <a:t>SUB-RENDIMIENTO</a:t>
-            </a:r>
-            <a:endParaRPr lang="en-US" sz="1050" dirty="0"/>
-          </a:p>
-        </p:txBody>
-      </p:sp>
-      <p:sp>
-        <p:nvSpPr>
-          <p:cNvPr id="19" name="Text 16"/>
-          <p:cNvSpPr/>
-          <p:nvPr/>
-        </p:nvSpPr>
-        <p:spPr>
-          <a:xfrm>
-            <a:off x="10012680" y="2157984"/>
-            <a:ext cx="1280160" cy="347472"/>
-          </a:xfrm>
-          <a:prstGeom prst="rect">
-            <a:avLst/>
-          </a:prstGeom>
-          <a:noFill/>
-          <a:ln/>
-        </p:spPr>
-        <p:txBody>
-          <a:bodyPr wrap="square" lIns="0" tIns="0" rIns="0" bIns="0" rtlCol="0" anchor="ctr"/>
-          <a:lstStyle/>
-          <a:p>
-            <a:pPr marL="0" indent="0">
-              <a:buNone/>
-            </a:pPr>
-            <a:r>
-              <a:rPr lang="en-US" sz="1300" dirty="0">
-                <a:solidFill>
-                  <a:srgbClr val="23191B"/>
-                </a:solidFill>
-                <a:latin typeface="Calibri" pitchFamily="34" charset="0"/>
-                <a:ea typeface="Calibri" pitchFamily="34" charset="-122"/>
-                <a:cs typeface="Calibri" pitchFamily="34" charset="-120"/>
-              </a:rPr>
-              <a:t>Ghana</a:t>
-            </a:r>
-            <a:endParaRPr lang="en-US" sz="1300" dirty="0"/>
-          </a:p>
-        </p:txBody>
-      </p:sp>
-      <p:sp>
-        <p:nvSpPr>
-          <p:cNvPr id="20" name="Text 17"/>
-          <p:cNvSpPr/>
-          <p:nvPr/>
-        </p:nvSpPr>
-        <p:spPr>
-          <a:xfrm>
-            <a:off x="11247120" y="2157984"/>
-            <a:ext cx="640080" cy="347472"/>
-          </a:xfrm>
-          <a:prstGeom prst="rect">
-            <a:avLst/>
-          </a:prstGeom>
-          <a:noFill/>
-          <a:ln/>
-        </p:spPr>
-        <p:txBody>
-          <a:bodyPr wrap="square" lIns="0" tIns="0" rIns="0" bIns="0" rtlCol="0" anchor="ctr"/>
-          <a:lstStyle/>
-          <a:p>
-            <a:pPr marL="0" indent="0" algn="r">
-              <a:buNone/>
-            </a:pPr>
-            <a:r>
-              <a:rPr lang="en-US" sz="1300" b="1" dirty="0">
-                <a:solidFill>
-                  <a:srgbClr val="C0392B"/>
-                </a:solidFill>
-                <a:latin typeface="Georgia" pitchFamily="34" charset="0"/>
-                <a:ea typeface="Georgia" pitchFamily="34" charset="-122"/>
-                <a:cs typeface="Georgia" pitchFamily="34" charset="-120"/>
-              </a:rPr>
-              <a:t>−188</a:t>
-            </a:r>
-            <a:endParaRPr lang="en-US" sz="1300" dirty="0"/>
-          </a:p>
-        </p:txBody>
-      </p:sp>
-      <p:sp>
-        <p:nvSpPr>
-          <p:cNvPr id="21" name="Text 18"/>
-          <p:cNvSpPr/>
-          <p:nvPr/>
-        </p:nvSpPr>
-        <p:spPr>
-          <a:xfrm>
-            <a:off x="10012680" y="2542032"/>
-            <a:ext cx="1280160" cy="347472"/>
-          </a:xfrm>
-          <a:prstGeom prst="rect">
-            <a:avLst/>
-          </a:prstGeom>
-          <a:noFill/>
-          <a:ln/>
-        </p:spPr>
-        <p:txBody>
-          <a:bodyPr wrap="square" lIns="0" tIns="0" rIns="0" bIns="0" rtlCol="0" anchor="ctr"/>
-          <a:lstStyle/>
-          <a:p>
-            <a:pPr marL="0" indent="0">
-              <a:buNone/>
-            </a:pPr>
-            <a:r>
-              <a:rPr lang="en-US" sz="1300" dirty="0">
-                <a:solidFill>
-                  <a:srgbClr val="23191B"/>
-                </a:solidFill>
-                <a:latin typeface="Calibri" pitchFamily="34" charset="0"/>
-                <a:ea typeface="Calibri" pitchFamily="34" charset="-122"/>
-                <a:cs typeface="Calibri" pitchFamily="34" charset="-120"/>
-              </a:rPr>
-              <a:t>Haití</a:t>
-            </a:r>
-            <a:endParaRPr lang="en-US" sz="1300" dirty="0"/>
-          </a:p>
-        </p:txBody>
-      </p:sp>
-      <p:sp>
-        <p:nvSpPr>
-          <p:cNvPr id="22" name="Text 19"/>
-          <p:cNvSpPr/>
-          <p:nvPr/>
-        </p:nvSpPr>
-        <p:spPr>
-          <a:xfrm>
-            <a:off x="11247120" y="2542032"/>
-            <a:ext cx="640080" cy="347472"/>
-          </a:xfrm>
-          <a:prstGeom prst="rect">
-            <a:avLst/>
-          </a:prstGeom>
-          <a:noFill/>
-          <a:ln/>
-        </p:spPr>
-        <p:txBody>
-          <a:bodyPr wrap="square" lIns="0" tIns="0" rIns="0" bIns="0" rtlCol="0" anchor="ctr"/>
-          <a:lstStyle/>
-          <a:p>
-            <a:pPr marL="0" indent="0" algn="r">
-              <a:buNone/>
-            </a:pPr>
-            <a:r>
-              <a:rPr lang="en-US" sz="1300" b="1" dirty="0">
-                <a:solidFill>
-                  <a:srgbClr val="C0392B"/>
-                </a:solidFill>
-                <a:latin typeface="Georgia" pitchFamily="34" charset="0"/>
-                <a:ea typeface="Georgia" pitchFamily="34" charset="-122"/>
-                <a:cs typeface="Georgia" pitchFamily="34" charset="-120"/>
-              </a:rPr>
-              <a:t>−171</a:t>
-            </a:r>
-            <a:endParaRPr lang="en-US" sz="1300" dirty="0"/>
-          </a:p>
-        </p:txBody>
-      </p:sp>
-      <p:sp>
-        <p:nvSpPr>
-          <p:cNvPr id="23" name="Text 20"/>
-          <p:cNvSpPr/>
-          <p:nvPr/>
-        </p:nvSpPr>
-        <p:spPr>
-          <a:xfrm>
-            <a:off x="10012680" y="2926080"/>
-            <a:ext cx="1280160" cy="347472"/>
-          </a:xfrm>
-          <a:prstGeom prst="rect">
-            <a:avLst/>
-          </a:prstGeom>
-          <a:noFill/>
-          <a:ln/>
-        </p:spPr>
-        <p:txBody>
-          <a:bodyPr wrap="square" lIns="0" tIns="0" rIns="0" bIns="0" rtlCol="0" anchor="ctr"/>
-          <a:lstStyle/>
-          <a:p>
-            <a:pPr marL="0" indent="0">
-              <a:buNone/>
-            </a:pPr>
-            <a:r>
-              <a:rPr lang="en-US" sz="1300" dirty="0">
-                <a:solidFill>
-                  <a:srgbClr val="23191B"/>
-                </a:solidFill>
-                <a:latin typeface="Calibri" pitchFamily="34" charset="0"/>
-                <a:ea typeface="Calibri" pitchFamily="34" charset="-122"/>
-                <a:cs typeface="Calibri" pitchFamily="34" charset="-120"/>
-              </a:rPr>
-              <a:t>Suecia</a:t>
-            </a:r>
-            <a:endParaRPr lang="en-US" sz="1300" dirty="0"/>
-          </a:p>
-        </p:txBody>
-      </p:sp>
-      <p:sp>
-        <p:nvSpPr>
-          <p:cNvPr id="24" name="Text 21"/>
-          <p:cNvSpPr/>
-          <p:nvPr/>
-        </p:nvSpPr>
-        <p:spPr>
-          <a:xfrm>
-            <a:off x="11247120" y="2926080"/>
-            <a:ext cx="640080" cy="347472"/>
-          </a:xfrm>
-          <a:prstGeom prst="rect">
-            <a:avLst/>
-          </a:prstGeom>
-          <a:noFill/>
-          <a:ln/>
-        </p:spPr>
-        <p:txBody>
-          <a:bodyPr wrap="square" lIns="0" tIns="0" rIns="0" bIns="0" rtlCol="0" anchor="ctr"/>
-          <a:lstStyle/>
-          <a:p>
-            <a:pPr marL="0" indent="0" algn="r">
-              <a:buNone/>
-            </a:pPr>
-            <a:r>
-              <a:rPr lang="en-US" sz="1300" b="1" dirty="0">
-                <a:solidFill>
-                  <a:srgbClr val="C0392B"/>
-                </a:solidFill>
-                <a:latin typeface="Georgia" pitchFamily="34" charset="0"/>
-                <a:ea typeface="Georgia" pitchFamily="34" charset="-122"/>
-                <a:cs typeface="Georgia" pitchFamily="34" charset="-120"/>
-              </a:rPr>
-              <a:t>−170</a:t>
-            </a:r>
-            <a:endParaRPr lang="en-US" sz="1300" dirty="0"/>
-          </a:p>
-        </p:txBody>
-      </p:sp>
-      <p:sp>
-        <p:nvSpPr>
-          <p:cNvPr id="25" name="Text 22"/>
-          <p:cNvSpPr/>
-          <p:nvPr/>
-        </p:nvSpPr>
-        <p:spPr>
-          <a:xfrm>
-            <a:off x="10012680" y="3310128"/>
-            <a:ext cx="1280160" cy="347472"/>
-          </a:xfrm>
-          <a:prstGeom prst="rect">
-            <a:avLst/>
-          </a:prstGeom>
-          <a:noFill/>
-          <a:ln/>
-        </p:spPr>
-        <p:txBody>
-          <a:bodyPr wrap="square" lIns="0" tIns="0" rIns="0" bIns="0" rtlCol="0" anchor="ctr"/>
-          <a:lstStyle/>
-          <a:p>
-            <a:pPr marL="0" indent="0">
-              <a:buNone/>
-            </a:pPr>
-            <a:r>
-              <a:rPr lang="en-US" sz="1300" dirty="0">
-                <a:solidFill>
-                  <a:srgbClr val="23191B"/>
-                </a:solidFill>
-                <a:latin typeface="Calibri" pitchFamily="34" charset="0"/>
-                <a:ea typeface="Calibri" pitchFamily="34" charset="-122"/>
-                <a:cs typeface="Calibri" pitchFamily="34" charset="-120"/>
-              </a:rPr>
-              <a:t>N. Zelanda</a:t>
-            </a:r>
-            <a:endParaRPr lang="en-US" sz="1300" dirty="0"/>
-          </a:p>
-        </p:txBody>
-      </p:sp>
-      <p:sp>
-        <p:nvSpPr>
-          <p:cNvPr id="26" name="Text 23"/>
-          <p:cNvSpPr/>
-          <p:nvPr/>
-        </p:nvSpPr>
-        <p:spPr>
-          <a:xfrm>
-            <a:off x="11247120" y="3310128"/>
-            <a:ext cx="640080" cy="347472"/>
-          </a:xfrm>
-          <a:prstGeom prst="rect">
-            <a:avLst/>
-          </a:prstGeom>
-          <a:noFill/>
-          <a:ln/>
-        </p:spPr>
-        <p:txBody>
-          <a:bodyPr wrap="square" lIns="0" tIns="0" rIns="0" bIns="0" rtlCol="0" anchor="ctr"/>
-          <a:lstStyle/>
-          <a:p>
-            <a:pPr marL="0" indent="0" algn="r">
-              <a:buNone/>
-            </a:pPr>
-            <a:r>
-              <a:rPr lang="en-US" sz="1300" b="1" dirty="0">
-                <a:solidFill>
-                  <a:srgbClr val="C0392B"/>
-                </a:solidFill>
-                <a:latin typeface="Georgia" pitchFamily="34" charset="0"/>
-                <a:ea typeface="Georgia" pitchFamily="34" charset="-122"/>
-                <a:cs typeface="Georgia" pitchFamily="34" charset="-120"/>
-              </a:rPr>
-              <a:t>−168</a:t>
-            </a:r>
-            <a:endParaRPr lang="en-US" sz="1300" dirty="0"/>
-          </a:p>
-        </p:txBody>
-      </p:sp>
-      <p:sp>
-        <p:nvSpPr>
-          <p:cNvPr id="27" name="Text 24"/>
-          <p:cNvSpPr/>
-          <p:nvPr/>
-        </p:nvSpPr>
-        <p:spPr>
-          <a:xfrm>
-            <a:off x="10012680" y="3694176"/>
-            <a:ext cx="1280160" cy="347472"/>
-          </a:xfrm>
-          <a:prstGeom prst="rect">
-            <a:avLst/>
-          </a:prstGeom>
-          <a:noFill/>
-          <a:ln/>
-        </p:spPr>
-        <p:txBody>
-          <a:bodyPr wrap="square" lIns="0" tIns="0" rIns="0" bIns="0" rtlCol="0" anchor="ctr"/>
-          <a:lstStyle/>
-          <a:p>
-            <a:pPr marL="0" indent="0">
-              <a:buNone/>
-            </a:pPr>
-            <a:r>
-              <a:rPr lang="en-US" sz="1300" dirty="0">
-                <a:solidFill>
-                  <a:srgbClr val="23191B"/>
-                </a:solidFill>
-                <a:latin typeface="Calibri" pitchFamily="34" charset="0"/>
-                <a:ea typeface="Calibri" pitchFamily="34" charset="-122"/>
-                <a:cs typeface="Calibri" pitchFamily="34" charset="-120"/>
-              </a:rPr>
-              <a:t>Curaçao</a:t>
-            </a:r>
-            <a:endParaRPr lang="en-US" sz="1300" dirty="0"/>
-          </a:p>
-        </p:txBody>
-      </p:sp>
-      <p:sp>
-        <p:nvSpPr>
-          <p:cNvPr id="28" name="Text 25"/>
-          <p:cNvSpPr/>
-          <p:nvPr/>
-        </p:nvSpPr>
-        <p:spPr>
-          <a:xfrm>
-            <a:off x="11247120" y="3694176"/>
-            <a:ext cx="640080" cy="347472"/>
-          </a:xfrm>
-          <a:prstGeom prst="rect">
-            <a:avLst/>
-          </a:prstGeom>
-          <a:noFill/>
-          <a:ln/>
-        </p:spPr>
-        <p:txBody>
-          <a:bodyPr wrap="square" lIns="0" tIns="0" rIns="0" bIns="0" rtlCol="0" anchor="ctr"/>
-          <a:lstStyle/>
-          <a:p>
-            <a:pPr marL="0" indent="0" algn="r">
-              <a:buNone/>
-            </a:pPr>
-            <a:r>
-              <a:rPr lang="en-US" sz="1300" b="1" dirty="0">
-                <a:solidFill>
-                  <a:srgbClr val="C0392B"/>
-                </a:solidFill>
-                <a:latin typeface="Georgia" pitchFamily="34" charset="0"/>
-                <a:ea typeface="Georgia" pitchFamily="34" charset="-122"/>
-                <a:cs typeface="Georgia" pitchFamily="34" charset="-120"/>
-              </a:rPr>
-              <a:t>−160</a:t>
-            </a:r>
-            <a:endParaRPr lang="en-US" sz="1300" dirty="0"/>
-          </a:p>
-        </p:txBody>
-      </p:sp>
-      <p:sp>
-        <p:nvSpPr>
-          <p:cNvPr id="29" name="Shape 26"/>
-          <p:cNvSpPr/>
-          <p:nvPr/>
-        </p:nvSpPr>
-        <p:spPr>
-          <a:xfrm>
-            <a:off x="7818120" y="4754880"/>
-            <a:ext cx="4069080" cy="1298447"/>
+          <p:cNvPr id="7" name="Shape 4"/>
+          <p:cNvSpPr/>
+          <p:nvPr/>
+        </p:nvSpPr>
+        <p:spPr>
+          <a:xfrm>
+            <a:off x="777240" y="5212080"/>
+            <a:ext cx="10634472" cy="566928"/>
           </a:xfrm>
           <a:prstGeom prst="rect">
             <a:avLst/>
@@ -6562,41 +6537,64 @@
       </p:sp>
       <p:sp>
         <p:nvSpPr>
-          <p:cNvPr id="30" name="Shape 27"/>
-          <p:cNvSpPr/>
-          <p:nvPr/>
-        </p:nvSpPr>
-        <p:spPr>
-          <a:xfrm>
-            <a:off x="7818120" y="4754880"/>
-            <a:ext cx="73152" cy="1298448"/>
-          </a:xfrm>
-          <a:prstGeom prst="rect">
-            <a:avLst/>
-          </a:prstGeom>
-          <a:solidFill>
-            <a:srgbClr val="B8862B"/>
-          </a:solidFill>
-          <a:ln/>
-        </p:spPr>
-        <p:txBody>
-          <a:bodyPr/>
-          <a:lstStyle/>
-          <a:p>
-            <a:endParaRPr lang="es-AR"/>
-          </a:p>
-        </p:txBody>
-      </p:sp>
-      <p:sp>
-        <p:nvSpPr>
-          <p:cNvPr id="31" name="Text 28"/>
-          <p:cNvSpPr/>
-          <p:nvPr/>
-        </p:nvSpPr>
-        <p:spPr>
-          <a:xfrm>
-            <a:off x="8065008" y="4864608"/>
-            <a:ext cx="3703320" cy="1106424"/>
+          <p:cNvPr id="8" name="Text 5"/>
+          <p:cNvSpPr/>
+          <p:nvPr/>
+        </p:nvSpPr>
+        <p:spPr>
+          <a:xfrm>
+            <a:off x="960120" y="5212080"/>
+            <a:ext cx="10241280" cy="566928"/>
+          </a:xfrm>
+          <a:prstGeom prst="rect">
+            <a:avLst/>
+          </a:prstGeom>
+          <a:noFill/>
+          <a:ln/>
+        </p:spPr>
+        <p:txBody>
+          <a:bodyPr wrap="square" lIns="0" tIns="0" rIns="0" bIns="0" rtlCol="0" anchor="ctr"/>
+          <a:lstStyle/>
+          <a:p>
+            <a:pPr marL="0" indent="0" algn="ctr">
+              <a:buNone/>
+            </a:pPr>
+            <a:r>
+              <a:rPr lang="en-US" sz="1350" b="1" dirty="0">
+                <a:solidFill>
+                  <a:srgbClr val="8E1F3D"/>
+                </a:solidFill>
+                <a:latin typeface="Consolas" pitchFamily="34" charset="0"/>
+                <a:ea typeface="Consolas" pitchFamily="34" charset="-122"/>
+                <a:cs typeface="Consolas" pitchFamily="34" charset="-120"/>
+              </a:rPr>
+              <a:t>f(x) = −235,37·x² + 612,27·x + 1.439,44      </a:t>
+            </a:r>
+            <a:r>
+              <a:rPr lang="en-US" sz="1350" dirty="0">
+                <a:solidFill>
+                  <a:srgbClr val="23191B"/>
+                </a:solidFill>
+                <a:latin typeface="Consolas" pitchFamily="34" charset="0"/>
+                <a:ea typeface="Consolas" pitchFamily="34" charset="-122"/>
+                <a:cs typeface="Consolas" pitchFamily="34" charset="-120"/>
+              </a:rPr>
+              <a:t>f′(x) = −470,74·x + 612,27      f″(x) = −470,74</a:t>
+            </a:r>
+            <a:endParaRPr lang="en-US" sz="1350" dirty="0"/>
+          </a:p>
+        </p:txBody>
+      </p:sp>
+      <p:sp>
+        <p:nvSpPr>
+          <p:cNvPr id="9" name="Text 6"/>
+          <p:cNvSpPr/>
+          <p:nvPr/>
+        </p:nvSpPr>
+        <p:spPr>
+          <a:xfrm>
+            <a:off x="777240" y="5943600"/>
+            <a:ext cx="3456432" cy="822960"/>
           </a:xfrm>
           <a:prstGeom prst="rect">
             <a:avLst/>
@@ -6610,12 +6608,12 @@
           <a:p>
             <a:pPr marL="0" indent="0">
               <a:lnSpc>
-                <a:spcPct val="107000"/>
+                <a:spcPct val="104000"/>
               </a:lnSpc>
               <a:buNone/>
             </a:pPr>
             <a:r>
-              <a:rPr lang="en-US" sz="1200" b="1" dirty="0">
+              <a:rPr lang="en-US" sz="1350" b="1" dirty="0">
                 <a:solidFill>
                   <a:srgbClr val="8E1F3D"/>
                 </a:solidFill>
@@ -6623,10 +6621,11 @@
                 <a:ea typeface="Calibri" pitchFamily="34" charset="-122"/>
                 <a:cs typeface="Calibri" pitchFamily="34" charset="-120"/>
               </a:rPr>
-              <a:t>Argentina lidera con +161 </a:t>
-            </a:r>
-            <a:r>
-              <a:rPr lang="en-US" sz="1200" dirty="0">
+              <a:t>Vértice  x* ≈ €1,30 B
+</a:t>
+            </a:r>
+            <a:r>
+              <a:rPr lang="en-US" sz="1150" dirty="0">
                 <a:solidFill>
                   <a:srgbClr val="23191B"/>
                 </a:solidFill>
@@ -6634,9 +6633,117 @@
                 <a:ea typeface="Calibri" pitchFamily="34" charset="-122"/>
                 <a:cs typeface="Calibri" pitchFamily="34" charset="-120"/>
               </a:rPr>
-              <a:t>(plantel de €575 M, el 44 % del de Inglaterra). Pero los mayores residuos negativos también son planteles de valor bajo: cuando la inversión es chica, el valor casi no discrimina y el modelo pierde poder.</a:t>
-            </a:r>
-            <a:endParaRPr lang="en-US" sz="1200" dirty="0"/>
+              <a:t>Máximo previsto ≈ 1.838 pts FIFA (f″&lt;0 lo confirma).</a:t>
+            </a:r>
+            <a:endParaRPr lang="en-US" sz="1350" dirty="0"/>
+          </a:p>
+        </p:txBody>
+      </p:sp>
+      <p:sp>
+        <p:nvSpPr>
+          <p:cNvPr id="10" name="Text 7"/>
+          <p:cNvSpPr/>
+          <p:nvPr/>
+        </p:nvSpPr>
+        <p:spPr>
+          <a:xfrm>
+            <a:off x="4361688" y="5943600"/>
+            <a:ext cx="3456432" cy="822960"/>
+          </a:xfrm>
+          <a:prstGeom prst="rect">
+            <a:avLst/>
+          </a:prstGeom>
+          <a:noFill/>
+          <a:ln/>
+        </p:spPr>
+        <p:txBody>
+          <a:bodyPr wrap="square" lIns="0" tIns="0" rIns="0" bIns="0" rtlCol="0" anchor="t"/>
+          <a:lstStyle/>
+          <a:p>
+            <a:pPr marL="0" indent="0">
+              <a:lnSpc>
+                <a:spcPct val="104000"/>
+              </a:lnSpc>
+              <a:buNone/>
+            </a:pPr>
+            <a:r>
+              <a:rPr lang="en-US" sz="1350" b="1" dirty="0">
+                <a:solidFill>
+                  <a:srgbClr val="8E1F3D"/>
+                </a:solidFill>
+                <a:latin typeface="Calibri" pitchFamily="34" charset="0"/>
+                <a:ea typeface="Calibri" pitchFamily="34" charset="-122"/>
+                <a:cs typeface="Calibri" pitchFamily="34" charset="-120"/>
+              </a:rPr>
+              <a:t>Umbral de eficiencia
+</a:t>
+            </a:r>
+            <a:r>
+              <a:rPr lang="en-US" sz="1150" dirty="0">
+                <a:solidFill>
+                  <a:srgbClr val="23191B"/>
+                </a:solidFill>
+                <a:latin typeface="Calibri" pitchFamily="34" charset="0"/>
+                <a:ea typeface="Calibri" pitchFamily="34" charset="-122"/>
+                <a:cs typeface="Calibri" pitchFamily="34" charset="-120"/>
+              </a:rPr>
+              <a:t>Más allá del vértice, invertir deja de traducirse en mejoras.</a:t>
+            </a:r>
+            <a:endParaRPr lang="en-US" sz="1350" dirty="0"/>
+          </a:p>
+        </p:txBody>
+      </p:sp>
+      <p:sp>
+        <p:nvSpPr>
+          <p:cNvPr id="11" name="Text 8"/>
+          <p:cNvSpPr/>
+          <p:nvPr/>
+        </p:nvSpPr>
+        <p:spPr>
+          <a:xfrm>
+            <a:off x="7946136" y="5943600"/>
+            <a:ext cx="3456432" cy="822960"/>
+          </a:xfrm>
+          <a:prstGeom prst="rect">
+            <a:avLst/>
+          </a:prstGeom>
+          <a:noFill/>
+          <a:ln/>
+        </p:spPr>
+        <p:txBody>
+          <a:bodyPr wrap="square" lIns="0" tIns="0" rIns="0" bIns="0" rtlCol="0" anchor="t"/>
+          <a:lstStyle/>
+          <a:p>
+            <a:pPr marL="0" indent="0">
+              <a:lnSpc>
+                <a:spcPct val="104000"/>
+              </a:lnSpc>
+              <a:buNone/>
+            </a:pPr>
+            <a:r>
+              <a:rPr lang="en-US" sz="1350" b="1" dirty="0">
+                <a:solidFill>
+                  <a:srgbClr val="8E1F3D"/>
+                </a:solidFill>
+                <a:latin typeface="Calibri" pitchFamily="34" charset="0"/>
+                <a:ea typeface="Calibri" pitchFamily="34" charset="-122"/>
+                <a:cs typeface="Calibri" pitchFamily="34" charset="-120"/>
+              </a:rPr>
+              <a:t>Techo ya alcanzado
+</a:t>
+            </a:r>
+            <a:r>
+              <a:rPr lang="en-US" sz="1150" dirty="0">
+                <a:solidFill>
+                  <a:srgbClr val="23191B"/>
+                </a:solidFill>
+                <a:latin typeface="Calibri" pitchFamily="34" charset="0"/>
+                <a:ea typeface="Calibri" pitchFamily="34" charset="-122"/>
+                <a:cs typeface="Calibri" pitchFamily="34" charset="-120"/>
+              </a:rPr>
+              <a:t>Francia e Inglaterra operan prácticamente sobre ese límite.</a:t>
+            </a:r>
+            <a:endParaRPr lang="en-US" sz="1350" dirty="0"/>
           </a:p>
         </p:txBody>
       </p:sp>
@@ -6651,6 +6758,1203 @@
 <file path=ppt/slides/slide8.xml><?xml version="1.0" encoding="utf-8"?>
 <p:sld xmlns:a="http://schemas.openxmlformats.org/drawingml/2006/main" xmlns:r="http://schemas.openxmlformats.org/officeDocument/2006/relationships" xmlns:p="http://schemas.openxmlformats.org/presentationml/2006/main">
   <p:cSld name="Slide 8">
+    <p:bg>
+      <p:bgPr>
+        <a:solidFill>
+          <a:srgbClr val="FFFFFF"/>
+        </a:solidFill>
+        <a:effectLst/>
+      </p:bgPr>
+    </p:bg>
+    <p:spTree>
+      <p:nvGrpSpPr>
+        <p:cNvPr id="1" name=""/>
+        <p:cNvGrpSpPr/>
+        <p:nvPr/>
+      </p:nvGrpSpPr>
+      <p:grpSpPr>
+        <a:xfrm>
+          <a:off x="0" y="0"/>
+          <a:ext cx="0" cy="0"/>
+          <a:chOff x="0" y="0"/>
+          <a:chExt cx="0" cy="0"/>
+        </a:xfrm>
+      </p:grpSpPr>
+      <p:sp>
+        <p:nvSpPr>
+          <p:cNvPr id="2" name="Text 0"/>
+          <p:cNvSpPr/>
+          <p:nvPr/>
+        </p:nvSpPr>
+        <p:spPr>
+          <a:xfrm>
+            <a:off x="10040112" y="164592"/>
+            <a:ext cx="1828800" cy="1371600"/>
+          </a:xfrm>
+          <a:prstGeom prst="rect">
+            <a:avLst/>
+          </a:prstGeom>
+          <a:noFill/>
+          <a:ln/>
+        </p:spPr>
+        <p:txBody>
+          <a:bodyPr wrap="square" lIns="0" tIns="0" rIns="0" bIns="0" rtlCol="0" anchor="t"/>
+          <a:lstStyle/>
+          <a:p>
+            <a:pPr marL="0" indent="0" algn="r">
+              <a:buNone/>
+            </a:pPr>
+            <a:r>
+              <a:rPr lang="en-US" sz="9600" b="1" dirty="0">
+                <a:solidFill>
+                  <a:srgbClr val="F1E2E6"/>
+                </a:solidFill>
+                <a:latin typeface="Georgia" pitchFamily="34" charset="0"/>
+                <a:ea typeface="Georgia" pitchFamily="34" charset="-122"/>
+                <a:cs typeface="Georgia" pitchFamily="34" charset="-120"/>
+              </a:rPr>
+              <a:t>06</a:t>
+            </a:r>
+            <a:endParaRPr lang="en-US" sz="9600" dirty="0"/>
+          </a:p>
+        </p:txBody>
+      </p:sp>
+      <p:sp>
+        <p:nvSpPr>
+          <p:cNvPr id="3" name="Text 1"/>
+          <p:cNvSpPr/>
+          <p:nvPr/>
+        </p:nvSpPr>
+        <p:spPr>
+          <a:xfrm>
+            <a:off x="777240" y="502920"/>
+            <a:ext cx="8229600" cy="274320"/>
+          </a:xfrm>
+          <a:prstGeom prst="rect">
+            <a:avLst/>
+          </a:prstGeom>
+          <a:noFill/>
+          <a:ln/>
+        </p:spPr>
+        <p:txBody>
+          <a:bodyPr wrap="square" lIns="0" tIns="0" rIns="0" bIns="0" rtlCol="0" anchor="ctr"/>
+          <a:lstStyle/>
+          <a:p>
+            <a:pPr marL="0" indent="0" algn="l">
+              <a:buNone/>
+            </a:pPr>
+            <a:r>
+              <a:rPr lang="en-US" sz="1150" b="1" kern="0" spc="300" dirty="0">
+                <a:solidFill>
+                  <a:srgbClr val="B8862B"/>
+                </a:solidFill>
+                <a:latin typeface="Calibri" pitchFamily="34" charset="0"/>
+                <a:ea typeface="Calibri" pitchFamily="34" charset="-122"/>
+                <a:cs typeface="Calibri" pitchFamily="34" charset="-120"/>
+              </a:rPr>
+              <a:t>ANÁLISIS DE RESIDUOS  ·  FIGURA 11</a:t>
+            </a:r>
+            <a:endParaRPr lang="en-US" sz="1150" dirty="0"/>
+          </a:p>
+        </p:txBody>
+      </p:sp>
+      <p:sp>
+        <p:nvSpPr>
+          <p:cNvPr id="4" name="Text 2"/>
+          <p:cNvSpPr/>
+          <p:nvPr/>
+        </p:nvSpPr>
+        <p:spPr>
+          <a:xfrm>
+            <a:off x="777240" y="896112"/>
+            <a:ext cx="10058400" cy="914400"/>
+          </a:xfrm>
+          <a:prstGeom prst="rect">
+            <a:avLst/>
+          </a:prstGeom>
+          <a:noFill/>
+          <a:ln/>
+        </p:spPr>
+        <p:txBody>
+          <a:bodyPr wrap="square" lIns="0" tIns="0" rIns="0" bIns="0" rtlCol="0" anchor="t"/>
+          <a:lstStyle/>
+          <a:p>
+            <a:pPr marL="0" indent="0" algn="l">
+              <a:lnSpc>
+                <a:spcPct val="98000"/>
+              </a:lnSpc>
+              <a:buNone/>
+            </a:pPr>
+            <a:r>
+              <a:rPr lang="en-US" sz="4000" b="1" dirty="0">
+                <a:solidFill>
+                  <a:srgbClr val="23191B"/>
+                </a:solidFill>
+                <a:latin typeface="Georgia" pitchFamily="34" charset="0"/>
+                <a:ea typeface="Georgia" pitchFamily="34" charset="-122"/>
+                <a:cs typeface="Georgia" pitchFamily="34" charset="-120"/>
+              </a:rPr>
+              <a:t>Quién rinde </a:t>
+            </a:r>
+            <a:r>
+              <a:rPr lang="en-US" sz="4000" b="1" dirty="0">
+                <a:solidFill>
+                  <a:srgbClr val="8E1F3D"/>
+                </a:solidFill>
+                <a:latin typeface="Georgia" pitchFamily="34" charset="0"/>
+                <a:ea typeface="Georgia" pitchFamily="34" charset="-122"/>
+                <a:cs typeface="Georgia" pitchFamily="34" charset="-120"/>
+              </a:rPr>
+              <a:t>de más</a:t>
+            </a:r>
+            <a:endParaRPr lang="en-US" sz="4000" dirty="0"/>
+          </a:p>
+        </p:txBody>
+      </p:sp>
+      <p:pic>
+        <p:nvPicPr>
+          <p:cNvPr id="5" name="Image 0" descr="/mnt/project/modelo_cuadratico_vertice.png"/>
+          <p:cNvPicPr>
+            <a:picLocks noChangeAspect="1"/>
+          </p:cNvPicPr>
+          <p:nvPr/>
+        </p:nvPicPr>
+        <p:blipFill>
+          <a:blip r:embed="rId3"/>
+          <a:stretch>
+            <a:fillRect/>
+          </a:stretch>
+        </p:blipFill>
+        <p:spPr>
+          <a:xfrm>
+            <a:off x="777240" y="1874520"/>
+            <a:ext cx="6766560" cy="3903785"/>
+          </a:xfrm>
+          <a:prstGeom prst="rect">
+            <a:avLst/>
+          </a:prstGeom>
+        </p:spPr>
+      </p:pic>
+      <p:sp>
+        <p:nvSpPr>
+          <p:cNvPr id="6" name="Text 3"/>
+          <p:cNvSpPr/>
+          <p:nvPr/>
+        </p:nvSpPr>
+        <p:spPr>
+          <a:xfrm>
+            <a:off x="777240" y="5824025"/>
+            <a:ext cx="6766560" cy="457200"/>
+          </a:xfrm>
+          <a:prstGeom prst="rect">
+            <a:avLst/>
+          </a:prstGeom>
+          <a:noFill/>
+          <a:ln/>
+        </p:spPr>
+        <p:txBody>
+          <a:bodyPr wrap="square" lIns="0" tIns="0" rIns="0" bIns="0" rtlCol="0" anchor="t"/>
+          <a:lstStyle/>
+          <a:p>
+            <a:pPr marL="0" indent="0" algn="l">
+              <a:buNone/>
+            </a:pPr>
+            <a:r>
+              <a:rPr lang="en-US" sz="950" i="1" dirty="0">
+                <a:solidFill>
+                  <a:srgbClr val="6E5E62"/>
+                </a:solidFill>
+                <a:latin typeface="Calibri" pitchFamily="34" charset="0"/>
+                <a:ea typeface="Calibri" pitchFamily="34" charset="-122"/>
+                <a:cs typeface="Calibri" pitchFamily="34" charset="-120"/>
+              </a:rPr>
+              <a:t>Figura 11 · Modelo con el vértice y los residuos de los casos más destacados.</a:t>
+            </a:r>
+            <a:endParaRPr lang="en-US" sz="950" dirty="0"/>
+          </a:p>
+        </p:txBody>
+      </p:sp>
+      <p:sp>
+        <p:nvSpPr>
+          <p:cNvPr id="7" name="Text 4"/>
+          <p:cNvSpPr/>
+          <p:nvPr/>
+        </p:nvSpPr>
+        <p:spPr>
+          <a:xfrm>
+            <a:off x="7818120" y="1828800"/>
+            <a:ext cx="1874520" cy="274320"/>
+          </a:xfrm>
+          <a:prstGeom prst="rect">
+            <a:avLst/>
+          </a:prstGeom>
+          <a:noFill/>
+          <a:ln/>
+        </p:spPr>
+        <p:txBody>
+          <a:bodyPr wrap="square" lIns="0" tIns="0" rIns="0" bIns="0" rtlCol="0" anchor="ctr"/>
+          <a:lstStyle/>
+          <a:p>
+            <a:pPr marL="0" indent="0">
+              <a:buNone/>
+            </a:pPr>
+            <a:r>
+              <a:rPr lang="en-US" sz="1050" b="1" kern="0" spc="100" dirty="0">
+                <a:solidFill>
+                  <a:srgbClr val="2E7D52"/>
+                </a:solidFill>
+                <a:latin typeface="Calibri" pitchFamily="34" charset="0"/>
+                <a:ea typeface="Calibri" pitchFamily="34" charset="-122"/>
+                <a:cs typeface="Calibri" pitchFamily="34" charset="-120"/>
+              </a:rPr>
+              <a:t>SOBRE-RENDIMIENTO</a:t>
+            </a:r>
+            <a:endParaRPr lang="en-US" sz="1050" dirty="0"/>
+          </a:p>
+        </p:txBody>
+      </p:sp>
+      <p:sp>
+        <p:nvSpPr>
+          <p:cNvPr id="8" name="Text 5"/>
+          <p:cNvSpPr/>
+          <p:nvPr/>
+        </p:nvSpPr>
+        <p:spPr>
+          <a:xfrm>
+            <a:off x="7818120" y="2157984"/>
+            <a:ext cx="1371600" cy="347472"/>
+          </a:xfrm>
+          <a:prstGeom prst="rect">
+            <a:avLst/>
+          </a:prstGeom>
+          <a:noFill/>
+          <a:ln/>
+        </p:spPr>
+        <p:txBody>
+          <a:bodyPr wrap="square" lIns="0" tIns="0" rIns="0" bIns="0" rtlCol="0" anchor="ctr"/>
+          <a:lstStyle/>
+          <a:p>
+            <a:pPr marL="0" indent="0">
+              <a:buNone/>
+            </a:pPr>
+            <a:r>
+              <a:rPr lang="en-US" sz="1300" dirty="0">
+                <a:solidFill>
+                  <a:srgbClr val="23191B"/>
+                </a:solidFill>
+                <a:latin typeface="Calibri" pitchFamily="34" charset="0"/>
+                <a:ea typeface="Calibri" pitchFamily="34" charset="-122"/>
+                <a:cs typeface="Calibri" pitchFamily="34" charset="-120"/>
+              </a:rPr>
+              <a:t>Argentina</a:t>
+            </a:r>
+            <a:endParaRPr lang="en-US" sz="1300" dirty="0"/>
+          </a:p>
+        </p:txBody>
+      </p:sp>
+      <p:sp>
+        <p:nvSpPr>
+          <p:cNvPr id="9" name="Text 6"/>
+          <p:cNvSpPr/>
+          <p:nvPr/>
+        </p:nvSpPr>
+        <p:spPr>
+          <a:xfrm>
+            <a:off x="9144000" y="2157984"/>
+            <a:ext cx="640080" cy="347472"/>
+          </a:xfrm>
+          <a:prstGeom prst="rect">
+            <a:avLst/>
+          </a:prstGeom>
+          <a:noFill/>
+          <a:ln/>
+        </p:spPr>
+        <p:txBody>
+          <a:bodyPr wrap="square" lIns="0" tIns="0" rIns="0" bIns="0" rtlCol="0" anchor="ctr"/>
+          <a:lstStyle/>
+          <a:p>
+            <a:pPr marL="0" indent="0" algn="r">
+              <a:buNone/>
+            </a:pPr>
+            <a:r>
+              <a:rPr lang="en-US" sz="1300" b="1" dirty="0">
+                <a:solidFill>
+                  <a:srgbClr val="2E7D52"/>
+                </a:solidFill>
+                <a:latin typeface="Georgia" pitchFamily="34" charset="0"/>
+                <a:ea typeface="Georgia" pitchFamily="34" charset="-122"/>
+                <a:cs typeface="Georgia" pitchFamily="34" charset="-120"/>
+              </a:rPr>
+              <a:t>+161</a:t>
+            </a:r>
+            <a:endParaRPr lang="en-US" sz="1300" dirty="0"/>
+          </a:p>
+        </p:txBody>
+      </p:sp>
+      <p:sp>
+        <p:nvSpPr>
+          <p:cNvPr id="10" name="Text 7"/>
+          <p:cNvSpPr/>
+          <p:nvPr/>
+        </p:nvSpPr>
+        <p:spPr>
+          <a:xfrm>
+            <a:off x="7818120" y="2542032"/>
+            <a:ext cx="1371600" cy="347472"/>
+          </a:xfrm>
+          <a:prstGeom prst="rect">
+            <a:avLst/>
+          </a:prstGeom>
+          <a:noFill/>
+          <a:ln/>
+        </p:spPr>
+        <p:txBody>
+          <a:bodyPr wrap="square" lIns="0" tIns="0" rIns="0" bIns="0" rtlCol="0" anchor="ctr"/>
+          <a:lstStyle/>
+          <a:p>
+            <a:pPr marL="0" indent="0">
+              <a:buNone/>
+            </a:pPr>
+            <a:r>
+              <a:rPr lang="en-US" sz="1300" dirty="0">
+                <a:solidFill>
+                  <a:srgbClr val="23191B"/>
+                </a:solidFill>
+                <a:latin typeface="Calibri" pitchFamily="34" charset="0"/>
+                <a:ea typeface="Calibri" pitchFamily="34" charset="-122"/>
+                <a:cs typeface="Calibri" pitchFamily="34" charset="-120"/>
+              </a:rPr>
+              <a:t>México</a:t>
+            </a:r>
+            <a:endParaRPr lang="en-US" sz="1300" dirty="0"/>
+          </a:p>
+        </p:txBody>
+      </p:sp>
+      <p:sp>
+        <p:nvSpPr>
+          <p:cNvPr id="11" name="Text 8"/>
+          <p:cNvSpPr/>
+          <p:nvPr/>
+        </p:nvSpPr>
+        <p:spPr>
+          <a:xfrm>
+            <a:off x="9144000" y="2542032"/>
+            <a:ext cx="640080" cy="347472"/>
+          </a:xfrm>
+          <a:prstGeom prst="rect">
+            <a:avLst/>
+          </a:prstGeom>
+          <a:noFill/>
+          <a:ln/>
+        </p:spPr>
+        <p:txBody>
+          <a:bodyPr wrap="square" lIns="0" tIns="0" rIns="0" bIns="0" rtlCol="0" anchor="ctr"/>
+          <a:lstStyle/>
+          <a:p>
+            <a:pPr marL="0" indent="0" algn="r">
+              <a:buNone/>
+            </a:pPr>
+            <a:r>
+              <a:rPr lang="en-US" sz="1300" b="1" dirty="0">
+                <a:solidFill>
+                  <a:srgbClr val="2E7D52"/>
+                </a:solidFill>
+                <a:latin typeface="Georgia" pitchFamily="34" charset="0"/>
+                <a:ea typeface="Georgia" pitchFamily="34" charset="-122"/>
+                <a:cs typeface="Georgia" pitchFamily="34" charset="-120"/>
+              </a:rPr>
+              <a:t>+159</a:t>
+            </a:r>
+            <a:endParaRPr lang="en-US" sz="1300" dirty="0"/>
+          </a:p>
+        </p:txBody>
+      </p:sp>
+      <p:sp>
+        <p:nvSpPr>
+          <p:cNvPr id="12" name="Text 9"/>
+          <p:cNvSpPr/>
+          <p:nvPr/>
+        </p:nvSpPr>
+        <p:spPr>
+          <a:xfrm>
+            <a:off x="7818120" y="2926080"/>
+            <a:ext cx="1371600" cy="347472"/>
+          </a:xfrm>
+          <a:prstGeom prst="rect">
+            <a:avLst/>
+          </a:prstGeom>
+          <a:noFill/>
+          <a:ln/>
+        </p:spPr>
+        <p:txBody>
+          <a:bodyPr wrap="square" lIns="0" tIns="0" rIns="0" bIns="0" rtlCol="0" anchor="ctr"/>
+          <a:lstStyle/>
+          <a:p>
+            <a:pPr marL="0" indent="0">
+              <a:buNone/>
+            </a:pPr>
+            <a:r>
+              <a:rPr lang="en-US" sz="1300" dirty="0">
+                <a:solidFill>
+                  <a:srgbClr val="23191B"/>
+                </a:solidFill>
+                <a:latin typeface="Calibri" pitchFamily="34" charset="0"/>
+                <a:ea typeface="Calibri" pitchFamily="34" charset="-122"/>
+                <a:cs typeface="Calibri" pitchFamily="34" charset="-120"/>
+              </a:rPr>
+              <a:t>Irán</a:t>
+            </a:r>
+            <a:endParaRPr lang="en-US" sz="1300" dirty="0"/>
+          </a:p>
+        </p:txBody>
+      </p:sp>
+      <p:sp>
+        <p:nvSpPr>
+          <p:cNvPr id="13" name="Text 10"/>
+          <p:cNvSpPr/>
+          <p:nvPr/>
+        </p:nvSpPr>
+        <p:spPr>
+          <a:xfrm>
+            <a:off x="9144000" y="2926080"/>
+            <a:ext cx="640080" cy="347472"/>
+          </a:xfrm>
+          <a:prstGeom prst="rect">
+            <a:avLst/>
+          </a:prstGeom>
+          <a:noFill/>
+          <a:ln/>
+        </p:spPr>
+        <p:txBody>
+          <a:bodyPr wrap="square" lIns="0" tIns="0" rIns="0" bIns="0" rtlCol="0" anchor="ctr"/>
+          <a:lstStyle/>
+          <a:p>
+            <a:pPr marL="0" indent="0" algn="r">
+              <a:buNone/>
+            </a:pPr>
+            <a:r>
+              <a:rPr lang="en-US" sz="1300" b="1" dirty="0">
+                <a:solidFill>
+                  <a:srgbClr val="2E7D52"/>
+                </a:solidFill>
+                <a:latin typeface="Georgia" pitchFamily="34" charset="0"/>
+                <a:ea typeface="Georgia" pitchFamily="34" charset="-122"/>
+                <a:cs typeface="Georgia" pitchFamily="34" charset="-120"/>
+              </a:rPr>
+              <a:t>+155</a:t>
+            </a:r>
+            <a:endParaRPr lang="en-US" sz="1300" dirty="0"/>
+          </a:p>
+        </p:txBody>
+      </p:sp>
+      <p:sp>
+        <p:nvSpPr>
+          <p:cNvPr id="14" name="Text 11"/>
+          <p:cNvSpPr/>
+          <p:nvPr/>
+        </p:nvSpPr>
+        <p:spPr>
+          <a:xfrm>
+            <a:off x="7818120" y="3310128"/>
+            <a:ext cx="1371600" cy="347472"/>
+          </a:xfrm>
+          <a:prstGeom prst="rect">
+            <a:avLst/>
+          </a:prstGeom>
+          <a:noFill/>
+          <a:ln/>
+        </p:spPr>
+        <p:txBody>
+          <a:bodyPr wrap="square" lIns="0" tIns="0" rIns="0" bIns="0" rtlCol="0" anchor="ctr"/>
+          <a:lstStyle/>
+          <a:p>
+            <a:pPr marL="0" indent="0">
+              <a:buNone/>
+            </a:pPr>
+            <a:r>
+              <a:rPr lang="en-US" sz="1300" dirty="0">
+                <a:solidFill>
+                  <a:srgbClr val="23191B"/>
+                </a:solidFill>
+                <a:latin typeface="Calibri" pitchFamily="34" charset="0"/>
+                <a:ea typeface="Calibri" pitchFamily="34" charset="-122"/>
+                <a:cs typeface="Calibri" pitchFamily="34" charset="-120"/>
+              </a:rPr>
+              <a:t>EE. UU.</a:t>
+            </a:r>
+            <a:endParaRPr lang="en-US" sz="1300" dirty="0"/>
+          </a:p>
+        </p:txBody>
+      </p:sp>
+      <p:sp>
+        <p:nvSpPr>
+          <p:cNvPr id="15" name="Text 12"/>
+          <p:cNvSpPr/>
+          <p:nvPr/>
+        </p:nvSpPr>
+        <p:spPr>
+          <a:xfrm>
+            <a:off x="9144000" y="3310128"/>
+            <a:ext cx="640080" cy="347472"/>
+          </a:xfrm>
+          <a:prstGeom prst="rect">
+            <a:avLst/>
+          </a:prstGeom>
+          <a:noFill/>
+          <a:ln/>
+        </p:spPr>
+        <p:txBody>
+          <a:bodyPr wrap="square" lIns="0" tIns="0" rIns="0" bIns="0" rtlCol="0" anchor="ctr"/>
+          <a:lstStyle/>
+          <a:p>
+            <a:pPr marL="0" indent="0" algn="r">
+              <a:buNone/>
+            </a:pPr>
+            <a:r>
+              <a:rPr lang="en-US" sz="1300" b="1" dirty="0">
+                <a:solidFill>
+                  <a:srgbClr val="2E7D52"/>
+                </a:solidFill>
+                <a:latin typeface="Georgia" pitchFamily="34" charset="0"/>
+                <a:ea typeface="Georgia" pitchFamily="34" charset="-122"/>
+                <a:cs typeface="Georgia" pitchFamily="34" charset="-120"/>
+              </a:rPr>
+              <a:t>+137</a:t>
+            </a:r>
+            <a:endParaRPr lang="en-US" sz="1300" dirty="0"/>
+          </a:p>
+        </p:txBody>
+      </p:sp>
+      <p:sp>
+        <p:nvSpPr>
+          <p:cNvPr id="16" name="Text 13"/>
+          <p:cNvSpPr/>
+          <p:nvPr/>
+        </p:nvSpPr>
+        <p:spPr>
+          <a:xfrm>
+            <a:off x="7818120" y="3694176"/>
+            <a:ext cx="1371600" cy="347472"/>
+          </a:xfrm>
+          <a:prstGeom prst="rect">
+            <a:avLst/>
+          </a:prstGeom>
+          <a:noFill/>
+          <a:ln/>
+        </p:spPr>
+        <p:txBody>
+          <a:bodyPr wrap="square" lIns="0" tIns="0" rIns="0" bIns="0" rtlCol="0" anchor="ctr"/>
+          <a:lstStyle/>
+          <a:p>
+            <a:pPr marL="0" indent="0">
+              <a:buNone/>
+            </a:pPr>
+            <a:r>
+              <a:rPr lang="en-US" sz="1300" dirty="0">
+                <a:solidFill>
+                  <a:srgbClr val="23191B"/>
+                </a:solidFill>
+                <a:latin typeface="Calibri" pitchFamily="34" charset="0"/>
+                <a:ea typeface="Calibri" pitchFamily="34" charset="-122"/>
+                <a:cs typeface="Calibri" pitchFamily="34" charset="-120"/>
+              </a:rPr>
+              <a:t>Croacia</a:t>
+            </a:r>
+            <a:endParaRPr lang="en-US" sz="1300" dirty="0"/>
+          </a:p>
+        </p:txBody>
+      </p:sp>
+      <p:sp>
+        <p:nvSpPr>
+          <p:cNvPr id="17" name="Text 14"/>
+          <p:cNvSpPr/>
+          <p:nvPr/>
+        </p:nvSpPr>
+        <p:spPr>
+          <a:xfrm>
+            <a:off x="9144000" y="3694176"/>
+            <a:ext cx="640080" cy="347472"/>
+          </a:xfrm>
+          <a:prstGeom prst="rect">
+            <a:avLst/>
+          </a:prstGeom>
+          <a:noFill/>
+          <a:ln/>
+        </p:spPr>
+        <p:txBody>
+          <a:bodyPr wrap="square" lIns="0" tIns="0" rIns="0" bIns="0" rtlCol="0" anchor="ctr"/>
+          <a:lstStyle/>
+          <a:p>
+            <a:pPr marL="0" indent="0" algn="r">
+              <a:buNone/>
+            </a:pPr>
+            <a:r>
+              <a:rPr lang="en-US" sz="1300" b="1" dirty="0">
+                <a:solidFill>
+                  <a:srgbClr val="2E7D52"/>
+                </a:solidFill>
+                <a:latin typeface="Georgia" pitchFamily="34" charset="0"/>
+                <a:ea typeface="Georgia" pitchFamily="34" charset="-122"/>
+                <a:cs typeface="Georgia" pitchFamily="34" charset="-120"/>
+              </a:rPr>
+              <a:t>+135</a:t>
+            </a:r>
+            <a:endParaRPr lang="en-US" sz="1300" dirty="0"/>
+          </a:p>
+        </p:txBody>
+      </p:sp>
+      <p:sp>
+        <p:nvSpPr>
+          <p:cNvPr id="18" name="Text 15"/>
+          <p:cNvSpPr/>
+          <p:nvPr/>
+        </p:nvSpPr>
+        <p:spPr>
+          <a:xfrm>
+            <a:off x="10012680" y="1828800"/>
+            <a:ext cx="1828800" cy="274320"/>
+          </a:xfrm>
+          <a:prstGeom prst="rect">
+            <a:avLst/>
+          </a:prstGeom>
+          <a:noFill/>
+          <a:ln/>
+        </p:spPr>
+        <p:txBody>
+          <a:bodyPr wrap="square" lIns="0" tIns="0" rIns="0" bIns="0" rtlCol="0" anchor="ctr"/>
+          <a:lstStyle/>
+          <a:p>
+            <a:pPr marL="0" indent="0">
+              <a:buNone/>
+            </a:pPr>
+            <a:r>
+              <a:rPr lang="en-US" sz="1050" b="1" kern="0" spc="100" dirty="0">
+                <a:solidFill>
+                  <a:srgbClr val="C0392B"/>
+                </a:solidFill>
+                <a:latin typeface="Calibri" pitchFamily="34" charset="0"/>
+                <a:ea typeface="Calibri" pitchFamily="34" charset="-122"/>
+                <a:cs typeface="Calibri" pitchFamily="34" charset="-120"/>
+              </a:rPr>
+              <a:t>SUB-RENDIMIENTO</a:t>
+            </a:r>
+            <a:endParaRPr lang="en-US" sz="1050" dirty="0"/>
+          </a:p>
+        </p:txBody>
+      </p:sp>
+      <p:sp>
+        <p:nvSpPr>
+          <p:cNvPr id="19" name="Text 16"/>
+          <p:cNvSpPr/>
+          <p:nvPr/>
+        </p:nvSpPr>
+        <p:spPr>
+          <a:xfrm>
+            <a:off x="10012680" y="2157984"/>
+            <a:ext cx="1280160" cy="347472"/>
+          </a:xfrm>
+          <a:prstGeom prst="rect">
+            <a:avLst/>
+          </a:prstGeom>
+          <a:noFill/>
+          <a:ln/>
+        </p:spPr>
+        <p:txBody>
+          <a:bodyPr wrap="square" lIns="0" tIns="0" rIns="0" bIns="0" rtlCol="0" anchor="ctr"/>
+          <a:lstStyle/>
+          <a:p>
+            <a:pPr marL="0" indent="0">
+              <a:buNone/>
+            </a:pPr>
+            <a:r>
+              <a:rPr lang="en-US" sz="1300" dirty="0">
+                <a:solidFill>
+                  <a:srgbClr val="23191B"/>
+                </a:solidFill>
+                <a:latin typeface="Calibri" pitchFamily="34" charset="0"/>
+                <a:ea typeface="Calibri" pitchFamily="34" charset="-122"/>
+                <a:cs typeface="Calibri" pitchFamily="34" charset="-120"/>
+              </a:rPr>
+              <a:t>Ghana</a:t>
+            </a:r>
+            <a:endParaRPr lang="en-US" sz="1300" dirty="0"/>
+          </a:p>
+        </p:txBody>
+      </p:sp>
+      <p:sp>
+        <p:nvSpPr>
+          <p:cNvPr id="20" name="Text 17"/>
+          <p:cNvSpPr/>
+          <p:nvPr/>
+        </p:nvSpPr>
+        <p:spPr>
+          <a:xfrm>
+            <a:off x="11247120" y="2157984"/>
+            <a:ext cx="640080" cy="347472"/>
+          </a:xfrm>
+          <a:prstGeom prst="rect">
+            <a:avLst/>
+          </a:prstGeom>
+          <a:noFill/>
+          <a:ln/>
+        </p:spPr>
+        <p:txBody>
+          <a:bodyPr wrap="square" lIns="0" tIns="0" rIns="0" bIns="0" rtlCol="0" anchor="ctr"/>
+          <a:lstStyle/>
+          <a:p>
+            <a:pPr marL="0" indent="0" algn="r">
+              <a:buNone/>
+            </a:pPr>
+            <a:r>
+              <a:rPr lang="en-US" sz="1300" b="1" dirty="0">
+                <a:solidFill>
+                  <a:srgbClr val="C0392B"/>
+                </a:solidFill>
+                <a:latin typeface="Georgia" pitchFamily="34" charset="0"/>
+                <a:ea typeface="Georgia" pitchFamily="34" charset="-122"/>
+                <a:cs typeface="Georgia" pitchFamily="34" charset="-120"/>
+              </a:rPr>
+              <a:t>−188</a:t>
+            </a:r>
+            <a:endParaRPr lang="en-US" sz="1300" dirty="0"/>
+          </a:p>
+        </p:txBody>
+      </p:sp>
+      <p:sp>
+        <p:nvSpPr>
+          <p:cNvPr id="21" name="Text 18"/>
+          <p:cNvSpPr/>
+          <p:nvPr/>
+        </p:nvSpPr>
+        <p:spPr>
+          <a:xfrm>
+            <a:off x="10012680" y="2542032"/>
+            <a:ext cx="1280160" cy="347472"/>
+          </a:xfrm>
+          <a:prstGeom prst="rect">
+            <a:avLst/>
+          </a:prstGeom>
+          <a:noFill/>
+          <a:ln/>
+        </p:spPr>
+        <p:txBody>
+          <a:bodyPr wrap="square" lIns="0" tIns="0" rIns="0" bIns="0" rtlCol="0" anchor="ctr"/>
+          <a:lstStyle/>
+          <a:p>
+            <a:pPr marL="0" indent="0">
+              <a:buNone/>
+            </a:pPr>
+            <a:r>
+              <a:rPr lang="en-US" sz="1300" dirty="0">
+                <a:solidFill>
+                  <a:srgbClr val="23191B"/>
+                </a:solidFill>
+                <a:latin typeface="Calibri" pitchFamily="34" charset="0"/>
+                <a:ea typeface="Calibri" pitchFamily="34" charset="-122"/>
+                <a:cs typeface="Calibri" pitchFamily="34" charset="-120"/>
+              </a:rPr>
+              <a:t>Haití</a:t>
+            </a:r>
+            <a:endParaRPr lang="en-US" sz="1300" dirty="0"/>
+          </a:p>
+        </p:txBody>
+      </p:sp>
+      <p:sp>
+        <p:nvSpPr>
+          <p:cNvPr id="22" name="Text 19"/>
+          <p:cNvSpPr/>
+          <p:nvPr/>
+        </p:nvSpPr>
+        <p:spPr>
+          <a:xfrm>
+            <a:off x="11247120" y="2542032"/>
+            <a:ext cx="640080" cy="347472"/>
+          </a:xfrm>
+          <a:prstGeom prst="rect">
+            <a:avLst/>
+          </a:prstGeom>
+          <a:noFill/>
+          <a:ln/>
+        </p:spPr>
+        <p:txBody>
+          <a:bodyPr wrap="square" lIns="0" tIns="0" rIns="0" bIns="0" rtlCol="0" anchor="ctr"/>
+          <a:lstStyle/>
+          <a:p>
+            <a:pPr marL="0" indent="0" algn="r">
+              <a:buNone/>
+            </a:pPr>
+            <a:r>
+              <a:rPr lang="en-US" sz="1300" b="1" dirty="0">
+                <a:solidFill>
+                  <a:srgbClr val="C0392B"/>
+                </a:solidFill>
+                <a:latin typeface="Georgia" pitchFamily="34" charset="0"/>
+                <a:ea typeface="Georgia" pitchFamily="34" charset="-122"/>
+                <a:cs typeface="Georgia" pitchFamily="34" charset="-120"/>
+              </a:rPr>
+              <a:t>−171</a:t>
+            </a:r>
+            <a:endParaRPr lang="en-US" sz="1300" dirty="0"/>
+          </a:p>
+        </p:txBody>
+      </p:sp>
+      <p:sp>
+        <p:nvSpPr>
+          <p:cNvPr id="23" name="Text 20"/>
+          <p:cNvSpPr/>
+          <p:nvPr/>
+        </p:nvSpPr>
+        <p:spPr>
+          <a:xfrm>
+            <a:off x="10012680" y="2926080"/>
+            <a:ext cx="1280160" cy="347472"/>
+          </a:xfrm>
+          <a:prstGeom prst="rect">
+            <a:avLst/>
+          </a:prstGeom>
+          <a:noFill/>
+          <a:ln/>
+        </p:spPr>
+        <p:txBody>
+          <a:bodyPr wrap="square" lIns="0" tIns="0" rIns="0" bIns="0" rtlCol="0" anchor="ctr"/>
+          <a:lstStyle/>
+          <a:p>
+            <a:pPr marL="0" indent="0">
+              <a:buNone/>
+            </a:pPr>
+            <a:r>
+              <a:rPr lang="en-US" sz="1300" dirty="0">
+                <a:solidFill>
+                  <a:srgbClr val="23191B"/>
+                </a:solidFill>
+                <a:latin typeface="Calibri" pitchFamily="34" charset="0"/>
+                <a:ea typeface="Calibri" pitchFamily="34" charset="-122"/>
+                <a:cs typeface="Calibri" pitchFamily="34" charset="-120"/>
+              </a:rPr>
+              <a:t>Suecia</a:t>
+            </a:r>
+            <a:endParaRPr lang="en-US" sz="1300" dirty="0"/>
+          </a:p>
+        </p:txBody>
+      </p:sp>
+      <p:sp>
+        <p:nvSpPr>
+          <p:cNvPr id="24" name="Text 21"/>
+          <p:cNvSpPr/>
+          <p:nvPr/>
+        </p:nvSpPr>
+        <p:spPr>
+          <a:xfrm>
+            <a:off x="11247120" y="2926080"/>
+            <a:ext cx="640080" cy="347472"/>
+          </a:xfrm>
+          <a:prstGeom prst="rect">
+            <a:avLst/>
+          </a:prstGeom>
+          <a:noFill/>
+          <a:ln/>
+        </p:spPr>
+        <p:txBody>
+          <a:bodyPr wrap="square" lIns="0" tIns="0" rIns="0" bIns="0" rtlCol="0" anchor="ctr"/>
+          <a:lstStyle/>
+          <a:p>
+            <a:pPr marL="0" indent="0" algn="r">
+              <a:buNone/>
+            </a:pPr>
+            <a:r>
+              <a:rPr lang="en-US" sz="1300" b="1" dirty="0">
+                <a:solidFill>
+                  <a:srgbClr val="C0392B"/>
+                </a:solidFill>
+                <a:latin typeface="Georgia" pitchFamily="34" charset="0"/>
+                <a:ea typeface="Georgia" pitchFamily="34" charset="-122"/>
+                <a:cs typeface="Georgia" pitchFamily="34" charset="-120"/>
+              </a:rPr>
+              <a:t>−170</a:t>
+            </a:r>
+            <a:endParaRPr lang="en-US" sz="1300" dirty="0"/>
+          </a:p>
+        </p:txBody>
+      </p:sp>
+      <p:sp>
+        <p:nvSpPr>
+          <p:cNvPr id="25" name="Text 22"/>
+          <p:cNvSpPr/>
+          <p:nvPr/>
+        </p:nvSpPr>
+        <p:spPr>
+          <a:xfrm>
+            <a:off x="10012680" y="3310128"/>
+            <a:ext cx="1280160" cy="347472"/>
+          </a:xfrm>
+          <a:prstGeom prst="rect">
+            <a:avLst/>
+          </a:prstGeom>
+          <a:noFill/>
+          <a:ln/>
+        </p:spPr>
+        <p:txBody>
+          <a:bodyPr wrap="square" lIns="0" tIns="0" rIns="0" bIns="0" rtlCol="0" anchor="ctr"/>
+          <a:lstStyle/>
+          <a:p>
+            <a:pPr marL="0" indent="0">
+              <a:buNone/>
+            </a:pPr>
+            <a:r>
+              <a:rPr lang="en-US" sz="1300" dirty="0">
+                <a:solidFill>
+                  <a:srgbClr val="23191B"/>
+                </a:solidFill>
+                <a:latin typeface="Calibri" pitchFamily="34" charset="0"/>
+                <a:ea typeface="Calibri" pitchFamily="34" charset="-122"/>
+                <a:cs typeface="Calibri" pitchFamily="34" charset="-120"/>
+              </a:rPr>
+              <a:t>N. Zelanda</a:t>
+            </a:r>
+            <a:endParaRPr lang="en-US" sz="1300" dirty="0"/>
+          </a:p>
+        </p:txBody>
+      </p:sp>
+      <p:sp>
+        <p:nvSpPr>
+          <p:cNvPr id="26" name="Text 23"/>
+          <p:cNvSpPr/>
+          <p:nvPr/>
+        </p:nvSpPr>
+        <p:spPr>
+          <a:xfrm>
+            <a:off x="11247120" y="3310128"/>
+            <a:ext cx="640080" cy="347472"/>
+          </a:xfrm>
+          <a:prstGeom prst="rect">
+            <a:avLst/>
+          </a:prstGeom>
+          <a:noFill/>
+          <a:ln/>
+        </p:spPr>
+        <p:txBody>
+          <a:bodyPr wrap="square" lIns="0" tIns="0" rIns="0" bIns="0" rtlCol="0" anchor="ctr"/>
+          <a:lstStyle/>
+          <a:p>
+            <a:pPr marL="0" indent="0" algn="r">
+              <a:buNone/>
+            </a:pPr>
+            <a:r>
+              <a:rPr lang="en-US" sz="1300" b="1" dirty="0">
+                <a:solidFill>
+                  <a:srgbClr val="C0392B"/>
+                </a:solidFill>
+                <a:latin typeface="Georgia" pitchFamily="34" charset="0"/>
+                <a:ea typeface="Georgia" pitchFamily="34" charset="-122"/>
+                <a:cs typeface="Georgia" pitchFamily="34" charset="-120"/>
+              </a:rPr>
+              <a:t>−168</a:t>
+            </a:r>
+            <a:endParaRPr lang="en-US" sz="1300" dirty="0"/>
+          </a:p>
+        </p:txBody>
+      </p:sp>
+      <p:sp>
+        <p:nvSpPr>
+          <p:cNvPr id="27" name="Text 24"/>
+          <p:cNvSpPr/>
+          <p:nvPr/>
+        </p:nvSpPr>
+        <p:spPr>
+          <a:xfrm>
+            <a:off x="10012680" y="3694176"/>
+            <a:ext cx="1280160" cy="347472"/>
+          </a:xfrm>
+          <a:prstGeom prst="rect">
+            <a:avLst/>
+          </a:prstGeom>
+          <a:noFill/>
+          <a:ln/>
+        </p:spPr>
+        <p:txBody>
+          <a:bodyPr wrap="square" lIns="0" tIns="0" rIns="0" bIns="0" rtlCol="0" anchor="ctr"/>
+          <a:lstStyle/>
+          <a:p>
+            <a:pPr marL="0" indent="0">
+              <a:buNone/>
+            </a:pPr>
+            <a:r>
+              <a:rPr lang="en-US" sz="1300" dirty="0">
+                <a:solidFill>
+                  <a:srgbClr val="23191B"/>
+                </a:solidFill>
+                <a:latin typeface="Calibri" pitchFamily="34" charset="0"/>
+                <a:ea typeface="Calibri" pitchFamily="34" charset="-122"/>
+                <a:cs typeface="Calibri" pitchFamily="34" charset="-120"/>
+              </a:rPr>
+              <a:t>Curaçao</a:t>
+            </a:r>
+            <a:endParaRPr lang="en-US" sz="1300" dirty="0"/>
+          </a:p>
+        </p:txBody>
+      </p:sp>
+      <p:sp>
+        <p:nvSpPr>
+          <p:cNvPr id="28" name="Text 25"/>
+          <p:cNvSpPr/>
+          <p:nvPr/>
+        </p:nvSpPr>
+        <p:spPr>
+          <a:xfrm>
+            <a:off x="11247120" y="3694176"/>
+            <a:ext cx="640080" cy="347472"/>
+          </a:xfrm>
+          <a:prstGeom prst="rect">
+            <a:avLst/>
+          </a:prstGeom>
+          <a:noFill/>
+          <a:ln/>
+        </p:spPr>
+        <p:txBody>
+          <a:bodyPr wrap="square" lIns="0" tIns="0" rIns="0" bIns="0" rtlCol="0" anchor="ctr"/>
+          <a:lstStyle/>
+          <a:p>
+            <a:pPr marL="0" indent="0" algn="r">
+              <a:buNone/>
+            </a:pPr>
+            <a:r>
+              <a:rPr lang="en-US" sz="1300" b="1" dirty="0">
+                <a:solidFill>
+                  <a:srgbClr val="C0392B"/>
+                </a:solidFill>
+                <a:latin typeface="Georgia" pitchFamily="34" charset="0"/>
+                <a:ea typeface="Georgia" pitchFamily="34" charset="-122"/>
+                <a:cs typeface="Georgia" pitchFamily="34" charset="-120"/>
+              </a:rPr>
+              <a:t>−160</a:t>
+            </a:r>
+            <a:endParaRPr lang="en-US" sz="1300" dirty="0"/>
+          </a:p>
+        </p:txBody>
+      </p:sp>
+      <p:sp>
+        <p:nvSpPr>
+          <p:cNvPr id="29" name="Shape 26"/>
+          <p:cNvSpPr/>
+          <p:nvPr/>
+        </p:nvSpPr>
+        <p:spPr>
+          <a:xfrm>
+            <a:off x="7818120" y="4224528"/>
+            <a:ext cx="4069080" cy="1828800"/>
+          </a:xfrm>
+          <a:prstGeom prst="rect">
+            <a:avLst/>
+          </a:prstGeom>
+          <a:solidFill>
+            <a:srgbClr val="FBF7F4"/>
+          </a:solidFill>
+          <a:ln w="9525">
+            <a:solidFill>
+              <a:srgbClr val="E7DEDF"/>
+            </a:solidFill>
+            <a:prstDash val="solid"/>
+          </a:ln>
+        </p:spPr>
+        <p:txBody>
+          <a:bodyPr/>
+          <a:lstStyle/>
+          <a:p>
+            <a:endParaRPr lang="es-AR"/>
+          </a:p>
+        </p:txBody>
+      </p:sp>
+      <p:sp>
+        <p:nvSpPr>
+          <p:cNvPr id="30" name="Shape 27"/>
+          <p:cNvSpPr/>
+          <p:nvPr/>
+        </p:nvSpPr>
+        <p:spPr>
+          <a:xfrm>
+            <a:off x="7818120" y="4224528"/>
+            <a:ext cx="73152" cy="1828800"/>
+          </a:xfrm>
+          <a:prstGeom prst="rect">
+            <a:avLst/>
+          </a:prstGeom>
+          <a:solidFill>
+            <a:srgbClr val="B8862B"/>
+          </a:solidFill>
+          <a:ln/>
+        </p:spPr>
+        <p:txBody>
+          <a:bodyPr/>
+          <a:lstStyle/>
+          <a:p>
+            <a:endParaRPr lang="es-AR"/>
+          </a:p>
+        </p:txBody>
+      </p:sp>
+      <p:sp>
+        <p:nvSpPr>
+          <p:cNvPr id="31" name="Text 28"/>
+          <p:cNvSpPr/>
+          <p:nvPr/>
+        </p:nvSpPr>
+        <p:spPr>
+          <a:xfrm>
+            <a:off x="8065008" y="4370832"/>
+            <a:ext cx="3703320" cy="1600200"/>
+          </a:xfrm>
+          <a:prstGeom prst="rect">
+            <a:avLst/>
+          </a:prstGeom>
+          <a:noFill/>
+          <a:ln/>
+        </p:spPr>
+        <p:txBody>
+          <a:bodyPr wrap="square" lIns="0" tIns="0" rIns="0" bIns="0" rtlCol="0" anchor="t"/>
+          <a:lstStyle/>
+          <a:p>
+            <a:pPr marL="0" indent="0">
+              <a:lnSpc>
+                <a:spcPct val="107000"/>
+              </a:lnSpc>
+              <a:buNone/>
+            </a:pPr>
+            <a:r>
+              <a:rPr lang="en-US" sz="1200" b="1" dirty="0">
+                <a:solidFill>
+                  <a:srgbClr val="8E1F3D"/>
+                </a:solidFill>
+                <a:latin typeface="Calibri" pitchFamily="34" charset="0"/>
+                <a:ea typeface="Calibri" pitchFamily="34" charset="-122"/>
+                <a:cs typeface="Calibri" pitchFamily="34" charset="-120"/>
+              </a:rPr>
+              <a:t>Argentina lidera con +161 </a:t>
+            </a:r>
+            <a:r>
+              <a:rPr lang="en-US" sz="1200" dirty="0">
+                <a:solidFill>
+                  <a:srgbClr val="23191B"/>
+                </a:solidFill>
+                <a:latin typeface="Calibri" pitchFamily="34" charset="0"/>
+                <a:ea typeface="Calibri" pitchFamily="34" charset="-122"/>
+                <a:cs typeface="Calibri" pitchFamily="34" charset="-120"/>
+              </a:rPr>
+              <a:t>(plantel de €575 M, el 44 % del de Inglaterra). Pero los mayores residuos negativos también son planteles de valor bajo: cuando la inversión es chica, el valor casi no discrimina y el modelo pierde poder.</a:t>
+            </a:r>
+            <a:endParaRPr lang="en-US" sz="1200" dirty="0"/>
+          </a:p>
+        </p:txBody>
+      </p:sp>
+    </p:spTree>
+  </p:cSld>
+  <p:clrMapOvr>
+    <a:masterClrMapping/>
+  </p:clrMapOvr>
+</p:sld>
+</file>
+
+<file path=ppt/slides/slide9.xml><?xml version="1.0" encoding="utf-8"?>
+<p:sld xmlns:a="http://schemas.openxmlformats.org/drawingml/2006/main" xmlns:r="http://schemas.openxmlformats.org/officeDocument/2006/relationships" xmlns:p="http://schemas.openxmlformats.org/presentationml/2006/main">
+  <p:cSld name="Slide 9">
     <p:bg>
       <p:bgPr>
         <a:solidFill>
@@ -6706,7 +8010,7 @@
                 <a:ea typeface="Georgia" pitchFamily="34" charset="-122"/>
                 <a:cs typeface="Georgia" pitchFamily="34" charset="-120"/>
               </a:rPr>
-              <a:t>06</a:t>
+              <a:t>07</a:t>
             </a:r>
             <a:endParaRPr lang="en-US" sz="9600" dirty="0"/>
           </a:p>
@@ -6992,7 +8296,7 @@
                 <a:ea typeface="Calibri" pitchFamily="34" charset="-122"/>
                 <a:cs typeface="Calibri" pitchFamily="34" charset="-120"/>
               </a:rPr>
-              <a:t>Correlación fuerte con el puntaje FIFA (r ≈ 0,77). El mejor ajuste es cuadrático y cóncavo: invertir mejora, pero cada euro adicional aporta menos. Hay un techo de eficiencia cerca de €1,30 B.</a:t>
+              <a:t>Correlación fuerte con el puntaje FIFA (r ≈ 0,76). El mejor ajuste es cuadrático y cóncavo: invertir mejora, pero cada euro adicional aporta menos. Hay un techo de eficiencia cerca de €1,30 B.</a:t>
             </a:r>
             <a:endParaRPr lang="en-US" sz="1250" dirty="0"/>
           </a:p>
@@ -7211,732 +8515,6 @@
               <a:t>Limitación: el modelo explica el 62,9 % de la varianza y pierde poder en el extremo de baja inversión.</a:t>
             </a:r>
             <a:endParaRPr lang="en-US" sz="1300" dirty="0"/>
-          </a:p>
-        </p:txBody>
-      </p:sp>
-    </p:spTree>
-  </p:cSld>
-  <p:clrMapOvr>
-    <a:masterClrMapping/>
-  </p:clrMapOvr>
-</p:sld>
-</file>
-
-<file path=ppt/slides/slide9.xml><?xml version="1.0" encoding="utf-8"?>
-<p:sld xmlns:a="http://schemas.openxmlformats.org/drawingml/2006/main" xmlns:r="http://schemas.openxmlformats.org/officeDocument/2006/relationships" xmlns:p="http://schemas.openxmlformats.org/presentationml/2006/main">
-  <p:cSld name="Slide 9">
-    <p:bg>
-      <p:bgPr>
-        <a:solidFill>
-          <a:srgbClr val="FFFFFF"/>
-        </a:solidFill>
-        <a:effectLst/>
-      </p:bgPr>
-    </p:bg>
-    <p:spTree>
-      <p:nvGrpSpPr>
-        <p:cNvPr id="1" name=""/>
-        <p:cNvGrpSpPr/>
-        <p:nvPr/>
-      </p:nvGrpSpPr>
-      <p:grpSpPr>
-        <a:xfrm>
-          <a:off x="0" y="0"/>
-          <a:ext cx="0" cy="0"/>
-          <a:chOff x="0" y="0"/>
-          <a:chExt cx="0" cy="0"/>
-        </a:xfrm>
-      </p:grpSpPr>
-      <p:sp>
-        <p:nvSpPr>
-          <p:cNvPr id="2" name="Text 0"/>
-          <p:cNvSpPr/>
-          <p:nvPr/>
-        </p:nvSpPr>
-        <p:spPr>
-          <a:xfrm>
-            <a:off x="10040112" y="164592"/>
-            <a:ext cx="1828800" cy="1371600"/>
-          </a:xfrm>
-          <a:prstGeom prst="rect">
-            <a:avLst/>
-          </a:prstGeom>
-          <a:noFill/>
-          <a:ln/>
-        </p:spPr>
-        <p:txBody>
-          <a:bodyPr wrap="square" lIns="0" tIns="0" rIns="0" bIns="0" rtlCol="0" anchor="t"/>
-          <a:lstStyle/>
-          <a:p>
-            <a:pPr marL="0" indent="0" algn="r">
-              <a:buNone/>
-            </a:pPr>
-            <a:r>
-              <a:rPr lang="en-US" sz="9600" b="1" dirty="0">
-                <a:solidFill>
-                  <a:srgbClr val="F1E2E6"/>
-                </a:solidFill>
-                <a:latin typeface="Georgia" pitchFamily="34" charset="0"/>
-                <a:ea typeface="Georgia" pitchFamily="34" charset="-122"/>
-                <a:cs typeface="Georgia" pitchFamily="34" charset="-120"/>
-              </a:rPr>
-              <a:t>07</a:t>
-            </a:r>
-            <a:endParaRPr lang="en-US" sz="9600" dirty="0"/>
-          </a:p>
-        </p:txBody>
-      </p:sp>
-      <p:sp>
-        <p:nvSpPr>
-          <p:cNvPr id="3" name="Text 1"/>
-          <p:cNvSpPr/>
-          <p:nvPr/>
-        </p:nvSpPr>
-        <p:spPr>
-          <a:xfrm>
-            <a:off x="777240" y="502920"/>
-            <a:ext cx="8229600" cy="274320"/>
-          </a:xfrm>
-          <a:prstGeom prst="rect">
-            <a:avLst/>
-          </a:prstGeom>
-          <a:noFill/>
-          <a:ln/>
-        </p:spPr>
-        <p:txBody>
-          <a:bodyPr wrap="square" lIns="0" tIns="0" rIns="0" bIns="0" rtlCol="0" anchor="ctr"/>
-          <a:lstStyle/>
-          <a:p>
-            <a:pPr marL="0" indent="0" algn="l">
-              <a:buNone/>
-            </a:pPr>
-            <a:r>
-              <a:rPr lang="en-US" sz="1150" b="1" kern="0" spc="300" dirty="0">
-                <a:solidFill>
-                  <a:srgbClr val="B8862B"/>
-                </a:solidFill>
-                <a:latin typeface="Calibri" pitchFamily="34" charset="0"/>
-                <a:ea typeface="Calibri" pitchFamily="34" charset="-122"/>
-                <a:cs typeface="Calibri" pitchFamily="34" charset="-120"/>
-              </a:rPr>
-              <a:t>REFLEXIÓN METODOLÓGICA</a:t>
-            </a:r>
-            <a:endParaRPr lang="en-US" sz="1150" dirty="0"/>
-          </a:p>
-        </p:txBody>
-      </p:sp>
-      <p:sp>
-        <p:nvSpPr>
-          <p:cNvPr id="4" name="Text 2"/>
-          <p:cNvSpPr/>
-          <p:nvPr/>
-        </p:nvSpPr>
-        <p:spPr>
-          <a:xfrm>
-            <a:off x="777240" y="896112"/>
-            <a:ext cx="10058400" cy="914400"/>
-          </a:xfrm>
-          <a:prstGeom prst="rect">
-            <a:avLst/>
-          </a:prstGeom>
-          <a:noFill/>
-          <a:ln/>
-        </p:spPr>
-        <p:txBody>
-          <a:bodyPr wrap="square" lIns="0" tIns="0" rIns="0" bIns="0" rtlCol="0" anchor="t"/>
-          <a:lstStyle/>
-          <a:p>
-            <a:pPr marL="0" indent="0" algn="l">
-              <a:lnSpc>
-                <a:spcPct val="98000"/>
-              </a:lnSpc>
-              <a:buNone/>
-            </a:pPr>
-            <a:r>
-              <a:rPr lang="en-US" sz="4000" b="1" dirty="0">
-                <a:solidFill>
-                  <a:srgbClr val="23191B"/>
-                </a:solidFill>
-                <a:latin typeface="Georgia" pitchFamily="34" charset="0"/>
-                <a:ea typeface="Georgia" pitchFamily="34" charset="-122"/>
-                <a:cs typeface="Georgia" pitchFamily="34" charset="-120"/>
-              </a:rPr>
-              <a:t>Cómo se </a:t>
-            </a:r>
-            <a:r>
-              <a:rPr lang="en-US" sz="4000" b="1" dirty="0">
-                <a:solidFill>
-                  <a:srgbClr val="8E1F3D"/>
-                </a:solidFill>
-                <a:latin typeface="Georgia" pitchFamily="34" charset="0"/>
-                <a:ea typeface="Georgia" pitchFamily="34" charset="-122"/>
-                <a:cs typeface="Georgia" pitchFamily="34" charset="-120"/>
-              </a:rPr>
-              <a:t>hizo</a:t>
-            </a:r>
-            <a:endParaRPr lang="en-US" sz="4000" dirty="0"/>
-          </a:p>
-        </p:txBody>
-      </p:sp>
-      <p:sp>
-        <p:nvSpPr>
-          <p:cNvPr id="5" name="Shape 3"/>
-          <p:cNvSpPr/>
-          <p:nvPr/>
-        </p:nvSpPr>
-        <p:spPr>
-          <a:xfrm>
-            <a:off x="777240" y="1965960"/>
-            <a:ext cx="5212080" cy="3383280"/>
-          </a:xfrm>
-          <a:prstGeom prst="rect">
-            <a:avLst/>
-          </a:prstGeom>
-          <a:solidFill>
-            <a:srgbClr val="FBF7F4"/>
-          </a:solidFill>
-          <a:ln w="12700">
-            <a:solidFill>
-              <a:srgbClr val="E7DEDF"/>
-            </a:solidFill>
-            <a:prstDash val="solid"/>
-          </a:ln>
-        </p:spPr>
-        <p:txBody>
-          <a:bodyPr/>
-          <a:lstStyle/>
-          <a:p>
-            <a:endParaRPr lang="es-AR"/>
-          </a:p>
-        </p:txBody>
-      </p:sp>
-      <p:sp>
-        <p:nvSpPr>
-          <p:cNvPr id="6" name="Shape 4"/>
-          <p:cNvSpPr/>
-          <p:nvPr/>
-        </p:nvSpPr>
-        <p:spPr>
-          <a:xfrm>
-            <a:off x="777240" y="1965960"/>
-            <a:ext cx="5212080" cy="64008"/>
-          </a:xfrm>
-          <a:prstGeom prst="rect">
-            <a:avLst/>
-          </a:prstGeom>
-          <a:solidFill>
-            <a:srgbClr val="8E1F3D"/>
-          </a:solidFill>
-          <a:ln/>
-        </p:spPr>
-        <p:txBody>
-          <a:bodyPr/>
-          <a:lstStyle/>
-          <a:p>
-            <a:endParaRPr lang="es-AR"/>
-          </a:p>
-        </p:txBody>
-      </p:sp>
-      <p:sp>
-        <p:nvSpPr>
-          <p:cNvPr id="7" name="Text 5"/>
-          <p:cNvSpPr/>
-          <p:nvPr/>
-        </p:nvSpPr>
-        <p:spPr>
-          <a:xfrm>
-            <a:off x="1005840" y="2176272"/>
-            <a:ext cx="4754880" cy="320040"/>
-          </a:xfrm>
-          <a:prstGeom prst="rect">
-            <a:avLst/>
-          </a:prstGeom>
-          <a:noFill/>
-          <a:ln/>
-        </p:spPr>
-        <p:txBody>
-          <a:bodyPr wrap="square" lIns="0" tIns="0" rIns="0" bIns="0" rtlCol="0" anchor="ctr"/>
-          <a:lstStyle/>
-          <a:p>
-            <a:pPr marL="0" indent="0">
-              <a:buNone/>
-            </a:pPr>
-            <a:r>
-              <a:rPr lang="en-US" sz="1600" b="1" dirty="0">
-                <a:solidFill>
-                  <a:srgbClr val="8E1F3D"/>
-                </a:solidFill>
-                <a:latin typeface="Georgia" pitchFamily="34" charset="0"/>
-                <a:ea typeface="Georgia" pitchFamily="34" charset="-122"/>
-                <a:cs typeface="Georgia" pitchFamily="34" charset="-120"/>
-              </a:rPr>
-              <a:t>PIPELINE DE DATOS</a:t>
-            </a:r>
-            <a:endParaRPr lang="en-US" sz="1600" dirty="0"/>
-          </a:p>
-        </p:txBody>
-      </p:sp>
-      <p:sp>
-        <p:nvSpPr>
-          <p:cNvPr id="8" name="Text 6"/>
-          <p:cNvSpPr/>
-          <p:nvPr/>
-        </p:nvSpPr>
-        <p:spPr>
-          <a:xfrm>
-            <a:off x="1005840" y="2578608"/>
-            <a:ext cx="4754880" cy="1828800"/>
-          </a:xfrm>
-          <a:prstGeom prst="rect">
-            <a:avLst/>
-          </a:prstGeom>
-          <a:noFill/>
-          <a:ln/>
-        </p:spPr>
-        <p:txBody>
-          <a:bodyPr wrap="square" lIns="0" tIns="0" rIns="0" bIns="0" rtlCol="0" anchor="t"/>
-          <a:lstStyle/>
-          <a:p>
-            <a:pPr marL="177800" indent="-177800">
-              <a:lnSpc>
-                <a:spcPct val="105000"/>
-              </a:lnSpc>
-              <a:spcAft>
-                <a:spcPts val="800"/>
-              </a:spcAft>
-              <a:buSzPct val="100000"/>
-              <a:buChar char="•"/>
-            </a:pPr>
-            <a:r>
-              <a:rPr lang="en-US" sz="1250" dirty="0">
-                <a:solidFill>
-                  <a:srgbClr val="23191B"/>
-                </a:solidFill>
-                <a:latin typeface="Calibri" pitchFamily="34" charset="0"/>
-                <a:ea typeface="Calibri" pitchFamily="34" charset="-122"/>
-                <a:cs typeface="Calibri" pitchFamily="34" charset="-120"/>
-              </a:rPr>
-              <a:t>Integración por merge (left join) de los dos datasets.</a:t>
-            </a:r>
-            <a:endParaRPr lang="en-US" sz="1250" dirty="0"/>
-          </a:p>
-          <a:p>
-            <a:pPr marL="177800" indent="-177800">
-              <a:lnSpc>
-                <a:spcPct val="105000"/>
-              </a:lnSpc>
-              <a:spcAft>
-                <a:spcPts val="800"/>
-              </a:spcAft>
-              <a:buSzPct val="100000"/>
-              <a:buChar char="•"/>
-            </a:pPr>
-            <a:r>
-              <a:rPr lang="en-US" sz="1250" dirty="0">
-                <a:solidFill>
-                  <a:srgbClr val="23191B"/>
-                </a:solidFill>
-                <a:latin typeface="Calibri" pitchFamily="34" charset="0"/>
-                <a:ea typeface="Calibri" pitchFamily="34" charset="-122"/>
-                <a:cs typeface="Calibri" pitchFamily="34" charset="-120"/>
-              </a:rPr>
-              <a:t>Normalización de nombres: codificación de Curaçao, homologación de RD Congo, réplica del Reino Unido para Inglaterra y Escocia.</a:t>
-            </a:r>
-            <a:endParaRPr lang="en-US" sz="1250" dirty="0"/>
-          </a:p>
-          <a:p>
-            <a:pPr marL="177800" indent="-177800">
-              <a:lnSpc>
-                <a:spcPct val="105000"/>
-              </a:lnSpc>
-              <a:spcAft>
-                <a:spcPts val="800"/>
-              </a:spcAft>
-              <a:buSzPct val="100000"/>
-              <a:buChar char="•"/>
-            </a:pPr>
-            <a:r>
-              <a:rPr lang="en-US" sz="1250" dirty="0">
-                <a:solidFill>
-                  <a:srgbClr val="23191B"/>
-                </a:solidFill>
-                <a:latin typeface="Calibri" pitchFamily="34" charset="0"/>
-                <a:ea typeface="Calibri" pitchFamily="34" charset="-122"/>
-                <a:cs typeface="Calibri" pitchFamily="34" charset="-120"/>
-              </a:rPr>
-              <a:t>Imputación manual del PBI de Curaçao y cálculo del PBI per cápita.</a:t>
-            </a:r>
-            <a:endParaRPr lang="en-US" sz="1250" dirty="0"/>
-          </a:p>
-        </p:txBody>
-      </p:sp>
-      <p:sp>
-        <p:nvSpPr>
-          <p:cNvPr id="9" name="Text 7"/>
-          <p:cNvSpPr/>
-          <p:nvPr/>
-        </p:nvSpPr>
-        <p:spPr>
-          <a:xfrm>
-            <a:off x="1005840" y="4709160"/>
-            <a:ext cx="4754880" cy="548640"/>
-          </a:xfrm>
-          <a:prstGeom prst="rect">
-            <a:avLst/>
-          </a:prstGeom>
-          <a:noFill/>
-          <a:ln/>
-        </p:spPr>
-        <p:txBody>
-          <a:bodyPr wrap="square" lIns="0" tIns="0" rIns="0" bIns="0" rtlCol="0" anchor="t"/>
-          <a:lstStyle/>
-          <a:p>
-            <a:pPr marL="0" indent="0">
-              <a:lnSpc>
-                <a:spcPct val="105000"/>
-              </a:lnSpc>
-              <a:buNone/>
-            </a:pPr>
-            <a:r>
-              <a:rPr lang="en-US" sz="1150" b="1" i="1" dirty="0">
-                <a:solidFill>
-                  <a:srgbClr val="B8862B"/>
-                </a:solidFill>
-                <a:latin typeface="Calibri" pitchFamily="34" charset="0"/>
-                <a:ea typeface="Calibri" pitchFamily="34" charset="-122"/>
-                <a:cs typeface="Calibri" pitchFamily="34" charset="-120"/>
-              </a:rPr>
-              <a:t>Stack:  </a:t>
-            </a:r>
-            <a:r>
-              <a:rPr lang="en-US" sz="1150" i="1" dirty="0">
-                <a:solidFill>
-                  <a:srgbClr val="6E5E62"/>
-                </a:solidFill>
-                <a:latin typeface="Calibri" pitchFamily="34" charset="0"/>
-                <a:ea typeface="Calibri" pitchFamily="34" charset="-122"/>
-                <a:cs typeface="Calibri" pitchFamily="34" charset="-120"/>
-              </a:rPr>
-              <a:t>Python · pandas · NumPy · Matplotlib · Seaborn · SciPy · </a:t>
-            </a:r>
-            <a:r>
-              <a:rPr lang="en-US" sz="1150" i="1" dirty="0" err="1">
-                <a:solidFill>
-                  <a:srgbClr val="6E5E62"/>
-                </a:solidFill>
-                <a:latin typeface="Calibri" pitchFamily="34" charset="0"/>
-                <a:ea typeface="Calibri" pitchFamily="34" charset="-122"/>
-                <a:cs typeface="Calibri" pitchFamily="34" charset="-120"/>
-              </a:rPr>
-              <a:t>SymPy</a:t>
-            </a:r>
-            <a:r>
-              <a:rPr lang="en-US" sz="1150" i="1" dirty="0">
-                <a:solidFill>
-                  <a:srgbClr val="6E5E62"/>
-                </a:solidFill>
-                <a:latin typeface="Calibri" pitchFamily="34" charset="0"/>
-                <a:ea typeface="Calibri" pitchFamily="34" charset="-122"/>
-                <a:cs typeface="Calibri" pitchFamily="34" charset="-120"/>
-              </a:rPr>
-              <a:t>.</a:t>
-            </a:r>
-            <a:endParaRPr lang="en-US" sz="1150" dirty="0"/>
-          </a:p>
-        </p:txBody>
-      </p:sp>
-      <p:sp>
-        <p:nvSpPr>
-          <p:cNvPr id="10" name="Shape 8"/>
-          <p:cNvSpPr/>
-          <p:nvPr/>
-        </p:nvSpPr>
-        <p:spPr>
-          <a:xfrm>
-            <a:off x="6199632" y="1965960"/>
-            <a:ext cx="5212080" cy="3383280"/>
-          </a:xfrm>
-          <a:prstGeom prst="rect">
-            <a:avLst/>
-          </a:prstGeom>
-          <a:solidFill>
-            <a:srgbClr val="FBF7F4"/>
-          </a:solidFill>
-          <a:ln w="12700">
-            <a:solidFill>
-              <a:srgbClr val="E7DEDF"/>
-            </a:solidFill>
-            <a:prstDash val="solid"/>
-          </a:ln>
-        </p:spPr>
-        <p:txBody>
-          <a:bodyPr/>
-          <a:lstStyle/>
-          <a:p>
-            <a:endParaRPr lang="es-AR"/>
-          </a:p>
-        </p:txBody>
-      </p:sp>
-      <p:sp>
-        <p:nvSpPr>
-          <p:cNvPr id="11" name="Shape 9"/>
-          <p:cNvSpPr/>
-          <p:nvPr/>
-        </p:nvSpPr>
-        <p:spPr>
-          <a:xfrm>
-            <a:off x="6199632" y="1965960"/>
-            <a:ext cx="5212080" cy="64008"/>
-          </a:xfrm>
-          <a:prstGeom prst="rect">
-            <a:avLst/>
-          </a:prstGeom>
-          <a:solidFill>
-            <a:srgbClr val="B8862B"/>
-          </a:solidFill>
-          <a:ln/>
-        </p:spPr>
-        <p:txBody>
-          <a:bodyPr/>
-          <a:lstStyle/>
-          <a:p>
-            <a:endParaRPr lang="es-AR"/>
-          </a:p>
-        </p:txBody>
-      </p:sp>
-      <p:sp>
-        <p:nvSpPr>
-          <p:cNvPr id="12" name="Text 10"/>
-          <p:cNvSpPr/>
-          <p:nvPr/>
-        </p:nvSpPr>
-        <p:spPr>
-          <a:xfrm>
-            <a:off x="6428232" y="2176272"/>
-            <a:ext cx="4754880" cy="320040"/>
-          </a:xfrm>
-          <a:prstGeom prst="rect">
-            <a:avLst/>
-          </a:prstGeom>
-          <a:noFill/>
-          <a:ln/>
-        </p:spPr>
-        <p:txBody>
-          <a:bodyPr wrap="square" lIns="0" tIns="0" rIns="0" bIns="0" rtlCol="0" anchor="ctr"/>
-          <a:lstStyle/>
-          <a:p>
-            <a:pPr marL="0" indent="0">
-              <a:buNone/>
-            </a:pPr>
-            <a:r>
-              <a:rPr lang="en-US" sz="1600" b="1" dirty="0">
-                <a:solidFill>
-                  <a:srgbClr val="8E1F3D"/>
-                </a:solidFill>
-                <a:latin typeface="Georgia" pitchFamily="34" charset="0"/>
-                <a:ea typeface="Georgia" pitchFamily="34" charset="-122"/>
-                <a:cs typeface="Georgia" pitchFamily="34" charset="-120"/>
-              </a:rPr>
-              <a:t>EL ROL DE LA IA — Y SU LÍMITE</a:t>
-            </a:r>
-            <a:endParaRPr lang="en-US" sz="1600" dirty="0"/>
-          </a:p>
-        </p:txBody>
-      </p:sp>
-      <p:sp>
-        <p:nvSpPr>
-          <p:cNvPr id="13" name="Text 11"/>
-          <p:cNvSpPr/>
-          <p:nvPr/>
-        </p:nvSpPr>
-        <p:spPr>
-          <a:xfrm>
-            <a:off x="6428232" y="2578608"/>
-            <a:ext cx="4754880" cy="1005840"/>
-          </a:xfrm>
-          <a:prstGeom prst="rect">
-            <a:avLst/>
-          </a:prstGeom>
-          <a:noFill/>
-          <a:ln/>
-        </p:spPr>
-        <p:txBody>
-          <a:bodyPr wrap="square" lIns="0" tIns="0" rIns="0" bIns="0" rtlCol="0" anchor="t"/>
-          <a:lstStyle/>
-          <a:p>
-            <a:pPr marL="0" indent="0">
-              <a:lnSpc>
-                <a:spcPct val="108000"/>
-              </a:lnSpc>
-              <a:buNone/>
-            </a:pPr>
-            <a:r>
-              <a:rPr lang="en-US" sz="1250" dirty="0">
-                <a:solidFill>
-                  <a:srgbClr val="23191B"/>
-                </a:solidFill>
-                <a:latin typeface="Calibri" pitchFamily="34" charset="0"/>
-                <a:ea typeface="Calibri" pitchFamily="34" charset="-122"/>
-                <a:cs typeface="Calibri" pitchFamily="34" charset="-120"/>
-              </a:rPr>
-              <a:t>La IA asistió en tareas acotadas: sugerir y comparar los modelos, calcular las derivadas con SymPy e interpretar su significado económico.</a:t>
-            </a:r>
-            <a:endParaRPr lang="en-US" sz="1250" dirty="0"/>
-          </a:p>
-        </p:txBody>
-      </p:sp>
-      <p:sp>
-        <p:nvSpPr>
-          <p:cNvPr id="14" name="Text 12"/>
-          <p:cNvSpPr/>
-          <p:nvPr/>
-        </p:nvSpPr>
-        <p:spPr>
-          <a:xfrm>
-            <a:off x="6428232" y="3703320"/>
-            <a:ext cx="4754880" cy="1554480"/>
-          </a:xfrm>
-          <a:prstGeom prst="rect">
-            <a:avLst/>
-          </a:prstGeom>
-          <a:noFill/>
-          <a:ln/>
-        </p:spPr>
-        <p:txBody>
-          <a:bodyPr wrap="square" lIns="0" tIns="0" rIns="0" bIns="0" rtlCol="0" anchor="t"/>
-          <a:lstStyle/>
-          <a:p>
-            <a:pPr marL="0" indent="0">
-              <a:lnSpc>
-                <a:spcPct val="108000"/>
-              </a:lnSpc>
-              <a:buNone/>
-            </a:pPr>
-            <a:r>
-              <a:rPr lang="en-US" sz="1250" b="1" dirty="0">
-                <a:solidFill>
-                  <a:srgbClr val="8E1F3D"/>
-                </a:solidFill>
-                <a:latin typeface="Calibri" pitchFamily="34" charset="0"/>
-                <a:ea typeface="Calibri" pitchFamily="34" charset="-122"/>
-                <a:cs typeface="Calibri" pitchFamily="34" charset="-120"/>
-              </a:rPr>
-              <a:t>Aprendizaje clave: auditar críticamente. </a:t>
-            </a:r>
-            <a:r>
-              <a:rPr lang="en-US" sz="1250" dirty="0">
-                <a:solidFill>
-                  <a:srgbClr val="23191B"/>
-                </a:solidFill>
-                <a:latin typeface="Calibri" pitchFamily="34" charset="0"/>
-                <a:ea typeface="Calibri" pitchFamily="34" charset="-122"/>
-                <a:cs typeface="Calibri" pitchFamily="34" charset="-120"/>
-              </a:rPr>
-              <a:t>Al sospechar que Argentina era un outlier aislado, la IA reforzó ese sesgo con teorías; al verificarlo con los datos, resultó </a:t>
-            </a:r>
-            <a:r>
-              <a:rPr lang="en-US" sz="1250" b="1" i="1" dirty="0">
-                <a:solidFill>
-                  <a:srgbClr val="23191B"/>
-                </a:solidFill>
-                <a:latin typeface="Calibri" pitchFamily="34" charset="0"/>
-                <a:ea typeface="Calibri" pitchFamily="34" charset="-122"/>
-                <a:cs typeface="Calibri" pitchFamily="34" charset="-120"/>
-              </a:rPr>
-              <a:t>no</a:t>
-            </a:r>
-            <a:r>
-              <a:rPr lang="en-US" sz="1250" dirty="0">
-                <a:solidFill>
-                  <a:srgbClr val="23191B"/>
-                </a:solidFill>
-                <a:latin typeface="Calibri" pitchFamily="34" charset="0"/>
-                <a:ea typeface="Calibri" pitchFamily="34" charset="-122"/>
-                <a:cs typeface="Calibri" pitchFamily="34" charset="-120"/>
-              </a:rPr>
-              <a:t> serlo.</a:t>
-            </a:r>
-            <a:endParaRPr lang="en-US" sz="1250" dirty="0"/>
-          </a:p>
-        </p:txBody>
-      </p:sp>
-      <p:sp>
-        <p:nvSpPr>
-          <p:cNvPr id="15" name="Shape 13"/>
-          <p:cNvSpPr/>
-          <p:nvPr/>
-        </p:nvSpPr>
-        <p:spPr>
-          <a:xfrm>
-            <a:off x="777240" y="5806440"/>
-            <a:ext cx="10634472" cy="0"/>
-          </a:xfrm>
-          <a:prstGeom prst="line">
-            <a:avLst/>
-          </a:prstGeom>
-          <a:noFill/>
-          <a:ln w="12700">
-            <a:solidFill>
-              <a:srgbClr val="E7DEDF"/>
-            </a:solidFill>
-            <a:prstDash val="solid"/>
-          </a:ln>
-        </p:spPr>
-        <p:txBody>
-          <a:bodyPr/>
-          <a:lstStyle/>
-          <a:p>
-            <a:endParaRPr lang="es-AR"/>
-          </a:p>
-        </p:txBody>
-      </p:sp>
-      <p:sp>
-        <p:nvSpPr>
-          <p:cNvPr id="16" name="Text 14"/>
-          <p:cNvSpPr/>
-          <p:nvPr/>
-        </p:nvSpPr>
-        <p:spPr>
-          <a:xfrm>
-            <a:off x="777240" y="5989320"/>
-            <a:ext cx="10634472" cy="365760"/>
-          </a:xfrm>
-          <a:prstGeom prst="rect">
-            <a:avLst/>
-          </a:prstGeom>
-          <a:noFill/>
-          <a:ln/>
-        </p:spPr>
-        <p:txBody>
-          <a:bodyPr wrap="square" lIns="0" tIns="0" rIns="0" bIns="0" rtlCol="0" anchor="ctr"/>
-          <a:lstStyle/>
-          <a:p>
-            <a:pPr marL="0" indent="0">
-              <a:buNone/>
-            </a:pPr>
-            <a:r>
-              <a:rPr lang="en-US" sz="1150" b="1" dirty="0">
-                <a:solidFill>
-                  <a:srgbClr val="8E1F3D"/>
-                </a:solidFill>
-                <a:latin typeface="Calibri" pitchFamily="34" charset="0"/>
-                <a:ea typeface="Calibri" pitchFamily="34" charset="-122"/>
-                <a:cs typeface="Calibri" pitchFamily="34" charset="-120"/>
-              </a:rPr>
-              <a:t>github.com/gleo1973/tp-laboratorio-mcag-1c2026</a:t>
-            </a:r>
-            <a:r>
-              <a:rPr lang="en-US" sz="1150" dirty="0">
-                <a:solidFill>
-                  <a:srgbClr val="6E5E62"/>
-                </a:solidFill>
-                <a:latin typeface="Calibri" pitchFamily="34" charset="0"/>
-                <a:ea typeface="Calibri" pitchFamily="34" charset="-122"/>
-                <a:cs typeface="Calibri" pitchFamily="34" charset="-120"/>
-              </a:rPr>
-              <a:t>      Gómez · Morichetti · Garibotti  ·  Laboratorio de Métodos Cuantitativos · FCE–UBA</a:t>
-            </a:r>
-            <a:endParaRPr lang="en-US" sz="1150" dirty="0"/>
           </a:p>
         </p:txBody>
       </p:sp>
@@ -8244,7 +8822,7 @@
 </file>
 
 <file path=ppt/theme/theme2.xml><?xml version="1.0" encoding="utf-8"?>
-<a:theme xmlns:a="http://schemas.openxmlformats.org/drawingml/2006/main" name="Tema de Office">
+<a:theme xmlns:a="http://schemas.openxmlformats.org/drawingml/2006/main" name="Office Theme">
   <a:themeElements>
     <a:clrScheme name="Office">
       <a:dk1>
